--- a/docs/ai-agent-training/slides/lab-companion-lite.pptx
+++ b/docs/ai-agent-training/slides/lab-companion-lite.pptx
@@ -1325,7 +1325,7 @@
           <a:p>
             <a:r>
               <a:rPr lang="en-US" dirty="0"/>
-              <a:t>Covers full-track chapters 05 + 06. Cut for time: the separate envelope-discussion lab (chapter 05): the raw initialize below replaces it.</a:t>
+              <a:t>Covers full-track chapters 05 + 06. Cut for time: the separate envelope-discussion lab (chapter 05): the raw initialize below covers it.</a:t>
             </a:r>
             <a:endParaRPr lang="en-US" dirty="0"/>
           </a:p>
@@ -2821,7 +2821,7 @@
           <a:p>
             <a:r>
               <a:rPr lang="en-US" dirty="0"/>
-              <a:t>Verified with newman against the Docker stack: 24 requests, 0 failed, on a fresh database and again on a re-run; with a wrong password 17 assertions fail, so the tests can fail. The Inspector CLI (chapters 07 and 09) stays in the terminal on purpose: it is a real MCP client.</a:t>
+              <a:t>The Inspector CLI (chapters 07 and 09) stays in the terminal: it is a real MCP client, which is the point of those chapters.</a:t>
             </a:r>
             <a:endParaRPr lang="en-US" dirty="0"/>
           </a:p>
@@ -17573,7 +17573,7 @@
                   <a:srgbClr val="1B1F24"/>
                 </a:solidFill>
               </a:rPr>
-              <a:t>Postman instead of curl</a:t>
+              <a:t>Calling the API with Postman</a:t>
             </a:r>
             <a:endParaRPr lang="en-US" sz="3200" dirty="0"/>
           </a:p>

--- a/docs/ai-agent-training/slides/lab-companion-lite.pptx
+++ b/docs/ai-agent-training/slides/lab-companion-lite.pptx
@@ -38,9 +38,10 @@
     <p:sldId id="286" r:id="rId32"/>
     <p:sldId id="287" r:id="rId33"/>
     <p:sldId id="288" r:id="rId34"/>
+    <p:sldId id="289" r:id="rId35"/>
   </p:sldIdLst>
   <p:notesMasterIdLst>
-    <p:notesMasterId r:id="rId35"/>
+    <p:notesMasterId r:id="rId36"/>
   </p:notesMasterIdLst>
   <p:sldSz cx="9144000" cy="5143500"/>
   <p:notesSz cx="5143500" cy="9144000"/>
@@ -2030,7 +2031,7 @@
           <a:p>
             <a:r>
               <a:rPr lang="en-US" dirty="0"/>
-              <a:t>The Inspector web UI binds 127.0.0.1 inside its container: use the CLI in Docker. Exit 5 comes from the tool's own isError, which is why it is a sound CI signal.</a:t>
+              <a:t>The Inspector runs in its own container and is published on loopback only (127.0.0.1:6274). Its URL carries an API token: a credential. The three example servers in its list can be ignored. Secret values: the helper prints them; never paste them anywhere but the header field.</a:t>
             </a:r>
             <a:endParaRPr lang="en-US" dirty="0"/>
           </a:p>
@@ -2118,7 +2119,7 @@
           <a:p>
             <a:r>
               <a:rPr lang="en-US" dirty="0"/>
-              <a:t/>
+              <a:t>The CLI is the scriptable half of the Inspector. Exit 5 comes from the tool's own isError, which is why it is a sound CI signal.</a:t>
             </a:r>
             <a:endParaRPr lang="en-US" dirty="0"/>
           </a:p>
@@ -2294,7 +2295,7 @@
           <a:p>
             <a:r>
               <a:rPr lang="en-US" dirty="0"/>
-              <a:t>Covers full-track chapters 09 + 10. Cut for time: nothing from chapter 09; the chapter 10 capstone moves to homework.</a:t>
+              <a:t/>
             </a:r>
             <a:endParaRPr lang="en-US" dirty="0"/>
           </a:p>
@@ -2382,7 +2383,7 @@
           <a:p>
             <a:r>
               <a:rPr lang="en-US" dirty="0"/>
-              <a:t>Two clients, two devices: the Inspector uses the helper's device, Postman its own. Rotating in Postman therefore does not break the Inspector call; that is a good question to ask. The rotation response contains the NEW secret: do not paste it anywhere.</a:t>
+              <a:t>Covers full-track chapters 09 + 10. Cut for time: nothing from chapter 09; the chapter 10 capstone moves to homework.</a:t>
             </a:r>
             <a:endParaRPr lang="en-US" dirty="0"/>
           </a:p>
@@ -2558,7 +2559,7 @@
           <a:p>
             <a:r>
               <a:rPr lang="en-US" dirty="0"/>
-              <a:t>The Inspector treats any 401 as an OAuth challenge. Device keys suit header-configured machine clients; the OAuth path is @rekog/mcp-nest-auth (not built in this course).</a:t>
+              <a:t>Two clients, two devices: the Inspector uses the helper's device, Postman its own. Rotating in Postman therefore does not break the Inspector call; that is a good question to ask. The rotation response contains the NEW secret: do not paste it anywhere.</a:t>
             </a:r>
             <a:endParaRPr lang="en-US" dirty="0"/>
           </a:p>
@@ -2646,7 +2647,7 @@
           <a:p>
             <a:r>
               <a:rPr lang="en-US" dirty="0"/>
-              <a:t/>
+              <a:t>The Inspector treats any 401 as an OAuth challenge. Device keys suit header-configured machine clients; the OAuth path is @rekog/mcp-nest-auth (not built in this course).</a:t>
             </a:r>
             <a:endParaRPr lang="en-US" dirty="0"/>
           </a:p>
@@ -2734,7 +2735,7 @@
           <a:p>
             <a:r>
               <a:rPr lang="en-US" dirty="0"/>
-              <a:t>Distinction: a false statement found in a comment, skill, spec or this course, measured and corrected. Rework: "tests pass" without counts, or any credential in an artefact.</a:t>
+              <a:t/>
             </a:r>
             <a:endParaRPr lang="en-US" dirty="0"/>
           </a:p>
@@ -2822,7 +2823,7 @@
           <a:p>
             <a:r>
               <a:rPr lang="en-US" dirty="0"/>
-              <a:t>Close by asking each learner for one false statement they found in a tool, a doc or this course, and how they measured it.</a:t>
+              <a:t>Distinction: a false statement found in a comment, skill, spec or this course, measured and corrected. Rework: "tests pass" without counts, or any credential in an artefact.</a:t>
             </a:r>
             <a:endParaRPr lang="en-US" dirty="0"/>
           </a:p>
@@ -2846,6 +2847,94 @@
             <a:fld id="{F7021451-1387-4CA6-816F-3879F97B5CBC}" type="slidenum">
               <a:rPr lang="en-US"/>
               <a:t>33</a:t>
+            </a:fld>
+            <a:endParaRPr lang="en-US"/>
+          </a:p>
+        </p:txBody>
+      </p:sp>
+    </p:spTree>
+    <p:extLst>
+      <p:ext uri="{BB962C8B-B14F-4D97-AF65-F5344CB8AC3E}">
+        <p14:creationId xmlns:p14="http://schemas.microsoft.com/office/powerpoint/2010/main" val="1024086991"/>
+      </p:ext>
+    </p:extLst>
+  </p:cSld>
+  <p:clrMapOvr>
+    <a:masterClrMapping/>
+  </p:clrMapOvr>
+</p:notes>
+</file>
+
+<file path=ppt/notesSlides/notesSlide34.xml><?xml version="1.0" encoding="utf-8"?>
+<p:notes xmlns:a="http://schemas.openxmlformats.org/drawingml/2006/main" xmlns:r="http://schemas.openxmlformats.org/officeDocument/2006/relationships" xmlns:p="http://schemas.openxmlformats.org/presentationml/2006/main">
+  <p:cSld>
+    <p:spTree>
+      <p:nvGrpSpPr>
+        <p:cNvPr id="1" name=""/>
+        <p:cNvGrpSpPr/>
+        <p:nvPr/>
+      </p:nvGrpSpPr>
+      <p:grpSpPr>
+        <a:xfrm>
+          <a:off x="0" y="0"/>
+          <a:ext cx="0" cy="0"/>
+          <a:chOff x="0" y="0"/>
+          <a:chExt cx="0" cy="0"/>
+        </a:xfrm>
+      </p:grpSpPr>
+      <p:sp>
+        <p:nvSpPr>
+          <p:cNvPr id="2" name="Slide Image Placeholder 1"/>
+          <p:cNvSpPr>
+            <a:spLocks noGrp="1" noRot="1" noChangeAspect="1"/>
+          </p:cNvSpPr>
+          <p:nvPr>
+            <p:ph type="sldImg"/>
+          </p:nvPr>
+        </p:nvSpPr>
+        <p:spPr/>
+      </p:sp>
+      <p:sp>
+        <p:nvSpPr>
+          <p:cNvPr id="3" name="Notes Placeholder 2"/>
+          <p:cNvSpPr>
+            <a:spLocks noGrp="1"/>
+          </p:cNvSpPr>
+          <p:nvPr>
+            <p:ph type="body" idx="1"/>
+          </p:nvPr>
+        </p:nvSpPr>
+        <p:spPr/>
+        <p:txBody>
+          <a:bodyPr/>
+          <a:lstStyle/>
+          <a:p>
+            <a:r>
+              <a:rPr lang="en-US" dirty="0"/>
+              <a:t>Close by asking each learner for one false statement they found in a tool, a doc or this course, and how they measured it.</a:t>
+            </a:r>
+            <a:endParaRPr lang="en-US" dirty="0"/>
+          </a:p>
+        </p:txBody>
+      </p:sp>
+      <p:sp>
+        <p:nvSpPr>
+          <p:cNvPr id="4" name="Slide Number Placeholder 3"/>
+          <p:cNvSpPr>
+            <a:spLocks noGrp="1"/>
+          </p:cNvSpPr>
+          <p:nvPr>
+            <p:ph type="sldNum" sz="quarter" idx="10"/>
+          </p:nvPr>
+        </p:nvSpPr>
+        <p:spPr/>
+        <p:txBody>
+          <a:bodyPr/>
+          <a:lstStyle/>
+          <a:p>
+            <a:fld id="{F7021451-1387-4CA6-816F-3879F97B5CBC}" type="slidenum">
+              <a:rPr lang="en-US"/>
+              <a:t>34</a:t>
             </a:fld>
             <a:endParaRPr lang="en-US"/>
           </a:p>
@@ -12972,7 +13061,7 @@
                   <a:srgbClr val="1B1F24"/>
                 </a:solidFill>
               </a:rPr>
-              <a:t>Run this: a CI check, then the wire</a:t>
+              <a:t>Run this (1/2): the Inspector UI</a:t>
             </a:r>
             <a:endParaRPr lang="en-US" sz="3200" dirty="0"/>
           </a:p>
@@ -13144,7 +13233,7 @@
               <a:buNone/>
             </a:pPr>
             <a:r>
-              <a:rPr lang="en-US" sz="1000" dirty="0">
+              <a:rPr lang="en-US" sz="1200" dirty="0">
                 <a:solidFill>
                   <a:srgbClr val="E6EDF3"/>
                 </a:solidFill>
@@ -13152,16 +13241,16 @@
                 <a:ea typeface="Courier New" pitchFamily="34" charset="-122"/>
                 <a:cs typeface="Courier New" pitchFamily="34" charset="-120"/>
               </a:rPr>
-              <a:t>dev pnpm build</a:t>
-            </a:r>
-            <a:endParaRPr lang="en-US" sz="1000" dirty="0"/>
-          </a:p>
-          <a:p>
-            <a:pPr indent="0" marL="0">
-              <a:buNone/>
-            </a:pPr>
-            <a:r>
-              <a:rPr lang="en-US" sz="1000" dirty="0">
+              <a:t>docker compose --profile inspector up -d inspector</a:t>
+            </a:r>
+            <a:endParaRPr lang="en-US" sz="1200" dirty="0"/>
+          </a:p>
+          <a:p>
+            <a:pPr indent="0" marL="0">
+              <a:buNone/>
+            </a:pPr>
+            <a:r>
+              <a:rPr lang="en-US" sz="1200" dirty="0">
                 <a:solidFill>
                   <a:srgbClr val="E6EDF3"/>
                 </a:solidFill>
@@ -13169,33 +13258,33 @@
                 <a:ea typeface="Courier New" pitchFamily="34" charset="-122"/>
                 <a:cs typeface="Courier New" pitchFamily="34" charset="-120"/>
               </a:rPr>
-              <a:t>dev pnpm mcp:inspect:cli --method tools/call \</a:t>
-            </a:r>
-            <a:endParaRPr lang="en-US" sz="1000" dirty="0"/>
-          </a:p>
-          <a:p>
-            <a:pPr indent="0" marL="0">
-              <a:buNone/>
-            </a:pPr>
-            <a:r>
-              <a:rPr lang="en-US" sz="1000" dirty="0">
-                <a:solidFill>
-                  <a:srgbClr val="E6EDF3"/>
+              <a:t>docker compose logs inspector</a:t>
+            </a:r>
+            <a:endParaRPr lang="en-US" sz="1200" dirty="0"/>
+          </a:p>
+          <a:p>
+            <a:pPr indent="0" marL="0">
+              <a:buNone/>
+            </a:pPr>
+            <a:r>
+              <a:rPr lang="en-US" sz="1200" dirty="0">
+                <a:solidFill>
+                  <a:srgbClr val="8B98A5"/>
                 </a:solidFill>
                 <a:latin typeface="Courier New" pitchFamily="34" charset="0"/>
                 <a:ea typeface="Courier New" pitchFamily="34" charset="-122"/>
                 <a:cs typeface="Courier New" pitchFamily="34" charset="-120"/>
               </a:rPr>
-              <a:t>  --tool-name get-note \</a:t>
-            </a:r>
-            <a:endParaRPr lang="en-US" sz="1000" dirty="0"/>
-          </a:p>
-          <a:p>
-            <a:pPr indent="0" marL="0">
-              <a:buNone/>
-            </a:pPr>
-            <a:r>
-              <a:rPr lang="en-US" sz="1000" dirty="0">
+              <a:t># open the localhost:6274 URL it prints</a:t>
+            </a:r>
+            <a:endParaRPr lang="en-US" sz="1200" dirty="0"/>
+          </a:p>
+          <a:p>
+            <a:pPr indent="0" marL="0">
+              <a:buNone/>
+            </a:pPr>
+            <a:r>
+              <a:rPr lang="en-US" sz="1200" dirty="0">
                 <a:solidFill>
                   <a:srgbClr val="E6EDF3"/>
                 </a:solidFill>
@@ -13203,16 +13292,16 @@
                 <a:ea typeface="Courier New" pitchFamily="34" charset="-122"/>
                 <a:cs typeface="Courier New" pitchFamily="34" charset="-120"/>
               </a:rPr>
-              <a:t>  --tool-arg id=00000000-0000-4000-8000-000000000000</a:t>
-            </a:r>
-            <a:endParaRPr lang="en-US" sz="1000" dirty="0"/>
-          </a:p>
-          <a:p>
-            <a:pPr indent="0" marL="0">
-              <a:buNone/>
-            </a:pPr>
-            <a:r>
-              <a:rPr lang="en-US" sz="1000" dirty="0">
+              <a:t>eval "$(docker compose run --rm -T dev \</a:t>
+            </a:r>
+            <a:endParaRPr lang="en-US" sz="1200" dirty="0"/>
+          </a:p>
+          <a:p>
+            <a:pPr indent="0" marL="0">
+              <a:buNone/>
+            </a:pPr>
+            <a:r>
+              <a:rPr lang="en-US" sz="1200" dirty="0">
                 <a:solidFill>
                   <a:srgbClr val="E6EDF3"/>
                 </a:solidFill>
@@ -13220,16 +13309,16 @@
                 <a:ea typeface="Courier New" pitchFamily="34" charset="-122"/>
                 <a:cs typeface="Courier New" pitchFamily="34" charset="-120"/>
               </a:rPr>
-              <a:t>echo "exit: $?"</a:t>
-            </a:r>
-            <a:endParaRPr lang="en-US" sz="1000" dirty="0"/>
-          </a:p>
-          <a:p>
-            <a:pPr indent="0" marL="0">
-              <a:buNone/>
-            </a:pPr>
-            <a:r>
-              <a:rPr lang="en-US" sz="1000" dirty="0">
+              <a:t>  node scripts/demo-device.mjs | grep '^export ')"</a:t>
+            </a:r>
+            <a:endParaRPr lang="en-US" sz="1200" dirty="0"/>
+          </a:p>
+          <a:p>
+            <a:pPr indent="0" marL="0">
+              <a:buNone/>
+            </a:pPr>
+            <a:r>
+              <a:rPr lang="en-US" sz="1200" dirty="0">
                 <a:solidFill>
                   <a:srgbClr val="8B98A5"/>
                 </a:solidFill>
@@ -13237,16 +13326,16 @@
                 <a:ea typeface="Courier New" pitchFamily="34" charset="-122"/>
                 <a:cs typeface="Courier New" pitchFamily="34" charset="-120"/>
               </a:rPr>
-              <a:t># attach-mcp.ts: enableJsonResponse: true</a:t>
-            </a:r>
-            <a:endParaRPr lang="en-US" sz="1000" dirty="0"/>
-          </a:p>
-          <a:p>
-            <a:pPr indent="0" marL="0">
-              <a:buNone/>
-            </a:pPr>
-            <a:r>
-              <a:rPr lang="en-US" sz="1000" dirty="0">
+              <a:t># the values for the two headers:</a:t>
+            </a:r>
+            <a:endParaRPr lang="en-US" sz="1200" dirty="0"/>
+          </a:p>
+          <a:p>
+            <a:pPr indent="0" marL="0">
+              <a:buNone/>
+            </a:pPr>
+            <a:r>
+              <a:rPr lang="en-US" sz="1200" dirty="0">
                 <a:solidFill>
                   <a:srgbClr val="E6EDF3"/>
                 </a:solidFill>
@@ -13254,66 +13343,32 @@
                 <a:ea typeface="Courier New" pitchFamily="34" charset="-122"/>
                 <a:cs typeface="Courier New" pitchFamily="34" charset="-120"/>
               </a:rPr>
-              <a:t>docker compose up -d --build app</a:t>
-            </a:r>
-            <a:endParaRPr lang="en-US" sz="1000" dirty="0"/>
-          </a:p>
-          <a:p>
-            <a:pPr indent="0" marL="0">
-              <a:buNone/>
-            </a:pPr>
-            <a:r>
-              <a:rPr lang="en-US" sz="1000" dirty="0">
-                <a:solidFill>
-                  <a:srgbClr val="8B98A5"/>
+              <a:t>echo "$MCP_KEY_ID"</a:t>
+            </a:r>
+            <a:endParaRPr lang="en-US" sz="1200" dirty="0"/>
+          </a:p>
+          <a:p>
+            <a:pPr indent="0" marL="0">
+              <a:buNone/>
+            </a:pPr>
+            <a:r>
+              <a:rPr lang="en-US" sz="1200" dirty="0">
+                <a:solidFill>
+                  <a:srgbClr val="E6EDF3"/>
                 </a:solidFill>
                 <a:latin typeface="Courier New" pitchFamily="34" charset="0"/>
                 <a:ea typeface="Courier New" pitchFamily="34" charset="-122"/>
                 <a:cs typeface="Courier New" pitchFamily="34" charset="-120"/>
               </a:rPr>
-              <a:t># re-send Postman 05 › initialize: what changed?</a:t>
-            </a:r>
-            <a:endParaRPr lang="en-US" sz="1000" dirty="0"/>
-          </a:p>
-          <a:p>
-            <a:pPr indent="0" marL="0">
-              <a:buNone/>
-            </a:pPr>
-            <a:r>
-              <a:rPr lang="en-US" sz="1000" dirty="0">
-                <a:solidFill>
-                  <a:srgbClr val="8B98A5"/>
-                </a:solidFill>
-                <a:latin typeface="Courier New" pitchFamily="34" charset="0"/>
-                <a:ea typeface="Courier New" pitchFamily="34" charset="-122"/>
-                <a:cs typeface="Courier New" pitchFamily="34" charset="-120"/>
-              </a:rPr>
-              <a:t># then revert enableJsonResponse</a:t>
-            </a:r>
-            <a:endParaRPr lang="en-US" sz="1000" dirty="0"/>
-          </a:p>
-          <a:p>
-            <a:pPr indent="0" marL="0">
-              <a:buNone/>
-            </a:pPr>
-            <a:r>
-              <a:rPr lang="en-US" sz="1000" dirty="0">
-                <a:solidFill>
-                  <a:srgbClr val="E6EDF3"/>
-                </a:solidFill>
-                <a:latin typeface="Courier New" pitchFamily="34" charset="0"/>
-                <a:ea typeface="Courier New" pitchFamily="34" charset="-122"/>
-                <a:cs typeface="Courier New" pitchFamily="34" charset="-120"/>
-              </a:rPr>
-              <a:t>dev pnpm lab 08   # green now; break it, see red, revert</a:t>
-            </a:r>
-            <a:endParaRPr lang="en-US" sz="1000" dirty="0"/>
-          </a:p>
-        </p:txBody>
-      </p:sp>
-      <p:sp>
-        <p:nvSpPr>
-          <p:cNvPr id="9" name="postman"/>
+              <a:t>echo "$MCP_SECRET"</a:t>
+            </a:r>
+            <a:endParaRPr lang="en-US" sz="1200" dirty="0"/>
+          </a:p>
+        </p:txBody>
+      </p:sp>
+      <p:sp>
+        <p:nvSpPr>
+          <p:cNvPr id="9" name="inspector-ui"/>
           <p:cNvSpPr/>
           <p:nvPr/>
         </p:nvSpPr>
@@ -13328,11 +13383,11 @@
             </a:avLst>
           </a:prstGeom>
           <a:solidFill>
-            <a:srgbClr val="EF5B25"/>
+            <a:srgbClr val="6D4AE8"/>
           </a:solidFill>
           <a:ln w="12700">
             <a:solidFill>
-              <a:srgbClr val="EF5B25"/>
+              <a:srgbClr val="6D4AE8"/>
             </a:solidFill>
             <a:prstDash val="solid"/>
           </a:ln>
@@ -13392,7 +13447,7 @@
                   <a:srgbClr val="FFFFFF"/>
                 </a:solidFill>
               </a:rPr>
-              <a:t>In Postman</a:t>
+              <a:t>In the Inspector UI</a:t>
             </a:r>
             <a:endParaRPr lang="en-US" sz="1600" dirty="0"/>
           </a:p>
@@ -13423,12 +13478,12 @@
               <a:buNone/>
             </a:pPr>
             <a:r>
-              <a:rPr lang="en-US" sz="1300" b="1" dirty="0">
+              <a:rPr lang="en-US" sz="1300" dirty="0">
                 <a:solidFill>
                   <a:srgbClr val="FFFFFF"/>
                 </a:solidFill>
               </a:rPr>
-              <a:t>05 · MCP over HTTP (lite module 4)</a:t>
+              <a:t>1. Add Servers → + Add manually</a:t>
             </a:r>
             <a:endParaRPr lang="en-US" sz="1300" dirty="0"/>
           </a:p>
@@ -13442,24 +13497,21 @@
                   <a:srgbClr val="FFFFFF"/>
                 </a:solidFill>
               </a:rPr>
-              <a:t>1. initialize</a:t>
+              <a:t>2. streamable-http · http://app:3000/mcp → Add</a:t>
             </a:r>
             <a:endParaRPr lang="en-US" sz="1300" dirty="0"/>
           </a:p>
           <a:p>
             <a:pPr indent="0" marL="0">
-              <a:spcBef>
-                <a:spcPts val="600"/>
-              </a:spcBef>
-              <a:buNone/>
-            </a:pPr>
-            <a:r>
-              <a:rPr lang="en-US" sz="1300" b="1" dirty="0">
+              <a:buNone/>
+            </a:pPr>
+            <a:r>
+              <a:rPr lang="en-US" sz="1300" dirty="0">
                 <a:solidFill>
                   <a:srgbClr val="FFFFFF"/>
                 </a:solidFill>
               </a:rPr>
-              <a:t>08 · Host check (lite module 5)</a:t>
+              <a:t>3. Settings → Custom Headers → + Add Header, twice</a:t>
             </a:r>
             <a:endParaRPr lang="en-US" sz="1300" dirty="0"/>
           </a:p>
@@ -13473,7 +13525,35 @@
                   <a:srgbClr val="FFFFFF"/>
                 </a:solidFill>
               </a:rPr>
-              <a:t>1. Foreign Host → 403</a:t>
+              <a:t>4. X-Access-Key-Id and X-Secret-Key, then close</a:t>
+            </a:r>
+            <a:endParaRPr lang="en-US" sz="1300" dirty="0"/>
+          </a:p>
+          <a:p>
+            <a:pPr indent="0" marL="0">
+              <a:buNone/>
+            </a:pPr>
+            <a:r>
+              <a:rPr lang="en-US" sz="1300" dirty="0">
+                <a:solidFill>
+                  <a:srgbClr val="FFFFFF"/>
+                </a:solidFill>
+              </a:rPr>
+              <a:t>5. Switch the card on: Connected</a:t>
+            </a:r>
+            <a:endParaRPr lang="en-US" sz="1300" dirty="0"/>
+          </a:p>
+          <a:p>
+            <a:pPr indent="0" marL="0">
+              <a:buNone/>
+            </a:pPr>
+            <a:r>
+              <a:rPr lang="en-US" sz="1300" dirty="0">
+                <a:solidFill>
+                  <a:srgbClr val="FFFFFF"/>
+                </a:solidFill>
+              </a:rPr>
+              <a:t>6. Tools → whoami → Execute Tool</a:t>
             </a:r>
             <a:endParaRPr lang="en-US" sz="1300" dirty="0"/>
           </a:p>
@@ -13581,7 +13661,7 @@
                   <a:srgbClr val="1B1F24"/>
                 </a:solidFill>
               </a:rPr>
-              <a:t>Checkpoint: exit 5, then two framings</a:t>
+              <a:t>Run this (2/2): a CI check, then the wire</a:t>
             </a:r>
             <a:endParaRPr lang="en-US" sz="3200" dirty="0"/>
           </a:p>
@@ -13596,7 +13676,7 @@
         <p:spPr>
           <a:xfrm>
             <a:off x="457200" y="1097280"/>
-            <a:ext cx="5029200" cy="3520440"/>
+            <a:ext cx="5212080" cy="3520440"/>
           </a:xfrm>
           <a:prstGeom prst="roundRect">
             <a:avLst>
@@ -13698,7 +13778,7 @@
         <p:spPr>
           <a:xfrm>
             <a:off x="1280160" y="1152144"/>
-            <a:ext cx="4023360" cy="256032"/>
+            <a:ext cx="4206240" cy="256032"/>
           </a:xfrm>
           <a:prstGeom prst="rect">
             <a:avLst/>
@@ -13722,7 +13802,7 @@
                 <a:ea typeface="Calibri" pitchFamily="34" charset="-122"/>
                 <a:cs typeface="Calibri" pitchFamily="34" charset="-120"/>
               </a:rPr>
-              <a:t>output: captured, then expected</a:t>
+              <a:t>module 5 · run this</a:t>
             </a:r>
             <a:endParaRPr lang="en-US" sz="1000" dirty="0"/>
           </a:p>
@@ -13737,7 +13817,7 @@
         <p:spPr>
           <a:xfrm>
             <a:off x="685800" y="1481328"/>
-            <a:ext cx="4572000" cy="3017520"/>
+            <a:ext cx="4754880" cy="3017520"/>
           </a:xfrm>
           <a:prstGeom prst="rect">
             <a:avLst/>
@@ -13753,7 +13833,7 @@
               <a:buNone/>
             </a:pPr>
             <a:r>
-              <a:rPr lang="en-US" sz="1200" dirty="0">
+              <a:rPr lang="en-US" sz="1000" dirty="0">
                 <a:solidFill>
                   <a:srgbClr val="E6EDF3"/>
                 </a:solidFill>
@@ -13761,16 +13841,16 @@
                 <a:ea typeface="Courier New" pitchFamily="34" charset="-122"/>
                 <a:cs typeface="Courier New" pitchFamily="34" charset="-120"/>
               </a:rPr>
-              <a:t>{ "content": [ { "type": "text",</a:t>
-            </a:r>
-            <a:endParaRPr lang="en-US" sz="1200" dirty="0"/>
-          </a:p>
-          <a:p>
-            <a:pPr indent="0" marL="0">
-              <a:buNone/>
-            </a:pPr>
-            <a:r>
-              <a:rPr lang="en-US" sz="1200" dirty="0">
+              <a:t>dev pnpm build</a:t>
+            </a:r>
+            <a:endParaRPr lang="en-US" sz="1000" dirty="0"/>
+          </a:p>
+          <a:p>
+            <a:pPr indent="0" marL="0">
+              <a:buNone/>
+            </a:pPr>
+            <a:r>
+              <a:rPr lang="en-US" sz="1000" dirty="0">
                 <a:solidFill>
                   <a:srgbClr val="E6EDF3"/>
                 </a:solidFill>
@@ -13778,16 +13858,16 @@
                 <a:ea typeface="Courier New" pitchFamily="34" charset="-122"/>
                 <a:cs typeface="Courier New" pitchFamily="34" charset="-120"/>
               </a:rPr>
-              <a:t>  "text": "NOT_FOUND: Note … not found" } ],</a:t>
-            </a:r>
-            <a:endParaRPr lang="en-US" sz="1200" dirty="0"/>
-          </a:p>
-          <a:p>
-            <a:pPr indent="0" marL="0">
-              <a:buNone/>
-            </a:pPr>
-            <a:r>
-              <a:rPr lang="en-US" sz="1200" dirty="0">
+              <a:t>dev pnpm mcp:inspect:cli --method tools/call \</a:t>
+            </a:r>
+            <a:endParaRPr lang="en-US" sz="1000" dirty="0"/>
+          </a:p>
+          <a:p>
+            <a:pPr indent="0" marL="0">
+              <a:buNone/>
+            </a:pPr>
+            <a:r>
+              <a:rPr lang="en-US" sz="1000" dirty="0">
                 <a:solidFill>
                   <a:srgbClr val="E6EDF3"/>
                 </a:solidFill>
@@ -13795,16 +13875,16 @@
                 <a:ea typeface="Courier New" pitchFamily="34" charset="-122"/>
                 <a:cs typeface="Courier New" pitchFamily="34" charset="-120"/>
               </a:rPr>
-              <a:t>  "isError": true }</a:t>
-            </a:r>
-            <a:endParaRPr lang="en-US" sz="1200" dirty="0"/>
-          </a:p>
-          <a:p>
-            <a:pPr indent="0" marL="0">
-              <a:buNone/>
-            </a:pPr>
-            <a:r>
-              <a:rPr lang="en-US" sz="1200" dirty="0">
+              <a:t>  --tool-name get-note \</a:t>
+            </a:r>
+            <a:endParaRPr lang="en-US" sz="1000" dirty="0"/>
+          </a:p>
+          <a:p>
+            <a:pPr indent="0" marL="0">
+              <a:buNone/>
+            </a:pPr>
+            <a:r>
+              <a:rPr lang="en-US" sz="1000" dirty="0">
                 <a:solidFill>
                   <a:srgbClr val="E6EDF3"/>
                 </a:solidFill>
@@ -13812,50 +13892,50 @@
                 <a:ea typeface="Courier New" pitchFamily="34" charset="-122"/>
                 <a:cs typeface="Courier New" pitchFamily="34" charset="-120"/>
               </a:rPr>
-              <a:t>exit: 5</a:t>
-            </a:r>
-            <a:endParaRPr lang="en-US" sz="1200" dirty="0"/>
-          </a:p>
-          <a:p>
-            <a:pPr indent="0" marL="0">
-              <a:buNone/>
-            </a:pPr>
-            <a:r>
-              <a:rPr lang="en-US" sz="1200" dirty="0">
-                <a:solidFill>
-                  <a:srgbClr val="8B98A5"/>
+              <a:t>  --tool-arg id=00000000-0000-4000-8000-000000000000</a:t>
+            </a:r>
+            <a:endParaRPr lang="en-US" sz="1000" dirty="0"/>
+          </a:p>
+          <a:p>
+            <a:pPr indent="0" marL="0">
+              <a:buNone/>
+            </a:pPr>
+            <a:r>
+              <a:rPr lang="en-US" sz="1000" dirty="0">
+                <a:solidFill>
+                  <a:srgbClr val="E6EDF3"/>
                 </a:solidFill>
                 <a:latin typeface="Courier New" pitchFamily="34" charset="0"/>
                 <a:ea typeface="Courier New" pitchFamily="34" charset="-122"/>
                 <a:cs typeface="Courier New" pitchFamily="34" charset="-120"/>
               </a:rPr>
-              <a:t># enableJsonResponse: true (expected)</a:t>
-            </a:r>
-            <a:endParaRPr lang="en-US" sz="1200" dirty="0"/>
-          </a:p>
-          <a:p>
-            <a:pPr indent="0" marL="0">
-              <a:buNone/>
-            </a:pPr>
-            <a:r>
-              <a:rPr lang="en-US" sz="1200" dirty="0">
-                <a:solidFill>
-                  <a:srgbClr val="E6EDF3"/>
+              <a:t>echo "exit: $?"</a:t>
+            </a:r>
+            <a:endParaRPr lang="en-US" sz="1000" dirty="0"/>
+          </a:p>
+          <a:p>
+            <a:pPr indent="0" marL="0">
+              <a:buNone/>
+            </a:pPr>
+            <a:r>
+              <a:rPr lang="en-US" sz="1000" dirty="0">
+                <a:solidFill>
+                  <a:srgbClr val="8B98A5"/>
                 </a:solidFill>
                 <a:latin typeface="Courier New" pitchFamily="34" charset="0"/>
                 <a:ea typeface="Courier New" pitchFamily="34" charset="-122"/>
                 <a:cs typeface="Courier New" pitchFamily="34" charset="-120"/>
               </a:rPr>
-              <a:t>content-type: application/json</a:t>
-            </a:r>
-            <a:endParaRPr lang="en-US" sz="1200" dirty="0"/>
-          </a:p>
-          <a:p>
-            <a:pPr indent="0" marL="0">
-              <a:buNone/>
-            </a:pPr>
-            <a:r>
-              <a:rPr lang="en-US" sz="1200" dirty="0">
+              <a:t># attach-mcp.ts: enableJsonResponse: true</a:t>
+            </a:r>
+            <a:endParaRPr lang="en-US" sz="1000" dirty="0"/>
+          </a:p>
+          <a:p>
+            <a:pPr indent="0" marL="0">
+              <a:buNone/>
+            </a:pPr>
+            <a:r>
+              <a:rPr lang="en-US" sz="1000" dirty="0">
                 <a:solidFill>
                   <a:srgbClr val="E6EDF3"/>
                 </a:solidFill>
@@ -13863,68 +13943,85 @@
                 <a:ea typeface="Courier New" pitchFamily="34" charset="-122"/>
                 <a:cs typeface="Courier New" pitchFamily="34" charset="-120"/>
               </a:rPr>
-              <a:t>{"result":…}</a:t>
-            </a:r>
-            <a:endParaRPr lang="en-US" sz="1200" dirty="0"/>
-          </a:p>
-        </p:txBody>
-      </p:sp>
-      <p:sp>
-        <p:nvSpPr>
-          <p:cNvPr id="9" name="Text 7"/>
-          <p:cNvSpPr txBox="1"/>
+              <a:t>docker compose up -d --build app</a:t>
+            </a:r>
+            <a:endParaRPr lang="en-US" sz="1000" dirty="0"/>
+          </a:p>
+          <a:p>
+            <a:pPr indent="0" marL="0">
+              <a:buNone/>
+            </a:pPr>
+            <a:r>
+              <a:rPr lang="en-US" sz="1000" dirty="0">
+                <a:solidFill>
+                  <a:srgbClr val="8B98A5"/>
+                </a:solidFill>
+                <a:latin typeface="Courier New" pitchFamily="34" charset="0"/>
+                <a:ea typeface="Courier New" pitchFamily="34" charset="-122"/>
+                <a:cs typeface="Courier New" pitchFamily="34" charset="-120"/>
+              </a:rPr>
+              <a:t># re-send Postman 05 › initialize: what changed?</a:t>
+            </a:r>
+            <a:endParaRPr lang="en-US" sz="1000" dirty="0"/>
+          </a:p>
+          <a:p>
+            <a:pPr indent="0" marL="0">
+              <a:buNone/>
+            </a:pPr>
+            <a:r>
+              <a:rPr lang="en-US" sz="1000" dirty="0">
+                <a:solidFill>
+                  <a:srgbClr val="8B98A5"/>
+                </a:solidFill>
+                <a:latin typeface="Courier New" pitchFamily="34" charset="0"/>
+                <a:ea typeface="Courier New" pitchFamily="34" charset="-122"/>
+                <a:cs typeface="Courier New" pitchFamily="34" charset="-120"/>
+              </a:rPr>
+              <a:t># then revert enableJsonResponse</a:t>
+            </a:r>
+            <a:endParaRPr lang="en-US" sz="1000" dirty="0"/>
+          </a:p>
+          <a:p>
+            <a:pPr indent="0" marL="0">
+              <a:buNone/>
+            </a:pPr>
+            <a:r>
+              <a:rPr lang="en-US" sz="1000" dirty="0">
+                <a:solidFill>
+                  <a:srgbClr val="E6EDF3"/>
+                </a:solidFill>
+                <a:latin typeface="Courier New" pitchFamily="34" charset="0"/>
+                <a:ea typeface="Courier New" pitchFamily="34" charset="-122"/>
+                <a:cs typeface="Courier New" pitchFamily="34" charset="-120"/>
+              </a:rPr>
+              <a:t>dev pnpm lab 08   # green now; break it, see red, revert</a:t>
+            </a:r>
+            <a:endParaRPr lang="en-US" sz="1000" dirty="0"/>
+          </a:p>
+        </p:txBody>
+      </p:sp>
+      <p:sp>
+        <p:nvSpPr>
+          <p:cNvPr id="9" name="postman"/>
+          <p:cNvSpPr/>
           <p:nvPr/>
         </p:nvSpPr>
         <p:spPr>
           <a:xfrm>
             <a:off x="5852160" y="1097280"/>
-            <a:ext cx="2834640" cy="411480"/>
-          </a:xfrm>
-          <a:prstGeom prst="rect">
-            <a:avLst/>
-          </a:prstGeom>
-          <a:noFill/>
-          <a:ln/>
-        </p:spPr>
-        <p:txBody>
-          <a:bodyPr wrap="square" lIns="0" tIns="0" rIns="0" bIns="0" rtlCol="0" anchor="ctr"/>
-          <a:lstStyle/>
-          <a:p>
-            <a:pPr indent="0" marL="0">
-              <a:buNone/>
-            </a:pPr>
-            <a:r>
-              <a:rPr lang="en-US" sz="2000" b="1" dirty="0">
-                <a:solidFill>
-                  <a:srgbClr val="1B1F24"/>
-                </a:solidFill>
-              </a:rPr>
-              <a:t>Done when</a:t>
-            </a:r>
-            <a:endParaRPr lang="en-US" sz="2000" dirty="0"/>
-          </a:p>
-        </p:txBody>
-      </p:sp>
-      <p:sp>
-        <p:nvSpPr>
-          <p:cNvPr id="10" name="Shape 8"/>
-          <p:cNvSpPr/>
-          <p:nvPr/>
-        </p:nvSpPr>
-        <p:spPr>
-          <a:xfrm>
-            <a:off x="5852160" y="1645920"/>
-            <a:ext cx="384048" cy="384048"/>
-          </a:xfrm>
-          <a:prstGeom prst="ellipse">
-            <a:avLst/>
+            <a:ext cx="2834640" cy="3520440"/>
+          </a:xfrm>
+          <a:prstGeom prst="roundRect">
+            <a:avLst>
+              <a:gd name="adj" fmla="val 2581"/>
+            </a:avLst>
           </a:prstGeom>
           <a:solidFill>
-            <a:srgbClr val="1FB68A"/>
+            <a:srgbClr val="EF5B25"/>
           </a:solidFill>
           <a:ln w="12700">
             <a:solidFill>
-              <a:srgbClr val="1FB68A"/>
+              <a:srgbClr val="EF5B25"/>
             </a:solidFill>
             <a:prstDash val="solid"/>
           </a:ln>
@@ -13932,7 +14029,7 @@
       </p:sp>
       <p:pic>
         <p:nvPicPr>
-          <p:cNvPr id="11" name="Image 0" descr="preencoded.png">    </p:cNvPr>
+          <p:cNvPr id="10" name="Image 0" descr="preencoded.png">    </p:cNvPr>
           <p:cNvPicPr>
             <a:picLocks noChangeAspect="1"/>
           </p:cNvPicPr>
@@ -13946,8 +14043,8 @@
         </p:blipFill>
         <p:spPr>
           <a:xfrm>
-            <a:off x="5936651" y="1730411"/>
-            <a:ext cx="215067" cy="215067"/>
+            <a:off x="6035040" y="1252728"/>
+            <a:ext cx="237744" cy="237744"/>
           </a:xfrm>
           <a:prstGeom prst="rect">
             <a:avLst/>
@@ -13956,14 +14053,14 @@
       </p:pic>
       <p:sp>
         <p:nvSpPr>
-          <p:cNvPr id="12" name="Text 9"/>
+          <p:cNvPr id="11" name="Text 8"/>
           <p:cNvSpPr txBox="1"/>
           <p:nvPr/>
         </p:nvSpPr>
         <p:spPr>
           <a:xfrm>
-            <a:off x="6355080" y="1609344"/>
-            <a:ext cx="2331720" cy="868680"/>
+            <a:off x="6355080" y="1207008"/>
+            <a:ext cx="2148840" cy="329184"/>
           </a:xfrm>
           <a:prstGeom prst="rect">
             <a:avLst/>
@@ -13972,100 +14069,34 @@
           <a:ln/>
         </p:spPr>
         <p:txBody>
-          <a:bodyPr wrap="square" lIns="0" tIns="0" rIns="0" bIns="0" rtlCol="0" anchor="t"/>
-          <a:lstStyle/>
-          <a:p>
-            <a:pPr indent="0" marL="0">
-              <a:buNone/>
-            </a:pPr>
-            <a:pPr indent="0" marL="0">
-              <a:buNone/>
-            </a:pPr>
-            <a:r>
-              <a:rPr lang="en-US" sz="1400" dirty="0">
-                <a:solidFill>
-                  <a:srgbClr val="1B1F24"/>
-                </a:solidFill>
-                <a:latin typeface="Courier New" pitchFamily="34" charset="0"/>
-                <a:ea typeface="Courier New" pitchFamily="34" charset="-122"/>
-                <a:cs typeface="Courier New" pitchFamily="34" charset="-120"/>
-              </a:rPr>
-              <a:t>dev pnpm lab 08</a:t>
-            </a:r>
-            <a:pPr indent="0" marL="0">
-              <a:buNone/>
-            </a:pPr>
-            <a:r>
-              <a:rPr lang="en-US" sz="1400" dirty="0">
-                <a:solidFill>
-                  <a:srgbClr val="1B1F24"/>
-                </a:solidFill>
-              </a:rPr>
-              <a:t>: every test passes</a:t>
-            </a:r>
-            <a:endParaRPr lang="en-US" sz="1400" dirty="0"/>
-          </a:p>
-        </p:txBody>
-      </p:sp>
-      <p:sp>
-        <p:nvSpPr>
-          <p:cNvPr id="13" name="Shape 10"/>
-          <p:cNvSpPr/>
-          <p:nvPr/>
-        </p:nvSpPr>
-        <p:spPr>
-          <a:xfrm>
-            <a:off x="5852160" y="2377440"/>
-            <a:ext cx="384048" cy="384048"/>
-          </a:xfrm>
-          <a:prstGeom prst="ellipse">
-            <a:avLst/>
-          </a:prstGeom>
-          <a:solidFill>
-            <a:srgbClr val="1FB68A"/>
-          </a:solidFill>
-          <a:ln w="12700">
-            <a:solidFill>
-              <a:srgbClr val="1FB68A"/>
-            </a:solidFill>
-            <a:prstDash val="solid"/>
-          </a:ln>
-        </p:spPr>
-      </p:sp>
-      <p:pic>
-        <p:nvPicPr>
-          <p:cNvPr id="14" name="Image 1" descr="preencoded.png">    </p:cNvPr>
-          <p:cNvPicPr>
-            <a:picLocks noChangeAspect="1"/>
-          </p:cNvPicPr>
-          <p:nvPr/>
-        </p:nvPicPr>
-        <p:blipFill>
-          <a:blip r:embed="rId2"/>
-          <a:stretch>
-            <a:fillRect/>
-          </a:stretch>
-        </p:blipFill>
-        <p:spPr>
-          <a:xfrm>
-            <a:off x="5936651" y="2461931"/>
-            <a:ext cx="215067" cy="215067"/>
-          </a:xfrm>
-          <a:prstGeom prst="rect">
-            <a:avLst/>
-          </a:prstGeom>
-        </p:spPr>
-      </p:pic>
-      <p:sp>
-        <p:nvSpPr>
-          <p:cNvPr id="15" name="Text 11"/>
+          <a:bodyPr wrap="square" lIns="0" tIns="0" rIns="0" bIns="0" rtlCol="0" anchor="ctr"/>
+          <a:lstStyle/>
+          <a:p>
+            <a:pPr indent="0" marL="0">
+              <a:buNone/>
+            </a:pPr>
+            <a:r>
+              <a:rPr lang="en-US" sz="1600" b="1" dirty="0">
+                <a:solidFill>
+                  <a:srgbClr val="FFFFFF"/>
+                </a:solidFill>
+              </a:rPr>
+              <a:t>In Postman</a:t>
+            </a:r>
+            <a:endParaRPr lang="en-US" sz="1600" dirty="0"/>
+          </a:p>
+        </p:txBody>
+      </p:sp>
+      <p:sp>
+        <p:nvSpPr>
+          <p:cNvPr id="12" name="postman-requests"/>
           <p:cNvSpPr txBox="1"/>
           <p:nvPr/>
         </p:nvSpPr>
         <p:spPr>
           <a:xfrm>
-            <a:off x="6355080" y="2340864"/>
-            <a:ext cx="2331720" cy="868680"/>
+            <a:off x="6035040" y="1645920"/>
+            <a:ext cx="2468880" cy="2834640"/>
           </a:xfrm>
           <a:prstGeom prst="rect">
             <a:avLst/>
@@ -14081,201 +14112,59 @@
               <a:buNone/>
             </a:pPr>
             <a:r>
-              <a:rPr lang="en-US" sz="1400" dirty="0">
-                <a:solidFill>
-                  <a:srgbClr val="1B1F24"/>
-                </a:solidFill>
-              </a:rPr>
-              <a:t>a script that FAILS when create-note accepts </a:t>
-            </a:r>
-            <a:pPr indent="0" marL="0">
-              <a:buNone/>
-            </a:pPr>
-            <a:r>
-              <a:rPr lang="en-US" sz="1400" dirty="0">
-                <a:solidFill>
-                  <a:srgbClr val="1B1F24"/>
-                </a:solidFill>
-                <a:latin typeface="Courier New" pitchFamily="34" charset="0"/>
-                <a:ea typeface="Courier New" pitchFamily="34" charset="-122"/>
-                <a:cs typeface="Courier New" pitchFamily="34" charset="-120"/>
-              </a:rPr>
-              <a:t>{title:'x', status:'published'}</a:t>
-            </a:r>
-            <a:pPr indent="0" marL="0">
-              <a:buNone/>
-            </a:pPr>
-            <a:endParaRPr lang="en-US" sz="1400" dirty="0"/>
-          </a:p>
-        </p:txBody>
-      </p:sp>
-      <p:sp>
-        <p:nvSpPr>
-          <p:cNvPr id="16" name="Shape 12"/>
-          <p:cNvSpPr/>
-          <p:nvPr/>
-        </p:nvSpPr>
-        <p:spPr>
-          <a:xfrm>
-            <a:off x="5852160" y="3108960"/>
-            <a:ext cx="384048" cy="384048"/>
-          </a:xfrm>
-          <a:prstGeom prst="ellipse">
-            <a:avLst/>
-          </a:prstGeom>
-          <a:solidFill>
-            <a:srgbClr val="1FB68A"/>
-          </a:solidFill>
-          <a:ln w="12700">
-            <a:solidFill>
-              <a:srgbClr val="1FB68A"/>
-            </a:solidFill>
-            <a:prstDash val="solid"/>
-          </a:ln>
-        </p:spPr>
-      </p:sp>
-      <p:pic>
-        <p:nvPicPr>
-          <p:cNvPr id="17" name="Image 2" descr="preencoded.png">    </p:cNvPr>
-          <p:cNvPicPr>
-            <a:picLocks noChangeAspect="1"/>
-          </p:cNvPicPr>
-          <p:nvPr/>
-        </p:nvPicPr>
-        <p:blipFill>
-          <a:blip r:embed="rId3"/>
-          <a:stretch>
-            <a:fillRect/>
-          </a:stretch>
-        </p:blipFill>
-        <p:spPr>
-          <a:xfrm>
-            <a:off x="5936651" y="3193451"/>
-            <a:ext cx="215067" cy="215067"/>
-          </a:xfrm>
-          <a:prstGeom prst="rect">
-            <a:avLst/>
-          </a:prstGeom>
-        </p:spPr>
-      </p:pic>
-      <p:sp>
-        <p:nvSpPr>
-          <p:cNvPr id="18" name="Text 13"/>
-          <p:cNvSpPr txBox="1"/>
-          <p:nvPr/>
-        </p:nvSpPr>
-        <p:spPr>
-          <a:xfrm>
-            <a:off x="6355080" y="3072384"/>
-            <a:ext cx="2331720" cy="868680"/>
-          </a:xfrm>
-          <a:prstGeom prst="rect">
-            <a:avLst/>
-          </a:prstGeom>
-          <a:noFill/>
-          <a:ln/>
-        </p:spPr>
-        <p:txBody>
-          <a:bodyPr wrap="square" lIns="0" tIns="0" rIns="0" bIns="0" rtlCol="0" anchor="t"/>
-          <a:lstStyle/>
-          <a:p>
-            <a:pPr indent="0" marL="0">
-              <a:buNone/>
-            </a:pPr>
-            <a:r>
-              <a:rPr lang="en-US" sz="1400" dirty="0">
-                <a:solidFill>
-                  <a:srgbClr val="1B1F24"/>
-                </a:solidFill>
-              </a:rPr>
-              <a:t>both framings captured and compared</a:t>
-            </a:r>
-            <a:endParaRPr lang="en-US" sz="1400" dirty="0"/>
-          </a:p>
-        </p:txBody>
-      </p:sp>
-      <p:sp>
-        <p:nvSpPr>
-          <p:cNvPr id="19" name="Shape 14"/>
-          <p:cNvSpPr/>
-          <p:nvPr/>
-        </p:nvSpPr>
-        <p:spPr>
-          <a:xfrm>
-            <a:off x="5852160" y="3840480"/>
-            <a:ext cx="384048" cy="384048"/>
-          </a:xfrm>
-          <a:prstGeom prst="ellipse">
-            <a:avLst/>
-          </a:prstGeom>
-          <a:solidFill>
-            <a:srgbClr val="1FB68A"/>
-          </a:solidFill>
-          <a:ln w="12700">
-            <a:solidFill>
-              <a:srgbClr val="1FB68A"/>
-            </a:solidFill>
-            <a:prstDash val="solid"/>
-          </a:ln>
-        </p:spPr>
-      </p:sp>
-      <p:pic>
-        <p:nvPicPr>
-          <p:cNvPr id="20" name="Image 3" descr="preencoded.png">    </p:cNvPr>
-          <p:cNvPicPr>
-            <a:picLocks noChangeAspect="1"/>
-          </p:cNvPicPr>
-          <p:nvPr/>
-        </p:nvPicPr>
-        <p:blipFill>
-          <a:blip r:embed="rId4"/>
-          <a:stretch>
-            <a:fillRect/>
-          </a:stretch>
-        </p:blipFill>
-        <p:spPr>
-          <a:xfrm>
-            <a:off x="5936651" y="3924971"/>
-            <a:ext cx="215067" cy="215067"/>
-          </a:xfrm>
-          <a:prstGeom prst="rect">
-            <a:avLst/>
-          </a:prstGeom>
-        </p:spPr>
-      </p:pic>
-      <p:sp>
-        <p:nvSpPr>
-          <p:cNvPr id="21" name="Text 15"/>
-          <p:cNvSpPr txBox="1"/>
-          <p:nvPr/>
-        </p:nvSpPr>
-        <p:spPr>
-          <a:xfrm>
-            <a:off x="6355080" y="3803904"/>
-            <a:ext cx="2331720" cy="868680"/>
-          </a:xfrm>
-          <a:prstGeom prst="rect">
-            <a:avLst/>
-          </a:prstGeom>
-          <a:noFill/>
-          <a:ln/>
-        </p:spPr>
-        <p:txBody>
-          <a:bodyPr wrap="square" lIns="0" tIns="0" rIns="0" bIns="0" rtlCol="0" anchor="t"/>
-          <a:lstStyle/>
-          <a:p>
-            <a:pPr indent="0" marL="0">
-              <a:buNone/>
-            </a:pPr>
-            <a:r>
-              <a:rPr lang="en-US" sz="1400" dirty="0">
-                <a:solidFill>
-                  <a:srgbClr val="1B1F24"/>
-                </a:solidFill>
-              </a:rPr>
-              <a:t>MCP_ALLOWED_HOSTS explained in one sentence</a:t>
-            </a:r>
-            <a:endParaRPr lang="en-US" sz="1400" dirty="0"/>
+              <a:rPr lang="en-US" sz="1300" b="1" dirty="0">
+                <a:solidFill>
+                  <a:srgbClr val="FFFFFF"/>
+                </a:solidFill>
+              </a:rPr>
+              <a:t>05 · MCP over HTTP (lite module 4)</a:t>
+            </a:r>
+            <a:endParaRPr lang="en-US" sz="1300" dirty="0"/>
+          </a:p>
+          <a:p>
+            <a:pPr indent="0" marL="0">
+              <a:buNone/>
+            </a:pPr>
+            <a:r>
+              <a:rPr lang="en-US" sz="1300" dirty="0">
+                <a:solidFill>
+                  <a:srgbClr val="FFFFFF"/>
+                </a:solidFill>
+              </a:rPr>
+              <a:t>1. initialize</a:t>
+            </a:r>
+            <a:endParaRPr lang="en-US" sz="1300" dirty="0"/>
+          </a:p>
+          <a:p>
+            <a:pPr indent="0" marL="0">
+              <a:spcBef>
+                <a:spcPts val="600"/>
+              </a:spcBef>
+              <a:buNone/>
+            </a:pPr>
+            <a:r>
+              <a:rPr lang="en-US" sz="1300" b="1" dirty="0">
+                <a:solidFill>
+                  <a:srgbClr val="FFFFFF"/>
+                </a:solidFill>
+              </a:rPr>
+              <a:t>08 · Host check (lite module 5)</a:t>
+            </a:r>
+            <a:endParaRPr lang="en-US" sz="1300" dirty="0"/>
+          </a:p>
+          <a:p>
+            <a:pPr indent="0" marL="0">
+              <a:buNone/>
+            </a:pPr>
+            <a:r>
+              <a:rPr lang="en-US" sz="1300" dirty="0">
+                <a:solidFill>
+                  <a:srgbClr val="FFFFFF"/>
+                </a:solidFill>
+              </a:rPr>
+              <a:t>1. Foreign Host → 403</a:t>
+            </a:r>
+            <a:endParaRPr lang="en-US" sz="1300" dirty="0"/>
           </a:p>
         </p:txBody>
       </p:sp>
@@ -14381,7 +14270,7 @@
                   <a:srgbClr val="1B1F24"/>
                 </a:solidFill>
               </a:rPr>
-              <a:t>If you are stuck: module 5</a:t>
+              <a:t>Checkpoint: exit 5, then two framings</a:t>
             </a:r>
             <a:endParaRPr lang="en-US" sz="3200" dirty="0"/>
           </a:p>
@@ -14389,26 +14278,26 @@
       </p:sp>
       <p:sp>
         <p:nvSpPr>
-          <p:cNvPr id="3" name="snag-1"/>
+          <p:cNvPr id="3" name="terminal"/>
           <p:cNvSpPr/>
           <p:nvPr/>
         </p:nvSpPr>
         <p:spPr>
           <a:xfrm>
             <a:off x="457200" y="1097280"/>
-            <a:ext cx="8229600" cy="1051560"/>
+            <a:ext cx="5029200" cy="3520440"/>
           </a:xfrm>
           <a:prstGeom prst="roundRect">
             <a:avLst>
-              <a:gd name="adj" fmla="val 6957"/>
+              <a:gd name="adj" fmla="val 2078"/>
             </a:avLst>
           </a:prstGeom>
           <a:solidFill>
-            <a:srgbClr val="F1F5F9"/>
+            <a:srgbClr val="1B1F24"/>
           </a:solidFill>
           <a:ln w="12700">
             <a:solidFill>
-              <a:srgbClr val="F1F5F9"/>
+              <a:srgbClr val="1B1F24"/>
             </a:solidFill>
             <a:prstDash val="solid"/>
           </a:ln>
@@ -14422,8 +14311,33 @@
         </p:nvSpPr>
         <p:spPr>
           <a:xfrm>
-            <a:off x="685800" y="1371600"/>
-            <a:ext cx="502920" cy="502920"/>
+            <a:off x="640080" y="1225296"/>
+            <a:ext cx="109728" cy="109728"/>
+          </a:xfrm>
+          <a:prstGeom prst="ellipse">
+            <a:avLst/>
+          </a:prstGeom>
+          <a:solidFill>
+            <a:srgbClr val="E5484D"/>
+          </a:solidFill>
+          <a:ln w="12700">
+            <a:solidFill>
+              <a:srgbClr val="E5484D"/>
+            </a:solidFill>
+            <a:prstDash val="solid"/>
+          </a:ln>
+        </p:spPr>
+      </p:sp>
+      <p:sp>
+        <p:nvSpPr>
+          <p:cNvPr id="5" name="Shape 3"/>
+          <p:cNvSpPr/>
+          <p:nvPr/>
+        </p:nvSpPr>
+        <p:spPr>
+          <a:xfrm>
+            <a:off x="822960" y="1225296"/>
+            <a:ext cx="109728" cy="109728"/>
           </a:xfrm>
           <a:prstGeom prst="ellipse">
             <a:avLst/>
@@ -14439,9 +14353,275 @@
           </a:ln>
         </p:spPr>
       </p:sp>
+      <p:sp>
+        <p:nvSpPr>
+          <p:cNvPr id="6" name="Shape 4"/>
+          <p:cNvSpPr/>
+          <p:nvPr/>
+        </p:nvSpPr>
+        <p:spPr>
+          <a:xfrm>
+            <a:off x="1005840" y="1225296"/>
+            <a:ext cx="109728" cy="109728"/>
+          </a:xfrm>
+          <a:prstGeom prst="ellipse">
+            <a:avLst/>
+          </a:prstGeom>
+          <a:solidFill>
+            <a:srgbClr val="1FB68A"/>
+          </a:solidFill>
+          <a:ln w="12700">
+            <a:solidFill>
+              <a:srgbClr val="1FB68A"/>
+            </a:solidFill>
+            <a:prstDash val="solid"/>
+          </a:ln>
+        </p:spPr>
+      </p:sp>
+      <p:sp>
+        <p:nvSpPr>
+          <p:cNvPr id="7" name="Text 5"/>
+          <p:cNvSpPr txBox="1"/>
+          <p:nvPr/>
+        </p:nvSpPr>
+        <p:spPr>
+          <a:xfrm>
+            <a:off x="1280160" y="1152144"/>
+            <a:ext cx="4023360" cy="256032"/>
+          </a:xfrm>
+          <a:prstGeom prst="rect">
+            <a:avLst/>
+          </a:prstGeom>
+          <a:noFill/>
+          <a:ln/>
+        </p:spPr>
+        <p:txBody>
+          <a:bodyPr wrap="square" lIns="0" tIns="0" rIns="0" bIns="0" rtlCol="0" anchor="ctr"/>
+          <a:lstStyle/>
+          <a:p>
+            <a:pPr algn="r" indent="0" marL="0">
+              <a:buNone/>
+            </a:pPr>
+            <a:r>
+              <a:rPr lang="en-US" sz="1000" dirty="0">
+                <a:solidFill>
+                  <a:srgbClr val="8B98A5"/>
+                </a:solidFill>
+                <a:latin typeface="Calibri" pitchFamily="34" charset="0"/>
+                <a:ea typeface="Calibri" pitchFamily="34" charset="-122"/>
+                <a:cs typeface="Calibri" pitchFamily="34" charset="-120"/>
+              </a:rPr>
+              <a:t>output: captured, then expected</a:t>
+            </a:r>
+            <a:endParaRPr lang="en-US" sz="1000" dirty="0"/>
+          </a:p>
+        </p:txBody>
+      </p:sp>
+      <p:sp>
+        <p:nvSpPr>
+          <p:cNvPr id="8" name="terminal-text"/>
+          <p:cNvSpPr txBox="1"/>
+          <p:nvPr/>
+        </p:nvSpPr>
+        <p:spPr>
+          <a:xfrm>
+            <a:off x="685800" y="1481328"/>
+            <a:ext cx="4572000" cy="3017520"/>
+          </a:xfrm>
+          <a:prstGeom prst="rect">
+            <a:avLst/>
+          </a:prstGeom>
+          <a:noFill/>
+          <a:ln/>
+        </p:spPr>
+        <p:txBody>
+          <a:bodyPr wrap="square" lIns="0" tIns="0" rIns="0" bIns="0" rtlCol="0" anchor="t"/>
+          <a:lstStyle/>
+          <a:p>
+            <a:pPr indent="0" marL="0">
+              <a:buNone/>
+            </a:pPr>
+            <a:r>
+              <a:rPr lang="en-US" sz="1200" dirty="0">
+                <a:solidFill>
+                  <a:srgbClr val="E6EDF3"/>
+                </a:solidFill>
+                <a:latin typeface="Courier New" pitchFamily="34" charset="0"/>
+                <a:ea typeface="Courier New" pitchFamily="34" charset="-122"/>
+                <a:cs typeface="Courier New" pitchFamily="34" charset="-120"/>
+              </a:rPr>
+              <a:t>{ "content": [ { "type": "text",</a:t>
+            </a:r>
+            <a:endParaRPr lang="en-US" sz="1200" dirty="0"/>
+          </a:p>
+          <a:p>
+            <a:pPr indent="0" marL="0">
+              <a:buNone/>
+            </a:pPr>
+            <a:r>
+              <a:rPr lang="en-US" sz="1200" dirty="0">
+                <a:solidFill>
+                  <a:srgbClr val="E6EDF3"/>
+                </a:solidFill>
+                <a:latin typeface="Courier New" pitchFamily="34" charset="0"/>
+                <a:ea typeface="Courier New" pitchFamily="34" charset="-122"/>
+                <a:cs typeface="Courier New" pitchFamily="34" charset="-120"/>
+              </a:rPr>
+              <a:t>  "text": "NOT_FOUND: Note … not found" } ],</a:t>
+            </a:r>
+            <a:endParaRPr lang="en-US" sz="1200" dirty="0"/>
+          </a:p>
+          <a:p>
+            <a:pPr indent="0" marL="0">
+              <a:buNone/>
+            </a:pPr>
+            <a:r>
+              <a:rPr lang="en-US" sz="1200" dirty="0">
+                <a:solidFill>
+                  <a:srgbClr val="E6EDF3"/>
+                </a:solidFill>
+                <a:latin typeface="Courier New" pitchFamily="34" charset="0"/>
+                <a:ea typeface="Courier New" pitchFamily="34" charset="-122"/>
+                <a:cs typeface="Courier New" pitchFamily="34" charset="-120"/>
+              </a:rPr>
+              <a:t>  "isError": true }</a:t>
+            </a:r>
+            <a:endParaRPr lang="en-US" sz="1200" dirty="0"/>
+          </a:p>
+          <a:p>
+            <a:pPr indent="0" marL="0">
+              <a:buNone/>
+            </a:pPr>
+            <a:r>
+              <a:rPr lang="en-US" sz="1200" dirty="0">
+                <a:solidFill>
+                  <a:srgbClr val="E6EDF3"/>
+                </a:solidFill>
+                <a:latin typeface="Courier New" pitchFamily="34" charset="0"/>
+                <a:ea typeface="Courier New" pitchFamily="34" charset="-122"/>
+                <a:cs typeface="Courier New" pitchFamily="34" charset="-120"/>
+              </a:rPr>
+              <a:t>exit: 5</a:t>
+            </a:r>
+            <a:endParaRPr lang="en-US" sz="1200" dirty="0"/>
+          </a:p>
+          <a:p>
+            <a:pPr indent="0" marL="0">
+              <a:buNone/>
+            </a:pPr>
+            <a:r>
+              <a:rPr lang="en-US" sz="1200" dirty="0">
+                <a:solidFill>
+                  <a:srgbClr val="8B98A5"/>
+                </a:solidFill>
+                <a:latin typeface="Courier New" pitchFamily="34" charset="0"/>
+                <a:ea typeface="Courier New" pitchFamily="34" charset="-122"/>
+                <a:cs typeface="Courier New" pitchFamily="34" charset="-120"/>
+              </a:rPr>
+              <a:t># enableJsonResponse: true (expected)</a:t>
+            </a:r>
+            <a:endParaRPr lang="en-US" sz="1200" dirty="0"/>
+          </a:p>
+          <a:p>
+            <a:pPr indent="0" marL="0">
+              <a:buNone/>
+            </a:pPr>
+            <a:r>
+              <a:rPr lang="en-US" sz="1200" dirty="0">
+                <a:solidFill>
+                  <a:srgbClr val="E6EDF3"/>
+                </a:solidFill>
+                <a:latin typeface="Courier New" pitchFamily="34" charset="0"/>
+                <a:ea typeface="Courier New" pitchFamily="34" charset="-122"/>
+                <a:cs typeface="Courier New" pitchFamily="34" charset="-120"/>
+              </a:rPr>
+              <a:t>content-type: application/json</a:t>
+            </a:r>
+            <a:endParaRPr lang="en-US" sz="1200" dirty="0"/>
+          </a:p>
+          <a:p>
+            <a:pPr indent="0" marL="0">
+              <a:buNone/>
+            </a:pPr>
+            <a:r>
+              <a:rPr lang="en-US" sz="1200" dirty="0">
+                <a:solidFill>
+                  <a:srgbClr val="E6EDF3"/>
+                </a:solidFill>
+                <a:latin typeface="Courier New" pitchFamily="34" charset="0"/>
+                <a:ea typeface="Courier New" pitchFamily="34" charset="-122"/>
+                <a:cs typeface="Courier New" pitchFamily="34" charset="-120"/>
+              </a:rPr>
+              <a:t>{"result":…}</a:t>
+            </a:r>
+            <a:endParaRPr lang="en-US" sz="1200" dirty="0"/>
+          </a:p>
+        </p:txBody>
+      </p:sp>
+      <p:sp>
+        <p:nvSpPr>
+          <p:cNvPr id="9" name="Text 7"/>
+          <p:cNvSpPr txBox="1"/>
+          <p:nvPr/>
+        </p:nvSpPr>
+        <p:spPr>
+          <a:xfrm>
+            <a:off x="5852160" y="1097280"/>
+            <a:ext cx="2834640" cy="411480"/>
+          </a:xfrm>
+          <a:prstGeom prst="rect">
+            <a:avLst/>
+          </a:prstGeom>
+          <a:noFill/>
+          <a:ln/>
+        </p:spPr>
+        <p:txBody>
+          <a:bodyPr wrap="square" lIns="0" tIns="0" rIns="0" bIns="0" rtlCol="0" anchor="ctr"/>
+          <a:lstStyle/>
+          <a:p>
+            <a:pPr indent="0" marL="0">
+              <a:buNone/>
+            </a:pPr>
+            <a:r>
+              <a:rPr lang="en-US" sz="2000" b="1" dirty="0">
+                <a:solidFill>
+                  <a:srgbClr val="1B1F24"/>
+                </a:solidFill>
+              </a:rPr>
+              <a:t>Done when</a:t>
+            </a:r>
+            <a:endParaRPr lang="en-US" sz="2000" dirty="0"/>
+          </a:p>
+        </p:txBody>
+      </p:sp>
+      <p:sp>
+        <p:nvSpPr>
+          <p:cNvPr id="10" name="Shape 8"/>
+          <p:cNvSpPr/>
+          <p:nvPr/>
+        </p:nvSpPr>
+        <p:spPr>
+          <a:xfrm>
+            <a:off x="5852160" y="1645920"/>
+            <a:ext cx="384048" cy="384048"/>
+          </a:xfrm>
+          <a:prstGeom prst="ellipse">
+            <a:avLst/>
+          </a:prstGeom>
+          <a:solidFill>
+            <a:srgbClr val="1FB68A"/>
+          </a:solidFill>
+          <a:ln w="12700">
+            <a:solidFill>
+              <a:srgbClr val="1FB68A"/>
+            </a:solidFill>
+            <a:prstDash val="solid"/>
+          </a:ln>
+        </p:spPr>
+      </p:sp>
       <p:pic>
         <p:nvPicPr>
-          <p:cNvPr id="5" name="Image 0" descr="preencoded.png">    </p:cNvPr>
+          <p:cNvPr id="11" name="Image 0" descr="preencoded.png">    </p:cNvPr>
           <p:cNvPicPr>
             <a:picLocks noChangeAspect="1"/>
           </p:cNvPicPr>
@@ -14455,8 +14635,8 @@
         </p:blipFill>
         <p:spPr>
           <a:xfrm>
-            <a:off x="796442" y="1482242"/>
-            <a:ext cx="281635" cy="281635"/>
+            <a:off x="5936651" y="1730411"/>
+            <a:ext cx="215067" cy="215067"/>
           </a:xfrm>
           <a:prstGeom prst="rect">
             <a:avLst/>
@@ -14465,14 +14645,14 @@
       </p:pic>
       <p:sp>
         <p:nvSpPr>
-          <p:cNvPr id="6" name="Text 3"/>
+          <p:cNvPr id="12" name="Text 9"/>
           <p:cNvSpPr txBox="1"/>
           <p:nvPr/>
         </p:nvSpPr>
         <p:spPr>
           <a:xfrm>
-            <a:off x="1417320" y="1188720"/>
-            <a:ext cx="7086600" cy="868680"/>
+            <a:off x="6355080" y="1609344"/>
+            <a:ext cx="2331720" cy="868680"/>
           </a:xfrm>
           <a:prstGeom prst="rect">
             <a:avLst/>
@@ -14481,93 +14661,69 @@
           <a:ln/>
         </p:spPr>
         <p:txBody>
-          <a:bodyPr wrap="square" lIns="0" tIns="0" rIns="0" bIns="0" rtlCol="0" anchor="ctr"/>
-          <a:lstStyle/>
-          <a:p>
-            <a:pPr indent="0" marL="0">
-              <a:buNone/>
-            </a:pPr>
-            <a:r>
-              <a:rPr lang="en-US" sz="1600" b="1" dirty="0">
+          <a:bodyPr wrap="square" lIns="0" tIns="0" rIns="0" bIns="0" rtlCol="0" anchor="t"/>
+          <a:lstStyle/>
+          <a:p>
+            <a:pPr indent="0" marL="0">
+              <a:buNone/>
+            </a:pPr>
+            <a:pPr indent="0" marL="0">
+              <a:buNone/>
+            </a:pPr>
+            <a:r>
+              <a:rPr lang="en-US" sz="1400" dirty="0">
                 <a:solidFill>
                   <a:srgbClr val="1B1F24"/>
                 </a:solidFill>
-              </a:rPr>
-              <a:t>No such file dist/mcp-stdio.js</a:t>
-            </a:r>
-            <a:endParaRPr lang="en-US" sz="1600" dirty="0"/>
-          </a:p>
-          <a:p>
+                <a:latin typeface="Courier New" pitchFamily="34" charset="0"/>
+                <a:ea typeface="Courier New" pitchFamily="34" charset="-122"/>
+                <a:cs typeface="Courier New" pitchFamily="34" charset="-120"/>
+              </a:rPr>
+              <a:t>dev pnpm lab 08</a:t>
+            </a:r>
             <a:pPr indent="0" marL="0">
               <a:buNone/>
             </a:pPr>
             <a:r>
               <a:rPr lang="en-US" sz="1400" dirty="0">
                 <a:solidFill>
-                  <a:srgbClr val="2B3440"/>
-                </a:solidFill>
-              </a:rPr>
-              <a:t>Build first: dev pnpm build.</a:t>
-            </a:r>
-            <a:endParaRPr lang="en-US" sz="1600" dirty="0"/>
-          </a:p>
-        </p:txBody>
-      </p:sp>
-      <p:sp>
-        <p:nvSpPr>
-          <p:cNvPr id="7" name="snag-2"/>
+                  <a:srgbClr val="1B1F24"/>
+                </a:solidFill>
+              </a:rPr>
+              <a:t>: every test passes</a:t>
+            </a:r>
+            <a:endParaRPr lang="en-US" sz="1400" dirty="0"/>
+          </a:p>
+        </p:txBody>
+      </p:sp>
+      <p:sp>
+        <p:nvSpPr>
+          <p:cNvPr id="13" name="Shape 10"/>
           <p:cNvSpPr/>
           <p:nvPr/>
         </p:nvSpPr>
         <p:spPr>
           <a:xfrm>
-            <a:off x="457200" y="2286000"/>
-            <a:ext cx="8229600" cy="1051560"/>
-          </a:xfrm>
-          <a:prstGeom prst="roundRect">
-            <a:avLst>
-              <a:gd name="adj" fmla="val 6957"/>
-            </a:avLst>
+            <a:off x="5852160" y="2377440"/>
+            <a:ext cx="384048" cy="384048"/>
+          </a:xfrm>
+          <a:prstGeom prst="ellipse">
+            <a:avLst/>
           </a:prstGeom>
           <a:solidFill>
-            <a:srgbClr val="F1F5F9"/>
+            <a:srgbClr val="1FB68A"/>
           </a:solidFill>
           <a:ln w="12700">
             <a:solidFill>
-              <a:srgbClr val="F1F5F9"/>
+              <a:srgbClr val="1FB68A"/>
             </a:solidFill>
             <a:prstDash val="solid"/>
           </a:ln>
         </p:spPr>
       </p:sp>
-      <p:sp>
-        <p:nvSpPr>
-          <p:cNvPr id="8" name="Shape 5"/>
-          <p:cNvSpPr/>
-          <p:nvPr/>
-        </p:nvSpPr>
-        <p:spPr>
-          <a:xfrm>
-            <a:off x="685800" y="2560320"/>
-            <a:ext cx="502920" cy="502920"/>
-          </a:xfrm>
-          <a:prstGeom prst="ellipse">
-            <a:avLst/>
-          </a:prstGeom>
-          <a:solidFill>
-            <a:srgbClr val="E69A28"/>
-          </a:solidFill>
-          <a:ln w="12700">
-            <a:solidFill>
-              <a:srgbClr val="E69A28"/>
-            </a:solidFill>
-            <a:prstDash val="solid"/>
-          </a:ln>
-        </p:spPr>
-      </p:sp>
       <p:pic>
         <p:nvPicPr>
-          <p:cNvPr id="9" name="Image 1" descr="preencoded.png">    </p:cNvPr>
+          <p:cNvPr id="14" name="Image 1" descr="preencoded.png">    </p:cNvPr>
           <p:cNvPicPr>
             <a:picLocks noChangeAspect="1"/>
           </p:cNvPicPr>
@@ -14581,8 +14737,8 @@
         </p:blipFill>
         <p:spPr>
           <a:xfrm>
-            <a:off x="796442" y="2670962"/>
-            <a:ext cx="281635" cy="281635"/>
+            <a:off x="5936651" y="2461931"/>
+            <a:ext cx="215067" cy="215067"/>
           </a:xfrm>
           <a:prstGeom prst="rect">
             <a:avLst/>
@@ -14591,14 +14747,14 @@
       </p:pic>
       <p:sp>
         <p:nvSpPr>
-          <p:cNvPr id="10" name="Text 6"/>
+          <p:cNvPr id="15" name="Text 11"/>
           <p:cNvSpPr txBox="1"/>
           <p:nvPr/>
         </p:nvSpPr>
         <p:spPr>
           <a:xfrm>
-            <a:off x="1417320" y="2377440"/>
-            <a:ext cx="7086600" cy="868680"/>
+            <a:off x="6355080" y="2340864"/>
+            <a:ext cx="2331720" cy="868680"/>
           </a:xfrm>
           <a:prstGeom prst="rect">
             <a:avLst/>
@@ -14607,93 +14763,52 @@
           <a:ln/>
         </p:spPr>
         <p:txBody>
-          <a:bodyPr wrap="square" lIns="0" tIns="0" rIns="0" bIns="0" rtlCol="0" anchor="ctr"/>
-          <a:lstStyle/>
-          <a:p>
-            <a:pPr indent="0" marL="0">
-              <a:buNone/>
-            </a:pPr>
-            <a:r>
-              <a:rPr lang="en-US" sz="1600" b="1" dirty="0">
+          <a:bodyPr wrap="square" lIns="0" tIns="0" rIns="0" bIns="0" rtlCol="0" anchor="t"/>
+          <a:lstStyle/>
+          <a:p>
+            <a:pPr indent="0" marL="0">
+              <a:buNone/>
+            </a:pPr>
+            <a:r>
+              <a:rPr lang="en-US" sz="1400" dirty="0">
                 <a:solidFill>
                   <a:srgbClr val="1B1F24"/>
                 </a:solidFill>
               </a:rPr>
-              <a:t>Sharing the Inspector UI URL</a:t>
-            </a:r>
-            <a:endParaRPr lang="en-US" sz="1600" dirty="0"/>
-          </a:p>
-          <a:p>
-            <a:pPr indent="0" marL="0">
-              <a:buNone/>
-            </a:pPr>
-            <a:r>
-              <a:rPr lang="en-US" sz="1400" dirty="0">
-                <a:solidFill>
-                  <a:srgbClr val="2B3440"/>
-                </a:solidFill>
-              </a:rPr>
-              <a:t>Don't: it carries MCP_INSPECTOR_API_TOKEN, which is a credential.</a:t>
-            </a:r>
-            <a:endParaRPr lang="en-US" sz="1600" dirty="0"/>
-          </a:p>
-        </p:txBody>
-      </p:sp>
-      <p:sp>
-        <p:nvSpPr>
-          <p:cNvPr id="11" name="snag-3"/>
+              <a:t>the Inspector UI shows Connected</a:t>
+            </a:r>
+            <a:endParaRPr lang="en-US" sz="1400" dirty="0"/>
+          </a:p>
+        </p:txBody>
+      </p:sp>
+      <p:sp>
+        <p:nvSpPr>
+          <p:cNvPr id="16" name="Shape 12"/>
           <p:cNvSpPr/>
           <p:nvPr/>
         </p:nvSpPr>
         <p:spPr>
           <a:xfrm>
-            <a:off x="457200" y="3474720"/>
-            <a:ext cx="8229600" cy="1051560"/>
-          </a:xfrm>
-          <a:prstGeom prst="roundRect">
-            <a:avLst>
-              <a:gd name="adj" fmla="val 6957"/>
-            </a:avLst>
+            <a:off x="5852160" y="3108960"/>
+            <a:ext cx="384048" cy="384048"/>
+          </a:xfrm>
+          <a:prstGeom prst="ellipse">
+            <a:avLst/>
           </a:prstGeom>
           <a:solidFill>
-            <a:srgbClr val="F1F5F9"/>
+            <a:srgbClr val="1FB68A"/>
           </a:solidFill>
           <a:ln w="12700">
             <a:solidFill>
-              <a:srgbClr val="F1F5F9"/>
+              <a:srgbClr val="1FB68A"/>
             </a:solidFill>
             <a:prstDash val="solid"/>
           </a:ln>
         </p:spPr>
       </p:sp>
-      <p:sp>
-        <p:nvSpPr>
-          <p:cNvPr id="12" name="Shape 8"/>
-          <p:cNvSpPr/>
-          <p:nvPr/>
-        </p:nvSpPr>
-        <p:spPr>
-          <a:xfrm>
-            <a:off x="685800" y="3749040"/>
-            <a:ext cx="502920" cy="502920"/>
-          </a:xfrm>
-          <a:prstGeom prst="ellipse">
-            <a:avLst/>
-          </a:prstGeom>
-          <a:solidFill>
-            <a:srgbClr val="E69A28"/>
-          </a:solidFill>
-          <a:ln w="12700">
-            <a:solidFill>
-              <a:srgbClr val="E69A28"/>
-            </a:solidFill>
-            <a:prstDash val="solid"/>
-          </a:ln>
-        </p:spPr>
-      </p:sp>
       <p:pic>
         <p:nvPicPr>
-          <p:cNvPr id="13" name="Image 2" descr="preencoded.png">    </p:cNvPr>
+          <p:cNvPr id="17" name="Image 2" descr="preencoded.png">    </p:cNvPr>
           <p:cNvPicPr>
             <a:picLocks noChangeAspect="1"/>
           </p:cNvPicPr>
@@ -14707,8 +14822,8 @@
         </p:blipFill>
         <p:spPr>
           <a:xfrm>
-            <a:off x="796442" y="3859682"/>
-            <a:ext cx="281635" cy="281635"/>
+            <a:off x="5936651" y="3193451"/>
+            <a:ext cx="215067" cy="215067"/>
           </a:xfrm>
           <a:prstGeom prst="rect">
             <a:avLst/>
@@ -14717,14 +14832,14 @@
       </p:pic>
       <p:sp>
         <p:nvSpPr>
-          <p:cNvPr id="14" name="Text 9"/>
+          <p:cNvPr id="18" name="Text 13"/>
           <p:cNvSpPr txBox="1"/>
           <p:nvPr/>
         </p:nvSpPr>
         <p:spPr>
           <a:xfrm>
-            <a:off x="1417320" y="3566160"/>
-            <a:ext cx="7086600" cy="868680"/>
+            <a:off x="6355080" y="3072384"/>
+            <a:ext cx="2331720" cy="868680"/>
           </a:xfrm>
           <a:prstGeom prst="rect">
             <a:avLst/>
@@ -14733,35 +14848,123 @@
           <a:ln/>
         </p:spPr>
         <p:txBody>
-          <a:bodyPr wrap="square" lIns="0" tIns="0" rIns="0" bIns="0" rtlCol="0" anchor="ctr"/>
-          <a:lstStyle/>
-          <a:p>
-            <a:pPr indent="0" marL="0">
-              <a:buNone/>
-            </a:pPr>
-            <a:r>
-              <a:rPr lang="en-US" sz="1600" b="1" dirty="0">
+          <a:bodyPr wrap="square" lIns="0" tIns="0" rIns="0" bIns="0" rtlCol="0" anchor="t"/>
+          <a:lstStyle/>
+          <a:p>
+            <a:pPr indent="0" marL="0">
+              <a:buNone/>
+            </a:pPr>
+            <a:r>
+              <a:rPr lang="en-US" sz="1400" dirty="0">
                 <a:solidFill>
                   <a:srgbClr val="1B1F24"/>
                 </a:solidFill>
               </a:rPr>
-              <a:t>Called by service name: 403</a:t>
-            </a:r>
-            <a:endParaRPr lang="en-US" sz="1600" dirty="0"/>
-          </a:p>
-          <a:p>
+              <a:t>a script that FAILS when create-note accepts </a:t>
+            </a:r>
             <a:pPr indent="0" marL="0">
               <a:buNone/>
             </a:pPr>
             <a:r>
               <a:rPr lang="en-US" sz="1400" dirty="0">
                 <a:solidFill>
-                  <a:srgbClr val="2B3440"/>
-                </a:solidFill>
-              </a:rPr>
-              <a:t>Add that name to MCP_ALLOWED_HOSTS (reproduced in Docker).</a:t>
-            </a:r>
-            <a:endParaRPr lang="en-US" sz="1600" dirty="0"/>
+                  <a:srgbClr val="1B1F24"/>
+                </a:solidFill>
+                <a:latin typeface="Courier New" pitchFamily="34" charset="0"/>
+                <a:ea typeface="Courier New" pitchFamily="34" charset="-122"/>
+                <a:cs typeface="Courier New" pitchFamily="34" charset="-120"/>
+              </a:rPr>
+              <a:t>{title:'x', status:'published'}</a:t>
+            </a:r>
+            <a:pPr indent="0" marL="0">
+              <a:buNone/>
+            </a:pPr>
+            <a:endParaRPr lang="en-US" sz="1400" dirty="0"/>
+          </a:p>
+        </p:txBody>
+      </p:sp>
+      <p:sp>
+        <p:nvSpPr>
+          <p:cNvPr id="19" name="Shape 14"/>
+          <p:cNvSpPr/>
+          <p:nvPr/>
+        </p:nvSpPr>
+        <p:spPr>
+          <a:xfrm>
+            <a:off x="5852160" y="3840480"/>
+            <a:ext cx="384048" cy="384048"/>
+          </a:xfrm>
+          <a:prstGeom prst="ellipse">
+            <a:avLst/>
+          </a:prstGeom>
+          <a:solidFill>
+            <a:srgbClr val="1FB68A"/>
+          </a:solidFill>
+          <a:ln w="12700">
+            <a:solidFill>
+              <a:srgbClr val="1FB68A"/>
+            </a:solidFill>
+            <a:prstDash val="solid"/>
+          </a:ln>
+        </p:spPr>
+      </p:sp>
+      <p:pic>
+        <p:nvPicPr>
+          <p:cNvPr id="20" name="Image 3" descr="preencoded.png">    </p:cNvPr>
+          <p:cNvPicPr>
+            <a:picLocks noChangeAspect="1"/>
+          </p:cNvPicPr>
+          <p:nvPr/>
+        </p:nvPicPr>
+        <p:blipFill>
+          <a:blip r:embed="rId4"/>
+          <a:stretch>
+            <a:fillRect/>
+          </a:stretch>
+        </p:blipFill>
+        <p:spPr>
+          <a:xfrm>
+            <a:off x="5936651" y="3924971"/>
+            <a:ext cx="215067" cy="215067"/>
+          </a:xfrm>
+          <a:prstGeom prst="rect">
+            <a:avLst/>
+          </a:prstGeom>
+        </p:spPr>
+      </p:pic>
+      <p:sp>
+        <p:nvSpPr>
+          <p:cNvPr id="21" name="Text 15"/>
+          <p:cNvSpPr txBox="1"/>
+          <p:nvPr/>
+        </p:nvSpPr>
+        <p:spPr>
+          <a:xfrm>
+            <a:off x="6355080" y="3803904"/>
+            <a:ext cx="2331720" cy="868680"/>
+          </a:xfrm>
+          <a:prstGeom prst="rect">
+            <a:avLst/>
+          </a:prstGeom>
+          <a:noFill/>
+          <a:ln/>
+        </p:spPr>
+        <p:txBody>
+          <a:bodyPr wrap="square" lIns="0" tIns="0" rIns="0" bIns="0" rtlCol="0" anchor="t"/>
+          <a:lstStyle/>
+          <a:p>
+            <a:pPr indent="0" marL="0">
+              <a:buNone/>
+            </a:pPr>
+            <a:r>
+              <a:rPr lang="en-US" sz="1400" dirty="0">
+                <a:solidFill>
+                  <a:srgbClr val="1B1F24"/>
+                </a:solidFill>
+              </a:rPr>
+              <a:t>both framings captured and compared</a:t>
+            </a:r>
+            <a:endParaRPr lang="en-US" sz="1400" dirty="0"/>
           </a:p>
         </p:txBody>
       </p:sp>
@@ -14840,13 +15043,13 @@
           <p:cNvPr id="2" name="Text 0"/>
           <p:cNvSpPr/>
           <p:nvPr>
-            <p:ph idx="100" type="body" hasCustomPrompt="1"/>
+            <p:ph idx="100" type="title" hasCustomPrompt="1"/>
           </p:nvPr>
         </p:nvSpPr>
         <p:spPr>
           <a:xfrm>
-            <a:off x="548640" y="1097280"/>
-            <a:ext cx="5486400" cy="365760"/>
+            <a:off x="457200" y="274320"/>
+            <a:ext cx="8229600" cy="685800"/>
           </a:xfrm>
           <a:prstGeom prst="rect">
             <a:avLst/>
@@ -14855,122 +15058,46 @@
           <a:ln/>
         </p:spPr>
         <p:txBody>
-          <a:bodyPr wrap="square" lIns="0" tIns="0" rIns="0" bIns="0" rtlCol="0"/>
-          <a:lstStyle/>
-          <a:p>
-            <a:pPr indent="0" marL="0">
-              <a:buNone/>
-            </a:pPr>
-            <a:r>
-              <a:rPr lang="en-US" sz="1400" b="1" spc="300" kern="0" dirty="0">
-                <a:solidFill>
-                  <a:srgbClr val="1FB68A"/>
-                </a:solidFill>
-              </a:rPr>
-              <a:t>MODULE 6</a:t>
-            </a:r>
-            <a:endParaRPr lang="en-US" sz="1400" dirty="0"/>
-          </a:p>
-        </p:txBody>
-      </p:sp>
-      <p:sp>
-        <p:nvSpPr>
-          <p:cNvPr id="3" name="Text 0"/>
+          <a:bodyPr wrap="square" lIns="0" tIns="0" rIns="0" bIns="0" rtlCol="0" anchor="ctr"/>
+          <a:lstStyle/>
+          <a:p>
+            <a:pPr algn="l" indent="0" marL="0">
+              <a:buNone/>
+            </a:pPr>
+            <a:r>
+              <a:rPr lang="en-US" sz="3200" b="1" dirty="0">
+                <a:solidFill>
+                  <a:srgbClr val="1B1F24"/>
+                </a:solidFill>
+              </a:rPr>
+              <a:t>If you are stuck: module 5</a:t>
+            </a:r>
+            <a:endParaRPr lang="en-US" sz="3200" dirty="0"/>
+          </a:p>
+        </p:txBody>
+      </p:sp>
+      <p:sp>
+        <p:nvSpPr>
+          <p:cNvPr id="3" name="snag-1"/>
           <p:cNvSpPr/>
-          <p:nvPr>
-            <p:ph idx="101" type="title" hasCustomPrompt="1"/>
-          </p:nvPr>
-        </p:nvSpPr>
-        <p:spPr>
-          <a:xfrm>
-            <a:off x="548640" y="1508760"/>
-            <a:ext cx="8046720" cy="914400"/>
-          </a:xfrm>
-          <a:prstGeom prst="rect">
-            <a:avLst/>
-          </a:prstGeom>
-          <a:noFill/>
-          <a:ln/>
-        </p:spPr>
-        <p:txBody>
-          <a:bodyPr wrap="square" lIns="0" tIns="0" rIns="0" bIns="0" rtlCol="0" anchor="t"/>
-          <a:lstStyle/>
-          <a:p>
-            <a:pPr algn="l" indent="0" marL="0">
-              <a:buNone/>
-            </a:pPr>
-            <a:r>
-              <a:rPr lang="en-US" sz="4000" b="1" dirty="0">
-                <a:solidFill>
-                  <a:srgbClr val="FFFFFF"/>
-                </a:solidFill>
-              </a:rPr>
-              <a:t>Secure MCP, then the capstone</a:t>
-            </a:r>
-            <a:endParaRPr lang="en-US" sz="4000" dirty="0"/>
-          </a:p>
-        </p:txBody>
-      </p:sp>
-      <p:sp>
-        <p:nvSpPr>
-          <p:cNvPr id="4" name="Text 0"/>
-          <p:cNvSpPr/>
-          <p:nvPr>
-            <p:ph idx="102" type="body" hasCustomPrompt="1"/>
-          </p:nvPr>
-        </p:nvSpPr>
-        <p:spPr>
-          <a:xfrm>
-            <a:off x="548640" y="2560320"/>
-            <a:ext cx="5669280" cy="1097280"/>
-          </a:xfrm>
-          <a:prstGeom prst="rect">
-            <a:avLst/>
-          </a:prstGeom>
-          <a:noFill/>
-          <a:ln/>
-        </p:spPr>
-        <p:txBody>
-          <a:bodyPr wrap="square" lIns="0" tIns="0" rIns="0" bIns="0" rtlCol="0" anchor="t"/>
-          <a:lstStyle/>
-          <a:p>
-            <a:pPr indent="0" marL="0">
-              <a:buNone/>
-            </a:pPr>
-            <a:r>
-              <a:rPr lang="en-US" sz="1800" dirty="0">
-                <a:solidFill>
-                  <a:srgbClr val="CBD5E1"/>
-                </a:solidFill>
-              </a:rPr>
-              <a:t>Rotate a device secret mid-session and watch the next call fail. The capstone is homework.</a:t>
-            </a:r>
-            <a:endParaRPr lang="en-US" sz="1800" dirty="0"/>
-          </a:p>
-        </p:txBody>
-      </p:sp>
-      <p:sp>
-        <p:nvSpPr>
-          <p:cNvPr id="5" name="Shape 3"/>
-          <p:cNvSpPr/>
-          <p:nvPr/>
-        </p:nvSpPr>
-        <p:spPr>
-          <a:xfrm>
-            <a:off x="6675120" y="2560320"/>
-            <a:ext cx="2011680" cy="1097280"/>
+          <p:nvPr/>
+        </p:nvSpPr>
+        <p:spPr>
+          <a:xfrm>
+            <a:off x="457200" y="1097280"/>
+            <a:ext cx="8229600" cy="1051560"/>
           </a:xfrm>
           <a:prstGeom prst="roundRect">
             <a:avLst>
-              <a:gd name="adj" fmla="val 8333"/>
+              <a:gd name="adj" fmla="val 6957"/>
             </a:avLst>
           </a:prstGeom>
           <a:solidFill>
-            <a:srgbClr val="2B3440"/>
+            <a:srgbClr val="F1F5F9"/>
           </a:solidFill>
           <a:ln w="12700">
             <a:solidFill>
-              <a:srgbClr val="2B3440"/>
+              <a:srgbClr val="F1F5F9"/>
             </a:solidFill>
             <a:prstDash val="solid"/>
           </a:ln>
@@ -14978,24 +15105,24 @@
       </p:sp>
       <p:sp>
         <p:nvSpPr>
-          <p:cNvPr id="6" name="Shape 4"/>
+          <p:cNvPr id="4" name="Shape 2"/>
           <p:cNvSpPr/>
           <p:nvPr/>
         </p:nvSpPr>
         <p:spPr>
           <a:xfrm>
-            <a:off x="6858000" y="2788920"/>
-            <a:ext cx="640080" cy="640080"/>
+            <a:off x="685800" y="1371600"/>
+            <a:ext cx="502920" cy="502920"/>
           </a:xfrm>
           <a:prstGeom prst="ellipse">
             <a:avLst/>
           </a:prstGeom>
           <a:solidFill>
-            <a:srgbClr val="1FB68A"/>
+            <a:srgbClr val="E69A28"/>
           </a:solidFill>
           <a:ln w="12700">
             <a:solidFill>
-              <a:srgbClr val="1FB68A"/>
+              <a:srgbClr val="E69A28"/>
             </a:solidFill>
             <a:prstDash val="solid"/>
           </a:ln>
@@ -15003,7 +15130,7 @@
       </p:sp>
       <p:pic>
         <p:nvPicPr>
-          <p:cNvPr id="7" name="Image 0" descr="preencoded.png">    </p:cNvPr>
+          <p:cNvPr id="5" name="Image 0" descr="preencoded.png">    </p:cNvPr>
           <p:cNvPicPr>
             <a:picLocks noChangeAspect="1"/>
           </p:cNvPicPr>
@@ -15017,8 +15144,8 @@
         </p:blipFill>
         <p:spPr>
           <a:xfrm>
-            <a:off x="6998818" y="2929738"/>
-            <a:ext cx="358445" cy="358445"/>
+            <a:off x="796442" y="1482242"/>
+            <a:ext cx="281635" cy="281635"/>
           </a:xfrm>
           <a:prstGeom prst="rect">
             <a:avLst/>
@@ -15027,14 +15154,14 @@
       </p:pic>
       <p:sp>
         <p:nvSpPr>
-          <p:cNvPr id="8" name="Text 5"/>
+          <p:cNvPr id="6" name="Text 3"/>
           <p:cNvSpPr txBox="1"/>
           <p:nvPr/>
         </p:nvSpPr>
         <p:spPr>
           <a:xfrm>
-            <a:off x="7589520" y="2697480"/>
-            <a:ext cx="1051560" cy="822960"/>
+            <a:off x="1417320" y="1188720"/>
+            <a:ext cx="7086600" cy="868680"/>
           </a:xfrm>
           <a:prstGeom prst="rect">
             <a:avLst/>
@@ -15050,28 +15177,280 @@
               <a:buNone/>
             </a:pPr>
             <a:r>
-              <a:rPr lang="en-US" sz="2200" b="1" dirty="0">
-                <a:solidFill>
-                  <a:srgbClr val="FFFFFF"/>
-                </a:solidFill>
-              </a:rPr>
-              <a:t>20 min</a:t>
-            </a:r>
-            <a:endParaRPr lang="en-US" sz="2200" dirty="0"/>
-          </a:p>
-          <a:p>
-            <a:pPr indent="0" marL="0">
-              <a:buNone/>
-            </a:pPr>
-            <a:r>
-              <a:rPr lang="en-US" sz="1100" dirty="0">
-                <a:solidFill>
-                  <a:srgbClr val="CBD5E1"/>
-                </a:solidFill>
-              </a:rPr>
-              <a:t>lab (draft)</a:t>
-            </a:r>
-            <a:endParaRPr lang="en-US" sz="2200" dirty="0"/>
+              <a:rPr lang="en-US" sz="1600" b="1" dirty="0">
+                <a:solidFill>
+                  <a:srgbClr val="1B1F24"/>
+                </a:solidFill>
+              </a:rPr>
+              <a:t>The UI says Failed</a:t>
+            </a:r>
+            <a:endParaRPr lang="en-US" sz="1600" dirty="0"/>
+          </a:p>
+          <a:p>
+            <a:pPr indent="0" marL="0">
+              <a:buNone/>
+            </a:pPr>
+            <a:r>
+              <a:rPr lang="en-US" sz="1400" dirty="0">
+                <a:solidFill>
+                  <a:srgbClr val="2B3440"/>
+                </a:solidFill>
+              </a:rPr>
+              <a:t>Wrong or missing device headers. The 401 makes the Inspector try OAuth (404s in Network). Check Settings → Custom Headers.</a:t>
+            </a:r>
+            <a:endParaRPr lang="en-US" sz="1600" dirty="0"/>
+          </a:p>
+        </p:txBody>
+      </p:sp>
+      <p:sp>
+        <p:nvSpPr>
+          <p:cNvPr id="7" name="snag-2"/>
+          <p:cNvSpPr/>
+          <p:nvPr/>
+        </p:nvSpPr>
+        <p:spPr>
+          <a:xfrm>
+            <a:off x="457200" y="2286000"/>
+            <a:ext cx="8229600" cy="1051560"/>
+          </a:xfrm>
+          <a:prstGeom prst="roundRect">
+            <a:avLst>
+              <a:gd name="adj" fmla="val 6957"/>
+            </a:avLst>
+          </a:prstGeom>
+          <a:solidFill>
+            <a:srgbClr val="F1F5F9"/>
+          </a:solidFill>
+          <a:ln w="12700">
+            <a:solidFill>
+              <a:srgbClr val="F1F5F9"/>
+            </a:solidFill>
+            <a:prstDash val="solid"/>
+          </a:ln>
+        </p:spPr>
+      </p:sp>
+      <p:sp>
+        <p:nvSpPr>
+          <p:cNvPr id="8" name="Shape 5"/>
+          <p:cNvSpPr/>
+          <p:nvPr/>
+        </p:nvSpPr>
+        <p:spPr>
+          <a:xfrm>
+            <a:off x="685800" y="2560320"/>
+            <a:ext cx="502920" cy="502920"/>
+          </a:xfrm>
+          <a:prstGeom prst="ellipse">
+            <a:avLst/>
+          </a:prstGeom>
+          <a:solidFill>
+            <a:srgbClr val="E69A28"/>
+          </a:solidFill>
+          <a:ln w="12700">
+            <a:solidFill>
+              <a:srgbClr val="E69A28"/>
+            </a:solidFill>
+            <a:prstDash val="solid"/>
+          </a:ln>
+        </p:spPr>
+      </p:sp>
+      <p:pic>
+        <p:nvPicPr>
+          <p:cNvPr id="9" name="Image 1" descr="preencoded.png">    </p:cNvPr>
+          <p:cNvPicPr>
+            <a:picLocks noChangeAspect="1"/>
+          </p:cNvPicPr>
+          <p:nvPr/>
+        </p:nvPicPr>
+        <p:blipFill>
+          <a:blip r:embed="rId2"/>
+          <a:stretch>
+            <a:fillRect/>
+          </a:stretch>
+        </p:blipFill>
+        <p:spPr>
+          <a:xfrm>
+            <a:off x="796442" y="2670962"/>
+            <a:ext cx="281635" cy="281635"/>
+          </a:xfrm>
+          <a:prstGeom prst="rect">
+            <a:avLst/>
+          </a:prstGeom>
+        </p:spPr>
+      </p:pic>
+      <p:sp>
+        <p:nvSpPr>
+          <p:cNvPr id="10" name="Text 6"/>
+          <p:cNvSpPr txBox="1"/>
+          <p:nvPr/>
+        </p:nvSpPr>
+        <p:spPr>
+          <a:xfrm>
+            <a:off x="1417320" y="2377440"/>
+            <a:ext cx="7086600" cy="868680"/>
+          </a:xfrm>
+          <a:prstGeom prst="rect">
+            <a:avLst/>
+          </a:prstGeom>
+          <a:noFill/>
+          <a:ln/>
+        </p:spPr>
+        <p:txBody>
+          <a:bodyPr wrap="square" lIns="0" tIns="0" rIns="0" bIns="0" rtlCol="0" anchor="ctr"/>
+          <a:lstStyle/>
+          <a:p>
+            <a:pPr indent="0" marL="0">
+              <a:buNone/>
+            </a:pPr>
+            <a:r>
+              <a:rPr lang="en-US" sz="1600" b="1" dirty="0">
+                <a:solidFill>
+                  <a:srgbClr val="1B1F24"/>
+                </a:solidFill>
+              </a:rPr>
+              <a:t>Sharing the Inspector UI URL</a:t>
+            </a:r>
+            <a:endParaRPr lang="en-US" sz="1600" dirty="0"/>
+          </a:p>
+          <a:p>
+            <a:pPr indent="0" marL="0">
+              <a:buNone/>
+            </a:pPr>
+            <a:r>
+              <a:rPr lang="en-US" sz="1400" dirty="0">
+                <a:solidFill>
+                  <a:srgbClr val="2B3440"/>
+                </a:solidFill>
+              </a:rPr>
+              <a:t>Don't: it carries MCP_INSPECTOR_API_TOKEN, which is a credential.</a:t>
+            </a:r>
+            <a:endParaRPr lang="en-US" sz="1600" dirty="0"/>
+          </a:p>
+        </p:txBody>
+      </p:sp>
+      <p:sp>
+        <p:nvSpPr>
+          <p:cNvPr id="11" name="snag-3"/>
+          <p:cNvSpPr/>
+          <p:nvPr/>
+        </p:nvSpPr>
+        <p:spPr>
+          <a:xfrm>
+            <a:off x="457200" y="3474720"/>
+            <a:ext cx="8229600" cy="1051560"/>
+          </a:xfrm>
+          <a:prstGeom prst="roundRect">
+            <a:avLst>
+              <a:gd name="adj" fmla="val 6957"/>
+            </a:avLst>
+          </a:prstGeom>
+          <a:solidFill>
+            <a:srgbClr val="F1F5F9"/>
+          </a:solidFill>
+          <a:ln w="12700">
+            <a:solidFill>
+              <a:srgbClr val="F1F5F9"/>
+            </a:solidFill>
+            <a:prstDash val="solid"/>
+          </a:ln>
+        </p:spPr>
+      </p:sp>
+      <p:sp>
+        <p:nvSpPr>
+          <p:cNvPr id="12" name="Shape 8"/>
+          <p:cNvSpPr/>
+          <p:nvPr/>
+        </p:nvSpPr>
+        <p:spPr>
+          <a:xfrm>
+            <a:off x="685800" y="3749040"/>
+            <a:ext cx="502920" cy="502920"/>
+          </a:xfrm>
+          <a:prstGeom prst="ellipse">
+            <a:avLst/>
+          </a:prstGeom>
+          <a:solidFill>
+            <a:srgbClr val="E69A28"/>
+          </a:solidFill>
+          <a:ln w="12700">
+            <a:solidFill>
+              <a:srgbClr val="E69A28"/>
+            </a:solidFill>
+            <a:prstDash val="solid"/>
+          </a:ln>
+        </p:spPr>
+      </p:sp>
+      <p:pic>
+        <p:nvPicPr>
+          <p:cNvPr id="13" name="Image 2" descr="preencoded.png">    </p:cNvPr>
+          <p:cNvPicPr>
+            <a:picLocks noChangeAspect="1"/>
+          </p:cNvPicPr>
+          <p:nvPr/>
+        </p:nvPicPr>
+        <p:blipFill>
+          <a:blip r:embed="rId3"/>
+          <a:stretch>
+            <a:fillRect/>
+          </a:stretch>
+        </p:blipFill>
+        <p:spPr>
+          <a:xfrm>
+            <a:off x="796442" y="3859682"/>
+            <a:ext cx="281635" cy="281635"/>
+          </a:xfrm>
+          <a:prstGeom prst="rect">
+            <a:avLst/>
+          </a:prstGeom>
+        </p:spPr>
+      </p:pic>
+      <p:sp>
+        <p:nvSpPr>
+          <p:cNvPr id="14" name="Text 9"/>
+          <p:cNvSpPr txBox="1"/>
+          <p:nvPr/>
+        </p:nvSpPr>
+        <p:spPr>
+          <a:xfrm>
+            <a:off x="1417320" y="3566160"/>
+            <a:ext cx="7086600" cy="868680"/>
+          </a:xfrm>
+          <a:prstGeom prst="rect">
+            <a:avLst/>
+          </a:prstGeom>
+          <a:noFill/>
+          <a:ln/>
+        </p:spPr>
+        <p:txBody>
+          <a:bodyPr wrap="square" lIns="0" tIns="0" rIns="0" bIns="0" rtlCol="0" anchor="ctr"/>
+          <a:lstStyle/>
+          <a:p>
+            <a:pPr indent="0" marL="0">
+              <a:buNone/>
+            </a:pPr>
+            <a:r>
+              <a:rPr lang="en-US" sz="1600" b="1" dirty="0">
+                <a:solidFill>
+                  <a:srgbClr val="1B1F24"/>
+                </a:solidFill>
+              </a:rPr>
+              <a:t>Called by service name: 403</a:t>
+            </a:r>
+            <a:endParaRPr lang="en-US" sz="1600" dirty="0"/>
+          </a:p>
+          <a:p>
+            <a:pPr indent="0" marL="0">
+              <a:buNone/>
+            </a:pPr>
+            <a:r>
+              <a:rPr lang="en-US" sz="1400" dirty="0">
+                <a:solidFill>
+                  <a:srgbClr val="2B3440"/>
+                </a:solidFill>
+              </a:rPr>
+              <a:t>Add that name to MCP_ALLOWED_HOSTS (reproduced in Docker).</a:t>
+            </a:r>
+            <a:endParaRPr lang="en-US" sz="1600" dirty="0"/>
           </a:p>
         </p:txBody>
       </p:sp>
@@ -15105,7 +15484,7 @@
             <a:lvl1pPr>
               <a:defRPr sz="1000">
                 <a:solidFill>
-                  <a:srgbClr val="94A3B8"/>
+                  <a:srgbClr val="64748B"/>
                 </a:solidFill>
               </a:defRPr>
             </a:lvl1pPr>
@@ -15150,13 +15529,13 @@
           <p:cNvPr id="2" name="Text 0"/>
           <p:cNvSpPr/>
           <p:nvPr>
-            <p:ph idx="100" type="title" hasCustomPrompt="1"/>
+            <p:ph idx="100" type="body" hasCustomPrompt="1"/>
           </p:nvPr>
         </p:nvSpPr>
         <p:spPr>
           <a:xfrm>
-            <a:off x="457200" y="274320"/>
-            <a:ext cx="8229600" cy="685800"/>
+            <a:off x="548640" y="1097280"/>
+            <a:ext cx="5486400" cy="365760"/>
           </a:xfrm>
           <a:prstGeom prst="rect">
             <a:avLst/>
@@ -15165,46 +15544,122 @@
           <a:ln/>
         </p:spPr>
         <p:txBody>
-          <a:bodyPr wrap="square" lIns="0" tIns="0" rIns="0" bIns="0" rtlCol="0" anchor="ctr"/>
+          <a:bodyPr wrap="square" lIns="0" tIns="0" rIns="0" bIns="0" rtlCol="0"/>
+          <a:lstStyle/>
+          <a:p>
+            <a:pPr indent="0" marL="0">
+              <a:buNone/>
+            </a:pPr>
+            <a:r>
+              <a:rPr lang="en-US" sz="1400" b="1" spc="300" kern="0" dirty="0">
+                <a:solidFill>
+                  <a:srgbClr val="1FB68A"/>
+                </a:solidFill>
+              </a:rPr>
+              <a:t>MODULE 6</a:t>
+            </a:r>
+            <a:endParaRPr lang="en-US" sz="1400" dirty="0"/>
+          </a:p>
+        </p:txBody>
+      </p:sp>
+      <p:sp>
+        <p:nvSpPr>
+          <p:cNvPr id="3" name="Text 0"/>
+          <p:cNvSpPr/>
+          <p:nvPr>
+            <p:ph idx="101" type="title" hasCustomPrompt="1"/>
+          </p:nvPr>
+        </p:nvSpPr>
+        <p:spPr>
+          <a:xfrm>
+            <a:off x="548640" y="1508760"/>
+            <a:ext cx="8046720" cy="914400"/>
+          </a:xfrm>
+          <a:prstGeom prst="rect">
+            <a:avLst/>
+          </a:prstGeom>
+          <a:noFill/>
+          <a:ln/>
+        </p:spPr>
+        <p:txBody>
+          <a:bodyPr wrap="square" lIns="0" tIns="0" rIns="0" bIns="0" rtlCol="0" anchor="t"/>
           <a:lstStyle/>
           <a:p>
             <a:pPr algn="l" indent="0" marL="0">
               <a:buNone/>
             </a:pPr>
             <a:r>
-              <a:rPr lang="en-US" sz="3200" b="1" dirty="0">
-                <a:solidFill>
-                  <a:srgbClr val="1B1F24"/>
-                </a:solidFill>
-              </a:rPr>
-              <a:t>Run this: rotate mid-session</a:t>
-            </a:r>
-            <a:endParaRPr lang="en-US" sz="3200" dirty="0"/>
-          </a:p>
-        </p:txBody>
-      </p:sp>
-      <p:sp>
-        <p:nvSpPr>
-          <p:cNvPr id="3" name="terminal"/>
+              <a:rPr lang="en-US" sz="4000" b="1" dirty="0">
+                <a:solidFill>
+                  <a:srgbClr val="FFFFFF"/>
+                </a:solidFill>
+              </a:rPr>
+              <a:t>Secure MCP, then the capstone</a:t>
+            </a:r>
+            <a:endParaRPr lang="en-US" sz="4000" dirty="0"/>
+          </a:p>
+        </p:txBody>
+      </p:sp>
+      <p:sp>
+        <p:nvSpPr>
+          <p:cNvPr id="4" name="Text 0"/>
           <p:cNvSpPr/>
-          <p:nvPr/>
-        </p:nvSpPr>
-        <p:spPr>
-          <a:xfrm>
-            <a:off x="457200" y="1097280"/>
-            <a:ext cx="5212080" cy="3520440"/>
+          <p:nvPr>
+            <p:ph idx="102" type="body" hasCustomPrompt="1"/>
+          </p:nvPr>
+        </p:nvSpPr>
+        <p:spPr>
+          <a:xfrm>
+            <a:off x="548640" y="2560320"/>
+            <a:ext cx="5669280" cy="1097280"/>
+          </a:xfrm>
+          <a:prstGeom prst="rect">
+            <a:avLst/>
+          </a:prstGeom>
+          <a:noFill/>
+          <a:ln/>
+        </p:spPr>
+        <p:txBody>
+          <a:bodyPr wrap="square" lIns="0" tIns="0" rIns="0" bIns="0" rtlCol="0" anchor="t"/>
+          <a:lstStyle/>
+          <a:p>
+            <a:pPr indent="0" marL="0">
+              <a:buNone/>
+            </a:pPr>
+            <a:r>
+              <a:rPr lang="en-US" sz="1800" dirty="0">
+                <a:solidFill>
+                  <a:srgbClr val="CBD5E1"/>
+                </a:solidFill>
+              </a:rPr>
+              <a:t>Rotate a device secret mid-session and watch the next call fail. The capstone is homework.</a:t>
+            </a:r>
+            <a:endParaRPr lang="en-US" sz="1800" dirty="0"/>
+          </a:p>
+        </p:txBody>
+      </p:sp>
+      <p:sp>
+        <p:nvSpPr>
+          <p:cNvPr id="5" name="Shape 3"/>
+          <p:cNvSpPr/>
+          <p:nvPr/>
+        </p:nvSpPr>
+        <p:spPr>
+          <a:xfrm>
+            <a:off x="6675120" y="2560320"/>
+            <a:ext cx="2011680" cy="1097280"/>
           </a:xfrm>
           <a:prstGeom prst="roundRect">
             <a:avLst>
-              <a:gd name="adj" fmla="val 2078"/>
+              <a:gd name="adj" fmla="val 8333"/>
             </a:avLst>
           </a:prstGeom>
           <a:solidFill>
-            <a:srgbClr val="1B1F24"/>
+            <a:srgbClr val="2B3440"/>
           </a:solidFill>
           <a:ln w="12700">
             <a:solidFill>
-              <a:srgbClr val="1B1F24"/>
+              <a:srgbClr val="2B3440"/>
             </a:solidFill>
             <a:prstDash val="solid"/>
           </a:ln>
@@ -15212,64 +15667,14 @@
       </p:sp>
       <p:sp>
         <p:nvSpPr>
-          <p:cNvPr id="4" name="Shape 2"/>
-          <p:cNvSpPr/>
-          <p:nvPr/>
-        </p:nvSpPr>
-        <p:spPr>
-          <a:xfrm>
-            <a:off x="640080" y="1225296"/>
-            <a:ext cx="109728" cy="109728"/>
-          </a:xfrm>
-          <a:prstGeom prst="ellipse">
-            <a:avLst/>
-          </a:prstGeom>
-          <a:solidFill>
-            <a:srgbClr val="E5484D"/>
-          </a:solidFill>
-          <a:ln w="12700">
-            <a:solidFill>
-              <a:srgbClr val="E5484D"/>
-            </a:solidFill>
-            <a:prstDash val="solid"/>
-          </a:ln>
-        </p:spPr>
-      </p:sp>
-      <p:sp>
-        <p:nvSpPr>
-          <p:cNvPr id="5" name="Shape 3"/>
-          <p:cNvSpPr/>
-          <p:nvPr/>
-        </p:nvSpPr>
-        <p:spPr>
-          <a:xfrm>
-            <a:off x="822960" y="1225296"/>
-            <a:ext cx="109728" cy="109728"/>
-          </a:xfrm>
-          <a:prstGeom prst="ellipse">
-            <a:avLst/>
-          </a:prstGeom>
-          <a:solidFill>
-            <a:srgbClr val="E69A28"/>
-          </a:solidFill>
-          <a:ln w="12700">
-            <a:solidFill>
-              <a:srgbClr val="E69A28"/>
-            </a:solidFill>
-            <a:prstDash val="solid"/>
-          </a:ln>
-        </p:spPr>
-      </p:sp>
-      <p:sp>
-        <p:nvSpPr>
           <p:cNvPr id="6" name="Shape 4"/>
           <p:cNvSpPr/>
           <p:nvPr/>
         </p:nvSpPr>
         <p:spPr>
           <a:xfrm>
-            <a:off x="1005840" y="1225296"/>
-            <a:ext cx="109728" cy="109728"/>
+            <a:off x="6858000" y="2788920"/>
+            <a:ext cx="640080" cy="640080"/>
           </a:xfrm>
           <a:prstGeom prst="ellipse">
             <a:avLst/>
@@ -15285,233 +15690,9 @@
           </a:ln>
         </p:spPr>
       </p:sp>
-      <p:sp>
-        <p:nvSpPr>
-          <p:cNvPr id="7" name="Text 5"/>
-          <p:cNvSpPr txBox="1"/>
-          <p:nvPr/>
-        </p:nvSpPr>
-        <p:spPr>
-          <a:xfrm>
-            <a:off x="1280160" y="1152144"/>
-            <a:ext cx="4206240" cy="256032"/>
-          </a:xfrm>
-          <a:prstGeom prst="rect">
-            <a:avLst/>
-          </a:prstGeom>
-          <a:noFill/>
-          <a:ln/>
-        </p:spPr>
-        <p:txBody>
-          <a:bodyPr wrap="square" lIns="0" tIns="0" rIns="0" bIns="0" rtlCol="0" anchor="ctr"/>
-          <a:lstStyle/>
-          <a:p>
-            <a:pPr algn="r" indent="0" marL="0">
-              <a:buNone/>
-            </a:pPr>
-            <a:r>
-              <a:rPr lang="en-US" sz="1000" dirty="0">
-                <a:solidFill>
-                  <a:srgbClr val="8B98A5"/>
-                </a:solidFill>
-                <a:latin typeface="Calibri" pitchFamily="34" charset="0"/>
-                <a:ea typeface="Calibri" pitchFamily="34" charset="-122"/>
-                <a:cs typeface="Calibri" pitchFamily="34" charset="-120"/>
-              </a:rPr>
-              <a:t>module 6 · run this</a:t>
-            </a:r>
-            <a:endParaRPr lang="en-US" sz="1000" dirty="0"/>
-          </a:p>
-        </p:txBody>
-      </p:sp>
-      <p:sp>
-        <p:nvSpPr>
-          <p:cNvPr id="8" name="terminal-text"/>
-          <p:cNvSpPr txBox="1"/>
-          <p:nvPr/>
-        </p:nvSpPr>
-        <p:spPr>
-          <a:xfrm>
-            <a:off x="685800" y="1481328"/>
-            <a:ext cx="4754880" cy="3017520"/>
-          </a:xfrm>
-          <a:prstGeom prst="rect">
-            <a:avLst/>
-          </a:prstGeom>
-          <a:noFill/>
-          <a:ln/>
-        </p:spPr>
-        <p:txBody>
-          <a:bodyPr wrap="square" lIns="0" tIns="0" rIns="0" bIns="0" rtlCol="0" anchor="t"/>
-          <a:lstStyle/>
-          <a:p>
-            <a:pPr indent="0" marL="0">
-              <a:buNone/>
-            </a:pPr>
-            <a:r>
-              <a:rPr lang="en-US" sz="1000" dirty="0">
-                <a:solidFill>
-                  <a:srgbClr val="E6EDF3"/>
-                </a:solidFill>
-                <a:latin typeface="Courier New" pitchFamily="34" charset="0"/>
-                <a:ea typeface="Courier New" pitchFamily="34" charset="-122"/>
-                <a:cs typeface="Courier New" pitchFamily="34" charset="-120"/>
-              </a:rPr>
-              <a:t>eval "$(docker compose run --rm -T dev \</a:t>
-            </a:r>
-            <a:endParaRPr lang="en-US" sz="1000" dirty="0"/>
-          </a:p>
-          <a:p>
-            <a:pPr indent="0" marL="0">
-              <a:buNone/>
-            </a:pPr>
-            <a:r>
-              <a:rPr lang="en-US" sz="1000" dirty="0">
-                <a:solidFill>
-                  <a:srgbClr val="E6EDF3"/>
-                </a:solidFill>
-                <a:latin typeface="Courier New" pitchFamily="34" charset="0"/>
-                <a:ea typeface="Courier New" pitchFamily="34" charset="-122"/>
-                <a:cs typeface="Courier New" pitchFamily="34" charset="-120"/>
-              </a:rPr>
-              <a:t>  node scripts/demo-device.mjs | grep '^export ')"</a:t>
-            </a:r>
-            <a:endParaRPr lang="en-US" sz="1000" dirty="0"/>
-          </a:p>
-          <a:p>
-            <a:pPr indent="0" marL="0">
-              <a:buNone/>
-            </a:pPr>
-            <a:r>
-              <a:rPr lang="en-US" sz="1000" dirty="0">
-                <a:solidFill>
-                  <a:srgbClr val="E6EDF3"/>
-                </a:solidFill>
-                <a:latin typeface="Courier New" pitchFamily="34" charset="0"/>
-                <a:ea typeface="Courier New" pitchFamily="34" charset="-122"/>
-                <a:cs typeface="Courier New" pitchFamily="34" charset="-120"/>
-              </a:rPr>
-              <a:t>dev npx -y @modelcontextprotocol/inspector@2.12.0 \</a:t>
-            </a:r>
-            <a:endParaRPr lang="en-US" sz="1000" dirty="0"/>
-          </a:p>
-          <a:p>
-            <a:pPr indent="0" marL="0">
-              <a:buNone/>
-            </a:pPr>
-            <a:r>
-              <a:rPr lang="en-US" sz="1000" dirty="0">
-                <a:solidFill>
-                  <a:srgbClr val="E6EDF3"/>
-                </a:solidFill>
-                <a:latin typeface="Courier New" pitchFamily="34" charset="0"/>
-                <a:ea typeface="Courier New" pitchFamily="34" charset="-122"/>
-                <a:cs typeface="Courier New" pitchFamily="34" charset="-120"/>
-              </a:rPr>
-              <a:t>  --cli http://app:3000/mcp \</a:t>
-            </a:r>
-            <a:endParaRPr lang="en-US" sz="1000" dirty="0"/>
-          </a:p>
-          <a:p>
-            <a:pPr indent="0" marL="0">
-              <a:buNone/>
-            </a:pPr>
-            <a:r>
-              <a:rPr lang="en-US" sz="1000" dirty="0">
-                <a:solidFill>
-                  <a:srgbClr val="E6EDF3"/>
-                </a:solidFill>
-                <a:latin typeface="Courier New" pitchFamily="34" charset="0"/>
-                <a:ea typeface="Courier New" pitchFamily="34" charset="-122"/>
-                <a:cs typeface="Courier New" pitchFamily="34" charset="-120"/>
-              </a:rPr>
-              <a:t>  --method tools/call --tool-name whoami \</a:t>
-            </a:r>
-            <a:endParaRPr lang="en-US" sz="1000" dirty="0"/>
-          </a:p>
-          <a:p>
-            <a:pPr indent="0" marL="0">
-              <a:buNone/>
-            </a:pPr>
-            <a:r>
-              <a:rPr lang="en-US" sz="1000" dirty="0">
-                <a:solidFill>
-                  <a:srgbClr val="E6EDF3"/>
-                </a:solidFill>
-                <a:latin typeface="Courier New" pitchFamily="34" charset="0"/>
-                <a:ea typeface="Courier New" pitchFamily="34" charset="-122"/>
-                <a:cs typeface="Courier New" pitchFamily="34" charset="-120"/>
-              </a:rPr>
-              <a:t>  --header "X-Access-Key-Id: $MCP_KEY_ID" \</a:t>
-            </a:r>
-            <a:endParaRPr lang="en-US" sz="1000" dirty="0"/>
-          </a:p>
-          <a:p>
-            <a:pPr indent="0" marL="0">
-              <a:buNone/>
-            </a:pPr>
-            <a:r>
-              <a:rPr lang="en-US" sz="1000" dirty="0">
-                <a:solidFill>
-                  <a:srgbClr val="E6EDF3"/>
-                </a:solidFill>
-                <a:latin typeface="Courier New" pitchFamily="34" charset="0"/>
-                <a:ea typeface="Courier New" pitchFamily="34" charset="-122"/>
-                <a:cs typeface="Courier New" pitchFamily="34" charset="-120"/>
-              </a:rPr>
-              <a:t>  --header "X-Secret-Key: $MCP_SECRET"</a:t>
-            </a:r>
-            <a:endParaRPr lang="en-US" sz="1000" dirty="0"/>
-          </a:p>
-          <a:p>
-            <a:pPr indent="0" marL="0">
-              <a:buNone/>
-            </a:pPr>
-            <a:r>
-              <a:rPr lang="en-US" sz="1000" dirty="0">
-                <a:solidFill>
-                  <a:srgbClr val="E6EDF3"/>
-                </a:solidFill>
-                <a:latin typeface="Courier New" pitchFamily="34" charset="0"/>
-                <a:ea typeface="Courier New" pitchFamily="34" charset="-122"/>
-                <a:cs typeface="Courier New" pitchFamily="34" charset="-120"/>
-              </a:rPr>
-              <a:t>dev pnpm lab 09   # green now; break it, see red, revert</a:t>
-            </a:r>
-            <a:endParaRPr lang="en-US" sz="1000" dirty="0"/>
-          </a:p>
-        </p:txBody>
-      </p:sp>
-      <p:sp>
-        <p:nvSpPr>
-          <p:cNvPr id="9" name="postman"/>
-          <p:cNvSpPr/>
-          <p:nvPr/>
-        </p:nvSpPr>
-        <p:spPr>
-          <a:xfrm>
-            <a:off x="5852160" y="1097280"/>
-            <a:ext cx="2834640" cy="3520440"/>
-          </a:xfrm>
-          <a:prstGeom prst="roundRect">
-            <a:avLst>
-              <a:gd name="adj" fmla="val 2581"/>
-            </a:avLst>
-          </a:prstGeom>
-          <a:solidFill>
-            <a:srgbClr val="EF5B25"/>
-          </a:solidFill>
-          <a:ln w="12700">
-            <a:solidFill>
-              <a:srgbClr val="EF5B25"/>
-            </a:solidFill>
-            <a:prstDash val="solid"/>
-          </a:ln>
-        </p:spPr>
-      </p:sp>
       <p:pic>
         <p:nvPicPr>
-          <p:cNvPr id="10" name="Image 0" descr="preencoded.png">    </p:cNvPr>
+          <p:cNvPr id="7" name="Image 0" descr="preencoded.png">    </p:cNvPr>
           <p:cNvPicPr>
             <a:picLocks noChangeAspect="1"/>
           </p:cNvPicPr>
@@ -15525,8 +15706,8 @@
         </p:blipFill>
         <p:spPr>
           <a:xfrm>
-            <a:off x="6035040" y="1252728"/>
-            <a:ext cx="237744" cy="237744"/>
+            <a:off x="6998818" y="2929738"/>
+            <a:ext cx="358445" cy="358445"/>
           </a:xfrm>
           <a:prstGeom prst="rect">
             <a:avLst/>
@@ -15535,14 +15716,14 @@
       </p:pic>
       <p:sp>
         <p:nvSpPr>
-          <p:cNvPr id="11" name="Text 8"/>
+          <p:cNvPr id="8" name="Text 5"/>
           <p:cNvSpPr txBox="1"/>
           <p:nvPr/>
         </p:nvSpPr>
         <p:spPr>
           <a:xfrm>
-            <a:off x="6355080" y="1207008"/>
-            <a:ext cx="2148840" cy="329184"/>
+            <a:off x="7589520" y="2697480"/>
+            <a:ext cx="1051560" cy="822960"/>
           </a:xfrm>
           <a:prstGeom prst="rect">
             <a:avLst/>
@@ -15558,92 +15739,28 @@
               <a:buNone/>
             </a:pPr>
             <a:r>
-              <a:rPr lang="en-US" sz="1600" b="1" dirty="0">
+              <a:rPr lang="en-US" sz="2200" b="1" dirty="0">
                 <a:solidFill>
                   <a:srgbClr val="FFFFFF"/>
                 </a:solidFill>
               </a:rPr>
-              <a:t>In Postman</a:t>
-            </a:r>
-            <a:endParaRPr lang="en-US" sz="1600" dirty="0"/>
-          </a:p>
-        </p:txBody>
-      </p:sp>
-      <p:sp>
-        <p:nvSpPr>
-          <p:cNvPr id="12" name="postman-requests"/>
-          <p:cNvSpPr txBox="1"/>
-          <p:nvPr/>
-        </p:nvSpPr>
-        <p:spPr>
-          <a:xfrm>
-            <a:off x="6035040" y="1645920"/>
-            <a:ext cx="2468880" cy="2834640"/>
-          </a:xfrm>
-          <a:prstGeom prst="rect">
-            <a:avLst/>
-          </a:prstGeom>
-          <a:noFill/>
-          <a:ln/>
-        </p:spPr>
-        <p:txBody>
-          <a:bodyPr wrap="square" lIns="0" tIns="0" rIns="0" bIns="0" rtlCol="0" anchor="t"/>
-          <a:lstStyle/>
-          <a:p>
-            <a:pPr indent="0" marL="0">
-              <a:buNone/>
-            </a:pPr>
-            <a:r>
-              <a:rPr lang="en-US" sz="1300" b="1" dirty="0">
-                <a:solidFill>
-                  <a:srgbClr val="FFFFFF"/>
-                </a:solidFill>
-              </a:rPr>
-              <a:t>09 · Rotate mid-session (lite module 6)</a:t>
-            </a:r>
-            <a:endParaRPr lang="en-US" sz="1300" dirty="0"/>
-          </a:p>
-          <a:p>
-            <a:pPr indent="0" marL="0">
-              <a:buNone/>
-            </a:pPr>
-            <a:r>
-              <a:rPr lang="en-US" sz="1300" dirty="0">
-                <a:solidFill>
-                  <a:srgbClr val="FFFFFF"/>
-                </a:solidFill>
-              </a:rPr>
-              <a:t>1. Rotate credentials</a:t>
-            </a:r>
-            <a:endParaRPr lang="en-US" sz="1300" dirty="0"/>
-          </a:p>
-          <a:p>
-            <a:pPr indent="0" marL="0">
-              <a:buNone/>
-            </a:pPr>
-            <a:r>
-              <a:rPr lang="en-US" sz="1300" dirty="0">
-                <a:solidFill>
-                  <a:srgbClr val="FFFFFF"/>
-                </a:solidFill>
-              </a:rPr>
-              <a:t>2. whoami with the OLD secret → 401</a:t>
-            </a:r>
-            <a:endParaRPr lang="en-US" sz="1300" dirty="0"/>
-          </a:p>
-          <a:p>
-            <a:pPr indent="0" marL="0">
-              <a:buNone/>
-            </a:pPr>
-            <a:r>
-              <a:rPr lang="en-US" sz="1300" dirty="0">
-                <a:solidFill>
-                  <a:srgbClr val="FFFFFF"/>
-                </a:solidFill>
-              </a:rPr>
-              <a:t>3. whoami with the NEW secret</a:t>
-            </a:r>
-            <a:endParaRPr lang="en-US" sz="1300" dirty="0"/>
+              <a:t>20 min</a:t>
+            </a:r>
+            <a:endParaRPr lang="en-US" sz="2200" dirty="0"/>
+          </a:p>
+          <a:p>
+            <a:pPr indent="0" marL="0">
+              <a:buNone/>
+            </a:pPr>
+            <a:r>
+              <a:rPr lang="en-US" sz="1100" dirty="0">
+                <a:solidFill>
+                  <a:srgbClr val="CBD5E1"/>
+                </a:solidFill>
+              </a:rPr>
+              <a:t>lab (draft)</a:t>
+            </a:r>
+            <a:endParaRPr lang="en-US" sz="2200" dirty="0"/>
           </a:p>
         </p:txBody>
       </p:sp>
@@ -15677,7 +15794,7 @@
             <a:lvl1pPr>
               <a:defRPr sz="1000">
                 <a:solidFill>
-                  <a:srgbClr val="64748B"/>
+                  <a:srgbClr val="94A3B8"/>
                 </a:solidFill>
               </a:defRPr>
             </a:lvl1pPr>
@@ -16204,7 +16321,7 @@
                   <a:srgbClr val="1B1F24"/>
                 </a:solidFill>
               </a:rPr>
-              <a:t>Checkpoint: rotation bites immediately</a:t>
+              <a:t>Run this: rotate mid-session</a:t>
             </a:r>
             <a:endParaRPr lang="en-US" sz="3200" dirty="0"/>
           </a:p>
@@ -16219,7 +16336,7 @@
         <p:spPr>
           <a:xfrm>
             <a:off x="457200" y="1097280"/>
-            <a:ext cx="5029200" cy="3520440"/>
+            <a:ext cx="5212080" cy="3520440"/>
           </a:xfrm>
           <a:prstGeom prst="roundRect">
             <a:avLst>
@@ -16321,7 +16438,7 @@
         <p:spPr>
           <a:xfrm>
             <a:off x="1280160" y="1152144"/>
-            <a:ext cx="4023360" cy="256032"/>
+            <a:ext cx="4206240" cy="256032"/>
           </a:xfrm>
           <a:prstGeom prst="rect">
             <a:avLst/>
@@ -16345,7 +16462,7 @@
                 <a:ea typeface="Calibri" pitchFamily="34" charset="-122"/>
                 <a:cs typeface="Calibri" pitchFamily="34" charset="-120"/>
               </a:rPr>
-              <a:t>output: captured</a:t>
+              <a:t>module 6 · run this</a:t>
             </a:r>
             <a:endParaRPr lang="en-US" sz="1000" dirty="0"/>
           </a:p>
@@ -16360,7 +16477,7 @@
         <p:spPr>
           <a:xfrm>
             <a:off x="685800" y="1481328"/>
-            <a:ext cx="4572000" cy="3017520"/>
+            <a:ext cx="4754880" cy="3017520"/>
           </a:xfrm>
           <a:prstGeom prst="rect">
             <a:avLst/>
@@ -16376,24 +16493,24 @@
               <a:buNone/>
             </a:pPr>
             <a:r>
-              <a:rPr lang="en-US" sz="1200" dirty="0">
-                <a:solidFill>
-                  <a:srgbClr val="8B98A5"/>
+              <a:rPr lang="en-US" sz="1000" dirty="0">
+                <a:solidFill>
+                  <a:srgbClr val="E6EDF3"/>
                 </a:solidFill>
                 <a:latin typeface="Courier New" pitchFamily="34" charset="0"/>
                 <a:ea typeface="Courier New" pitchFamily="34" charset="-122"/>
                 <a:cs typeface="Courier New" pitchFamily="34" charset="-120"/>
               </a:rPr>
-              <a:t># Inspector whoami</a:t>
-            </a:r>
-            <a:endParaRPr lang="en-US" sz="1200" dirty="0"/>
-          </a:p>
-          <a:p>
-            <a:pPr indent="0" marL="0">
-              <a:buNone/>
-            </a:pPr>
-            <a:r>
-              <a:rPr lang="en-US" sz="1200" dirty="0">
+              <a:t>eval "$(docker compose run --rm -T dev \</a:t>
+            </a:r>
+            <a:endParaRPr lang="en-US" sz="1000" dirty="0"/>
+          </a:p>
+          <a:p>
+            <a:pPr indent="0" marL="0">
+              <a:buNone/>
+            </a:pPr>
+            <a:r>
+              <a:rPr lang="en-US" sz="1000" dirty="0">
                 <a:solidFill>
                   <a:srgbClr val="E6EDF3"/>
                 </a:solidFill>
@@ -16401,16 +16518,16 @@
                 <a:ea typeface="Courier New" pitchFamily="34" charset="-122"/>
                 <a:cs typeface="Courier New" pitchFamily="34" charset="-120"/>
               </a:rPr>
-              <a:t>"device": { … "status": "active" … },</a:t>
-            </a:r>
-            <a:endParaRPr lang="en-US" sz="1200" dirty="0"/>
-          </a:p>
-          <a:p>
-            <a:pPr indent="0" marL="0">
-              <a:buNone/>
-            </a:pPr>
-            <a:r>
-              <a:rPr lang="en-US" sz="1200" dirty="0">
+              <a:t>  node scripts/demo-device.mjs | grep '^export ')"</a:t>
+            </a:r>
+            <a:endParaRPr lang="en-US" sz="1000" dirty="0"/>
+          </a:p>
+          <a:p>
+            <a:pPr indent="0" marL="0">
+              <a:buNone/>
+            </a:pPr>
+            <a:r>
+              <a:rPr lang="en-US" sz="1000" dirty="0">
                 <a:solidFill>
                   <a:srgbClr val="E6EDF3"/>
                 </a:solidFill>
@@ -16418,33 +16535,33 @@
                 <a:ea typeface="Courier New" pitchFamily="34" charset="-122"/>
                 <a:cs typeface="Courier New" pitchFamily="34" charset="-120"/>
               </a:rPr>
-              <a:t>"owner":  { … "email": "demo@example.com" }</a:t>
-            </a:r>
-            <a:endParaRPr lang="en-US" sz="1200" dirty="0"/>
-          </a:p>
-          <a:p>
-            <a:pPr indent="0" marL="0">
-              <a:buNone/>
-            </a:pPr>
-            <a:r>
-              <a:rPr lang="en-US" sz="1200" dirty="0">
-                <a:solidFill>
-                  <a:srgbClr val="8B98A5"/>
+              <a:t>dev npx -y @modelcontextprotocol/inspector@2.12.0 \</a:t>
+            </a:r>
+            <a:endParaRPr lang="en-US" sz="1000" dirty="0"/>
+          </a:p>
+          <a:p>
+            <a:pPr indent="0" marL="0">
+              <a:buNone/>
+            </a:pPr>
+            <a:r>
+              <a:rPr lang="en-US" sz="1000" dirty="0">
+                <a:solidFill>
+                  <a:srgbClr val="E6EDF3"/>
                 </a:solidFill>
                 <a:latin typeface="Courier New" pitchFamily="34" charset="0"/>
                 <a:ea typeface="Courier New" pitchFamily="34" charset="-122"/>
                 <a:cs typeface="Courier New" pitchFamily="34" charset="-120"/>
               </a:rPr>
-              <a:t># Postman 09 · Rotate mid-session</a:t>
-            </a:r>
-            <a:endParaRPr lang="en-US" sz="1200" dirty="0"/>
-          </a:p>
-          <a:p>
-            <a:pPr indent="0" marL="0">
-              <a:buNone/>
-            </a:pPr>
-            <a:r>
-              <a:rPr lang="en-US" sz="1200" dirty="0">
+              <a:t>  --cli http://app:3000/mcp \</a:t>
+            </a:r>
+            <a:endParaRPr lang="en-US" sz="1000" dirty="0"/>
+          </a:p>
+          <a:p>
+            <a:pPr indent="0" marL="0">
+              <a:buNone/>
+            </a:pPr>
+            <a:r>
+              <a:rPr lang="en-US" sz="1000" dirty="0">
                 <a:solidFill>
                   <a:srgbClr val="E6EDF3"/>
                 </a:solidFill>
@@ -16452,16 +16569,16 @@
                 <a:ea typeface="Courier New" pitchFamily="34" charset="-122"/>
                 <a:cs typeface="Courier New" pitchFamily="34" charset="-120"/>
               </a:rPr>
-              <a:t>Rotate credentials           200</a:t>
-            </a:r>
-            <a:endParaRPr lang="en-US" sz="1200" dirty="0"/>
-          </a:p>
-          <a:p>
-            <a:pPr indent="0" marL="0">
-              <a:buNone/>
-            </a:pPr>
-            <a:r>
-              <a:rPr lang="en-US" sz="1200" dirty="0">
+              <a:t>  --method tools/call --tool-name whoami \</a:t>
+            </a:r>
+            <a:endParaRPr lang="en-US" sz="1000" dirty="0"/>
+          </a:p>
+          <a:p>
+            <a:pPr indent="0" marL="0">
+              <a:buNone/>
+            </a:pPr>
+            <a:r>
+              <a:rPr lang="en-US" sz="1000" dirty="0">
                 <a:solidFill>
                   <a:srgbClr val="E6EDF3"/>
                 </a:solidFill>
@@ -16469,16 +16586,16 @@
                 <a:ea typeface="Courier New" pitchFamily="34" charset="-122"/>
                 <a:cs typeface="Courier New" pitchFamily="34" charset="-120"/>
               </a:rPr>
-              <a:t>whoami with the OLD secret   401</a:t>
-            </a:r>
-            <a:endParaRPr lang="en-US" sz="1200" dirty="0"/>
-          </a:p>
-          <a:p>
-            <a:pPr indent="0" marL="0">
-              <a:buNone/>
-            </a:pPr>
-            <a:r>
-              <a:rPr lang="en-US" sz="1200" dirty="0">
+              <a:t>  --header "X-Access-Key-Id: $MCP_KEY_ID" \</a:t>
+            </a:r>
+            <a:endParaRPr lang="en-US" sz="1000" dirty="0"/>
+          </a:p>
+          <a:p>
+            <a:pPr indent="0" marL="0">
+              <a:buNone/>
+            </a:pPr>
+            <a:r>
+              <a:rPr lang="en-US" sz="1000" dirty="0">
                 <a:solidFill>
                   <a:srgbClr val="E6EDF3"/>
                 </a:solidFill>
@@ -16486,68 +16603,51 @@
                 <a:ea typeface="Courier New" pitchFamily="34" charset="-122"/>
                 <a:cs typeface="Courier New" pitchFamily="34" charset="-120"/>
               </a:rPr>
-              <a:t>whoami with the NEW secret   200</a:t>
-            </a:r>
-            <a:endParaRPr lang="en-US" sz="1200" dirty="0"/>
-          </a:p>
-        </p:txBody>
-      </p:sp>
-      <p:sp>
-        <p:nvSpPr>
-          <p:cNvPr id="9" name="Text 7"/>
-          <p:cNvSpPr txBox="1"/>
+              <a:t>  --header "X-Secret-Key: $MCP_SECRET"</a:t>
+            </a:r>
+            <a:endParaRPr lang="en-US" sz="1000" dirty="0"/>
+          </a:p>
+          <a:p>
+            <a:pPr indent="0" marL="0">
+              <a:buNone/>
+            </a:pPr>
+            <a:r>
+              <a:rPr lang="en-US" sz="1000" dirty="0">
+                <a:solidFill>
+                  <a:srgbClr val="E6EDF3"/>
+                </a:solidFill>
+                <a:latin typeface="Courier New" pitchFamily="34" charset="0"/>
+                <a:ea typeface="Courier New" pitchFamily="34" charset="-122"/>
+                <a:cs typeface="Courier New" pitchFamily="34" charset="-120"/>
+              </a:rPr>
+              <a:t>dev pnpm lab 09   # green now; break it, see red, revert</a:t>
+            </a:r>
+            <a:endParaRPr lang="en-US" sz="1000" dirty="0"/>
+          </a:p>
+        </p:txBody>
+      </p:sp>
+      <p:sp>
+        <p:nvSpPr>
+          <p:cNvPr id="9" name="postman"/>
+          <p:cNvSpPr/>
           <p:nvPr/>
         </p:nvSpPr>
         <p:spPr>
           <a:xfrm>
             <a:off x="5852160" y="1097280"/>
-            <a:ext cx="2834640" cy="411480"/>
-          </a:xfrm>
-          <a:prstGeom prst="rect">
-            <a:avLst/>
-          </a:prstGeom>
-          <a:noFill/>
-          <a:ln/>
-        </p:spPr>
-        <p:txBody>
-          <a:bodyPr wrap="square" lIns="0" tIns="0" rIns="0" bIns="0" rtlCol="0" anchor="ctr"/>
-          <a:lstStyle/>
-          <a:p>
-            <a:pPr indent="0" marL="0">
-              <a:buNone/>
-            </a:pPr>
-            <a:r>
-              <a:rPr lang="en-US" sz="2000" b="1" dirty="0">
-                <a:solidFill>
-                  <a:srgbClr val="1B1F24"/>
-                </a:solidFill>
-              </a:rPr>
-              <a:t>Done when</a:t>
-            </a:r>
-            <a:endParaRPr lang="en-US" sz="2000" dirty="0"/>
-          </a:p>
-        </p:txBody>
-      </p:sp>
-      <p:sp>
-        <p:nvSpPr>
-          <p:cNvPr id="10" name="Shape 8"/>
-          <p:cNvSpPr/>
-          <p:nvPr/>
-        </p:nvSpPr>
-        <p:spPr>
-          <a:xfrm>
-            <a:off x="5852160" y="1645920"/>
-            <a:ext cx="384048" cy="384048"/>
-          </a:xfrm>
-          <a:prstGeom prst="ellipse">
-            <a:avLst/>
+            <a:ext cx="2834640" cy="3520440"/>
+          </a:xfrm>
+          <a:prstGeom prst="roundRect">
+            <a:avLst>
+              <a:gd name="adj" fmla="val 2581"/>
+            </a:avLst>
           </a:prstGeom>
           <a:solidFill>
-            <a:srgbClr val="1FB68A"/>
+            <a:srgbClr val="EF5B25"/>
           </a:solidFill>
           <a:ln w="12700">
             <a:solidFill>
-              <a:srgbClr val="1FB68A"/>
+              <a:srgbClr val="EF5B25"/>
             </a:solidFill>
             <a:prstDash val="solid"/>
           </a:ln>
@@ -16555,7 +16655,7 @@
       </p:sp>
       <p:pic>
         <p:nvPicPr>
-          <p:cNvPr id="11" name="Image 0" descr="preencoded.png">    </p:cNvPr>
+          <p:cNvPr id="10" name="Image 0" descr="preencoded.png">    </p:cNvPr>
           <p:cNvPicPr>
             <a:picLocks noChangeAspect="1"/>
           </p:cNvPicPr>
@@ -16569,8 +16669,8 @@
         </p:blipFill>
         <p:spPr>
           <a:xfrm>
-            <a:off x="5936651" y="1730411"/>
-            <a:ext cx="215067" cy="215067"/>
+            <a:off x="6035040" y="1252728"/>
+            <a:ext cx="237744" cy="237744"/>
           </a:xfrm>
           <a:prstGeom prst="rect">
             <a:avLst/>
@@ -16579,14 +16679,14 @@
       </p:pic>
       <p:sp>
         <p:nvSpPr>
-          <p:cNvPr id="12" name="Text 9"/>
+          <p:cNvPr id="11" name="Text 8"/>
           <p:cNvSpPr txBox="1"/>
           <p:nvPr/>
         </p:nvSpPr>
         <p:spPr>
           <a:xfrm>
-            <a:off x="6355080" y="1609344"/>
-            <a:ext cx="2331720" cy="868680"/>
+            <a:off x="6355080" y="1207008"/>
+            <a:ext cx="2148840" cy="329184"/>
           </a:xfrm>
           <a:prstGeom prst="rect">
             <a:avLst/>
@@ -16595,100 +16695,34 @@
           <a:ln/>
         </p:spPr>
         <p:txBody>
-          <a:bodyPr wrap="square" lIns="0" tIns="0" rIns="0" bIns="0" rtlCol="0" anchor="t"/>
-          <a:lstStyle/>
-          <a:p>
-            <a:pPr indent="0" marL="0">
-              <a:buNone/>
-            </a:pPr>
-            <a:pPr indent="0" marL="0">
-              <a:buNone/>
-            </a:pPr>
-            <a:r>
-              <a:rPr lang="en-US" sz="1400" dirty="0">
-                <a:solidFill>
-                  <a:srgbClr val="1B1F24"/>
-                </a:solidFill>
-                <a:latin typeface="Courier New" pitchFamily="34" charset="0"/>
-                <a:ea typeface="Courier New" pitchFamily="34" charset="-122"/>
-                <a:cs typeface="Courier New" pitchFamily="34" charset="-120"/>
-              </a:rPr>
-              <a:t>dev pnpm lab 09</a:t>
-            </a:r>
-            <a:pPr indent="0" marL="0">
-              <a:buNone/>
-            </a:pPr>
-            <a:r>
-              <a:rPr lang="en-US" sz="1400" dirty="0">
-                <a:solidFill>
-                  <a:srgbClr val="1B1F24"/>
-                </a:solidFill>
-              </a:rPr>
-              <a:t>: every test passes</a:t>
-            </a:r>
-            <a:endParaRPr lang="en-US" sz="1400" dirty="0"/>
-          </a:p>
-        </p:txBody>
-      </p:sp>
-      <p:sp>
-        <p:nvSpPr>
-          <p:cNvPr id="13" name="Shape 10"/>
-          <p:cNvSpPr/>
-          <p:nvPr/>
-        </p:nvSpPr>
-        <p:spPr>
-          <a:xfrm>
-            <a:off x="5852160" y="2377440"/>
-            <a:ext cx="384048" cy="384048"/>
-          </a:xfrm>
-          <a:prstGeom prst="ellipse">
-            <a:avLst/>
-          </a:prstGeom>
-          <a:solidFill>
-            <a:srgbClr val="1FB68A"/>
-          </a:solidFill>
-          <a:ln w="12700">
-            <a:solidFill>
-              <a:srgbClr val="1FB68A"/>
-            </a:solidFill>
-            <a:prstDash val="solid"/>
-          </a:ln>
-        </p:spPr>
-      </p:sp>
-      <p:pic>
-        <p:nvPicPr>
-          <p:cNvPr id="14" name="Image 1" descr="preencoded.png">    </p:cNvPr>
-          <p:cNvPicPr>
-            <a:picLocks noChangeAspect="1"/>
-          </p:cNvPicPr>
-          <p:nvPr/>
-        </p:nvPicPr>
-        <p:blipFill>
-          <a:blip r:embed="rId2"/>
-          <a:stretch>
-            <a:fillRect/>
-          </a:stretch>
-        </p:blipFill>
-        <p:spPr>
-          <a:xfrm>
-            <a:off x="5936651" y="2461931"/>
-            <a:ext cx="215067" cy="215067"/>
-          </a:xfrm>
-          <a:prstGeom prst="rect">
-            <a:avLst/>
-          </a:prstGeom>
-        </p:spPr>
-      </p:pic>
-      <p:sp>
-        <p:nvSpPr>
-          <p:cNvPr id="15" name="Text 11"/>
+          <a:bodyPr wrap="square" lIns="0" tIns="0" rIns="0" bIns="0" rtlCol="0" anchor="ctr"/>
+          <a:lstStyle/>
+          <a:p>
+            <a:pPr indent="0" marL="0">
+              <a:buNone/>
+            </a:pPr>
+            <a:r>
+              <a:rPr lang="en-US" sz="1600" b="1" dirty="0">
+                <a:solidFill>
+                  <a:srgbClr val="FFFFFF"/>
+                </a:solidFill>
+              </a:rPr>
+              <a:t>In Postman</a:t>
+            </a:r>
+            <a:endParaRPr lang="en-US" sz="1600" dirty="0"/>
+          </a:p>
+        </p:txBody>
+      </p:sp>
+      <p:sp>
+        <p:nvSpPr>
+          <p:cNvPr id="12" name="postman-requests"/>
           <p:cNvSpPr txBox="1"/>
           <p:nvPr/>
         </p:nvSpPr>
         <p:spPr>
           <a:xfrm>
-            <a:off x="6355080" y="2340864"/>
-            <a:ext cx="2331720" cy="868680"/>
+            <a:off x="6035040" y="1645920"/>
+            <a:ext cx="2468880" cy="2834640"/>
           </a:xfrm>
           <a:prstGeom prst="rect">
             <a:avLst/>
@@ -16704,184 +16738,56 @@
               <a:buNone/>
             </a:pPr>
             <a:r>
-              <a:rPr lang="en-US" sz="1400" dirty="0">
-                <a:solidFill>
-                  <a:srgbClr val="1B1F24"/>
-                </a:solidFill>
-              </a:rPr>
-              <a:t>the old secret failed on the NEXT call</a:t>
-            </a:r>
-            <a:endParaRPr lang="en-US" sz="1400" dirty="0"/>
-          </a:p>
-        </p:txBody>
-      </p:sp>
-      <p:sp>
-        <p:nvSpPr>
-          <p:cNvPr id="16" name="Shape 12"/>
-          <p:cNvSpPr/>
-          <p:nvPr/>
-        </p:nvSpPr>
-        <p:spPr>
-          <a:xfrm>
-            <a:off x="5852160" y="3108960"/>
-            <a:ext cx="384048" cy="384048"/>
-          </a:xfrm>
-          <a:prstGeom prst="ellipse">
-            <a:avLst/>
-          </a:prstGeom>
-          <a:solidFill>
-            <a:srgbClr val="1FB68A"/>
-          </a:solidFill>
-          <a:ln w="12700">
-            <a:solidFill>
-              <a:srgbClr val="1FB68A"/>
-            </a:solidFill>
-            <a:prstDash val="solid"/>
-          </a:ln>
-        </p:spPr>
-      </p:sp>
-      <p:pic>
-        <p:nvPicPr>
-          <p:cNvPr id="17" name="Image 2" descr="preencoded.png">    </p:cNvPr>
-          <p:cNvPicPr>
-            <a:picLocks noChangeAspect="1"/>
-          </p:cNvPicPr>
-          <p:nvPr/>
-        </p:nvPicPr>
-        <p:blipFill>
-          <a:blip r:embed="rId3"/>
-          <a:stretch>
-            <a:fillRect/>
-          </a:stretch>
-        </p:blipFill>
-        <p:spPr>
-          <a:xfrm>
-            <a:off x="5936651" y="3193451"/>
-            <a:ext cx="215067" cy="215067"/>
-          </a:xfrm>
-          <a:prstGeom prst="rect">
-            <a:avLst/>
-          </a:prstGeom>
-        </p:spPr>
-      </p:pic>
-      <p:sp>
-        <p:nvSpPr>
-          <p:cNvPr id="18" name="Text 13"/>
-          <p:cNvSpPr txBox="1"/>
-          <p:nvPr/>
-        </p:nvSpPr>
-        <p:spPr>
-          <a:xfrm>
-            <a:off x="6355080" y="3072384"/>
-            <a:ext cx="2331720" cy="868680"/>
-          </a:xfrm>
-          <a:prstGeom prst="rect">
-            <a:avLst/>
-          </a:prstGeom>
-          <a:noFill/>
-          <a:ln/>
-        </p:spPr>
-        <p:txBody>
-          <a:bodyPr wrap="square" lIns="0" tIns="0" rIns="0" bIns="0" rtlCol="0" anchor="t"/>
-          <a:lstStyle/>
-          <a:p>
-            <a:pPr indent="0" marL="0">
-              <a:buNone/>
-            </a:pPr>
-            <a:r>
-              <a:rPr lang="en-US" sz="1400" dirty="0">
-                <a:solidFill>
-                  <a:srgbClr val="1B1F24"/>
-                </a:solidFill>
-              </a:rPr>
-              <a:t>the 7 failure modes → one 401, explained</a:t>
-            </a:r>
-            <a:endParaRPr lang="en-US" sz="1400" dirty="0"/>
-          </a:p>
-        </p:txBody>
-      </p:sp>
-      <p:sp>
-        <p:nvSpPr>
-          <p:cNvPr id="19" name="Shape 14"/>
-          <p:cNvSpPr/>
-          <p:nvPr/>
-        </p:nvSpPr>
-        <p:spPr>
-          <a:xfrm>
-            <a:off x="5852160" y="3840480"/>
-            <a:ext cx="384048" cy="384048"/>
-          </a:xfrm>
-          <a:prstGeom prst="ellipse">
-            <a:avLst/>
-          </a:prstGeom>
-          <a:solidFill>
-            <a:srgbClr val="1FB68A"/>
-          </a:solidFill>
-          <a:ln w="12700">
-            <a:solidFill>
-              <a:srgbClr val="1FB68A"/>
-            </a:solidFill>
-            <a:prstDash val="solid"/>
-          </a:ln>
-        </p:spPr>
-      </p:sp>
-      <p:pic>
-        <p:nvPicPr>
-          <p:cNvPr id="20" name="Image 3" descr="preencoded.png">    </p:cNvPr>
-          <p:cNvPicPr>
-            <a:picLocks noChangeAspect="1"/>
-          </p:cNvPicPr>
-          <p:nvPr/>
-        </p:nvPicPr>
-        <p:blipFill>
-          <a:blip r:embed="rId4"/>
-          <a:stretch>
-            <a:fillRect/>
-          </a:stretch>
-        </p:blipFill>
-        <p:spPr>
-          <a:xfrm>
-            <a:off x="5936651" y="3924971"/>
-            <a:ext cx="215067" cy="215067"/>
-          </a:xfrm>
-          <a:prstGeom prst="rect">
-            <a:avLst/>
-          </a:prstGeom>
-        </p:spPr>
-      </p:pic>
-      <p:sp>
-        <p:nvSpPr>
-          <p:cNvPr id="21" name="Text 15"/>
-          <p:cNvSpPr txBox="1"/>
-          <p:nvPr/>
-        </p:nvSpPr>
-        <p:spPr>
-          <a:xfrm>
-            <a:off x="6355080" y="3803904"/>
-            <a:ext cx="2331720" cy="868680"/>
-          </a:xfrm>
-          <a:prstGeom prst="rect">
-            <a:avLst/>
-          </a:prstGeom>
-          <a:noFill/>
-          <a:ln/>
-        </p:spPr>
-        <p:txBody>
-          <a:bodyPr wrap="square" lIns="0" tIns="0" rIns="0" bIns="0" rtlCol="0" anchor="t"/>
-          <a:lstStyle/>
-          <a:p>
-            <a:pPr indent="0" marL="0">
-              <a:buNone/>
-            </a:pPr>
-            <a:r>
-              <a:rPr lang="en-US" sz="1400" dirty="0">
-                <a:solidFill>
-                  <a:srgbClr val="1B1F24"/>
-                </a:solidFill>
-              </a:rPr>
-              <a:t>why stdio whoami is a tool error (local trust)</a:t>
-            </a:r>
-            <a:endParaRPr lang="en-US" sz="1400" dirty="0"/>
+              <a:rPr lang="en-US" sz="1300" b="1" dirty="0">
+                <a:solidFill>
+                  <a:srgbClr val="FFFFFF"/>
+                </a:solidFill>
+              </a:rPr>
+              <a:t>09 · Rotate mid-session (lite module 6)</a:t>
+            </a:r>
+            <a:endParaRPr lang="en-US" sz="1300" dirty="0"/>
+          </a:p>
+          <a:p>
+            <a:pPr indent="0" marL="0">
+              <a:buNone/>
+            </a:pPr>
+            <a:r>
+              <a:rPr lang="en-US" sz="1300" dirty="0">
+                <a:solidFill>
+                  <a:srgbClr val="FFFFFF"/>
+                </a:solidFill>
+              </a:rPr>
+              <a:t>1. Rotate credentials</a:t>
+            </a:r>
+            <a:endParaRPr lang="en-US" sz="1300" dirty="0"/>
+          </a:p>
+          <a:p>
+            <a:pPr indent="0" marL="0">
+              <a:buNone/>
+            </a:pPr>
+            <a:r>
+              <a:rPr lang="en-US" sz="1300" dirty="0">
+                <a:solidFill>
+                  <a:srgbClr val="FFFFFF"/>
+                </a:solidFill>
+              </a:rPr>
+              <a:t>2. whoami with the OLD secret → 401</a:t>
+            </a:r>
+            <a:endParaRPr lang="en-US" sz="1300" dirty="0"/>
+          </a:p>
+          <a:p>
+            <a:pPr indent="0" marL="0">
+              <a:buNone/>
+            </a:pPr>
+            <a:r>
+              <a:rPr lang="en-US" sz="1300" dirty="0">
+                <a:solidFill>
+                  <a:srgbClr val="FFFFFF"/>
+                </a:solidFill>
+              </a:rPr>
+              <a:t>3. whoami with the NEW secret</a:t>
+            </a:r>
+            <a:endParaRPr lang="en-US" sz="1300" dirty="0"/>
           </a:p>
         </p:txBody>
       </p:sp>
@@ -16987,7 +16893,7 @@
                   <a:srgbClr val="1B1F24"/>
                 </a:solidFill>
               </a:rPr>
-              <a:t>If you are stuck: module 6</a:t>
+              <a:t>Checkpoint: rotation bites immediately</a:t>
             </a:r>
             <a:endParaRPr lang="en-US" sz="3200" dirty="0"/>
           </a:p>
@@ -16995,26 +16901,26 @@
       </p:sp>
       <p:sp>
         <p:nvSpPr>
-          <p:cNvPr id="3" name="snag-1"/>
+          <p:cNvPr id="3" name="terminal"/>
           <p:cNvSpPr/>
           <p:nvPr/>
         </p:nvSpPr>
         <p:spPr>
           <a:xfrm>
             <a:off x="457200" y="1097280"/>
-            <a:ext cx="8229600" cy="1051560"/>
+            <a:ext cx="5029200" cy="3520440"/>
           </a:xfrm>
           <a:prstGeom prst="roundRect">
             <a:avLst>
-              <a:gd name="adj" fmla="val 6957"/>
+              <a:gd name="adj" fmla="val 2078"/>
             </a:avLst>
           </a:prstGeom>
           <a:solidFill>
-            <a:srgbClr val="F1F5F9"/>
+            <a:srgbClr val="1B1F24"/>
           </a:solidFill>
           <a:ln w="12700">
             <a:solidFill>
-              <a:srgbClr val="F1F5F9"/>
+              <a:srgbClr val="1B1F24"/>
             </a:solidFill>
             <a:prstDash val="solid"/>
           </a:ln>
@@ -17028,8 +16934,33 @@
         </p:nvSpPr>
         <p:spPr>
           <a:xfrm>
-            <a:off x="685800" y="1371600"/>
-            <a:ext cx="502920" cy="502920"/>
+            <a:off x="640080" y="1225296"/>
+            <a:ext cx="109728" cy="109728"/>
+          </a:xfrm>
+          <a:prstGeom prst="ellipse">
+            <a:avLst/>
+          </a:prstGeom>
+          <a:solidFill>
+            <a:srgbClr val="E5484D"/>
+          </a:solidFill>
+          <a:ln w="12700">
+            <a:solidFill>
+              <a:srgbClr val="E5484D"/>
+            </a:solidFill>
+            <a:prstDash val="solid"/>
+          </a:ln>
+        </p:spPr>
+      </p:sp>
+      <p:sp>
+        <p:nvSpPr>
+          <p:cNvPr id="5" name="Shape 3"/>
+          <p:cNvSpPr/>
+          <p:nvPr/>
+        </p:nvSpPr>
+        <p:spPr>
+          <a:xfrm>
+            <a:off x="822960" y="1225296"/>
+            <a:ext cx="109728" cy="109728"/>
           </a:xfrm>
           <a:prstGeom prst="ellipse">
             <a:avLst/>
@@ -17045,9 +16976,275 @@
           </a:ln>
         </p:spPr>
       </p:sp>
+      <p:sp>
+        <p:nvSpPr>
+          <p:cNvPr id="6" name="Shape 4"/>
+          <p:cNvSpPr/>
+          <p:nvPr/>
+        </p:nvSpPr>
+        <p:spPr>
+          <a:xfrm>
+            <a:off x="1005840" y="1225296"/>
+            <a:ext cx="109728" cy="109728"/>
+          </a:xfrm>
+          <a:prstGeom prst="ellipse">
+            <a:avLst/>
+          </a:prstGeom>
+          <a:solidFill>
+            <a:srgbClr val="1FB68A"/>
+          </a:solidFill>
+          <a:ln w="12700">
+            <a:solidFill>
+              <a:srgbClr val="1FB68A"/>
+            </a:solidFill>
+            <a:prstDash val="solid"/>
+          </a:ln>
+        </p:spPr>
+      </p:sp>
+      <p:sp>
+        <p:nvSpPr>
+          <p:cNvPr id="7" name="Text 5"/>
+          <p:cNvSpPr txBox="1"/>
+          <p:nvPr/>
+        </p:nvSpPr>
+        <p:spPr>
+          <a:xfrm>
+            <a:off x="1280160" y="1152144"/>
+            <a:ext cx="4023360" cy="256032"/>
+          </a:xfrm>
+          <a:prstGeom prst="rect">
+            <a:avLst/>
+          </a:prstGeom>
+          <a:noFill/>
+          <a:ln/>
+        </p:spPr>
+        <p:txBody>
+          <a:bodyPr wrap="square" lIns="0" tIns="0" rIns="0" bIns="0" rtlCol="0" anchor="ctr"/>
+          <a:lstStyle/>
+          <a:p>
+            <a:pPr algn="r" indent="0" marL="0">
+              <a:buNone/>
+            </a:pPr>
+            <a:r>
+              <a:rPr lang="en-US" sz="1000" dirty="0">
+                <a:solidFill>
+                  <a:srgbClr val="8B98A5"/>
+                </a:solidFill>
+                <a:latin typeface="Calibri" pitchFamily="34" charset="0"/>
+                <a:ea typeface="Calibri" pitchFamily="34" charset="-122"/>
+                <a:cs typeface="Calibri" pitchFamily="34" charset="-120"/>
+              </a:rPr>
+              <a:t>output: captured</a:t>
+            </a:r>
+            <a:endParaRPr lang="en-US" sz="1000" dirty="0"/>
+          </a:p>
+        </p:txBody>
+      </p:sp>
+      <p:sp>
+        <p:nvSpPr>
+          <p:cNvPr id="8" name="terminal-text"/>
+          <p:cNvSpPr txBox="1"/>
+          <p:nvPr/>
+        </p:nvSpPr>
+        <p:spPr>
+          <a:xfrm>
+            <a:off x="685800" y="1481328"/>
+            <a:ext cx="4572000" cy="3017520"/>
+          </a:xfrm>
+          <a:prstGeom prst="rect">
+            <a:avLst/>
+          </a:prstGeom>
+          <a:noFill/>
+          <a:ln/>
+        </p:spPr>
+        <p:txBody>
+          <a:bodyPr wrap="square" lIns="0" tIns="0" rIns="0" bIns="0" rtlCol="0" anchor="t"/>
+          <a:lstStyle/>
+          <a:p>
+            <a:pPr indent="0" marL="0">
+              <a:buNone/>
+            </a:pPr>
+            <a:r>
+              <a:rPr lang="en-US" sz="1200" dirty="0">
+                <a:solidFill>
+                  <a:srgbClr val="8B98A5"/>
+                </a:solidFill>
+                <a:latin typeface="Courier New" pitchFamily="34" charset="0"/>
+                <a:ea typeface="Courier New" pitchFamily="34" charset="-122"/>
+                <a:cs typeface="Courier New" pitchFamily="34" charset="-120"/>
+              </a:rPr>
+              <a:t># Inspector whoami</a:t>
+            </a:r>
+            <a:endParaRPr lang="en-US" sz="1200" dirty="0"/>
+          </a:p>
+          <a:p>
+            <a:pPr indent="0" marL="0">
+              <a:buNone/>
+            </a:pPr>
+            <a:r>
+              <a:rPr lang="en-US" sz="1200" dirty="0">
+                <a:solidFill>
+                  <a:srgbClr val="E6EDF3"/>
+                </a:solidFill>
+                <a:latin typeface="Courier New" pitchFamily="34" charset="0"/>
+                <a:ea typeface="Courier New" pitchFamily="34" charset="-122"/>
+                <a:cs typeface="Courier New" pitchFamily="34" charset="-120"/>
+              </a:rPr>
+              <a:t>"device": { … "status": "active" … },</a:t>
+            </a:r>
+            <a:endParaRPr lang="en-US" sz="1200" dirty="0"/>
+          </a:p>
+          <a:p>
+            <a:pPr indent="0" marL="0">
+              <a:buNone/>
+            </a:pPr>
+            <a:r>
+              <a:rPr lang="en-US" sz="1200" dirty="0">
+                <a:solidFill>
+                  <a:srgbClr val="E6EDF3"/>
+                </a:solidFill>
+                <a:latin typeface="Courier New" pitchFamily="34" charset="0"/>
+                <a:ea typeface="Courier New" pitchFamily="34" charset="-122"/>
+                <a:cs typeface="Courier New" pitchFamily="34" charset="-120"/>
+              </a:rPr>
+              <a:t>"owner":  { … "email": "demo@example.com" }</a:t>
+            </a:r>
+            <a:endParaRPr lang="en-US" sz="1200" dirty="0"/>
+          </a:p>
+          <a:p>
+            <a:pPr indent="0" marL="0">
+              <a:buNone/>
+            </a:pPr>
+            <a:r>
+              <a:rPr lang="en-US" sz="1200" dirty="0">
+                <a:solidFill>
+                  <a:srgbClr val="8B98A5"/>
+                </a:solidFill>
+                <a:latin typeface="Courier New" pitchFamily="34" charset="0"/>
+                <a:ea typeface="Courier New" pitchFamily="34" charset="-122"/>
+                <a:cs typeface="Courier New" pitchFamily="34" charset="-120"/>
+              </a:rPr>
+              <a:t># Postman 09 · Rotate mid-session</a:t>
+            </a:r>
+            <a:endParaRPr lang="en-US" sz="1200" dirty="0"/>
+          </a:p>
+          <a:p>
+            <a:pPr indent="0" marL="0">
+              <a:buNone/>
+            </a:pPr>
+            <a:r>
+              <a:rPr lang="en-US" sz="1200" dirty="0">
+                <a:solidFill>
+                  <a:srgbClr val="E6EDF3"/>
+                </a:solidFill>
+                <a:latin typeface="Courier New" pitchFamily="34" charset="0"/>
+                <a:ea typeface="Courier New" pitchFamily="34" charset="-122"/>
+                <a:cs typeface="Courier New" pitchFamily="34" charset="-120"/>
+              </a:rPr>
+              <a:t>Rotate credentials           200</a:t>
+            </a:r>
+            <a:endParaRPr lang="en-US" sz="1200" dirty="0"/>
+          </a:p>
+          <a:p>
+            <a:pPr indent="0" marL="0">
+              <a:buNone/>
+            </a:pPr>
+            <a:r>
+              <a:rPr lang="en-US" sz="1200" dirty="0">
+                <a:solidFill>
+                  <a:srgbClr val="E6EDF3"/>
+                </a:solidFill>
+                <a:latin typeface="Courier New" pitchFamily="34" charset="0"/>
+                <a:ea typeface="Courier New" pitchFamily="34" charset="-122"/>
+                <a:cs typeface="Courier New" pitchFamily="34" charset="-120"/>
+              </a:rPr>
+              <a:t>whoami with the OLD secret   401</a:t>
+            </a:r>
+            <a:endParaRPr lang="en-US" sz="1200" dirty="0"/>
+          </a:p>
+          <a:p>
+            <a:pPr indent="0" marL="0">
+              <a:buNone/>
+            </a:pPr>
+            <a:r>
+              <a:rPr lang="en-US" sz="1200" dirty="0">
+                <a:solidFill>
+                  <a:srgbClr val="E6EDF3"/>
+                </a:solidFill>
+                <a:latin typeface="Courier New" pitchFamily="34" charset="0"/>
+                <a:ea typeface="Courier New" pitchFamily="34" charset="-122"/>
+                <a:cs typeface="Courier New" pitchFamily="34" charset="-120"/>
+              </a:rPr>
+              <a:t>whoami with the NEW secret   200</a:t>
+            </a:r>
+            <a:endParaRPr lang="en-US" sz="1200" dirty="0"/>
+          </a:p>
+        </p:txBody>
+      </p:sp>
+      <p:sp>
+        <p:nvSpPr>
+          <p:cNvPr id="9" name="Text 7"/>
+          <p:cNvSpPr txBox="1"/>
+          <p:nvPr/>
+        </p:nvSpPr>
+        <p:spPr>
+          <a:xfrm>
+            <a:off x="5852160" y="1097280"/>
+            <a:ext cx="2834640" cy="411480"/>
+          </a:xfrm>
+          <a:prstGeom prst="rect">
+            <a:avLst/>
+          </a:prstGeom>
+          <a:noFill/>
+          <a:ln/>
+        </p:spPr>
+        <p:txBody>
+          <a:bodyPr wrap="square" lIns="0" tIns="0" rIns="0" bIns="0" rtlCol="0" anchor="ctr"/>
+          <a:lstStyle/>
+          <a:p>
+            <a:pPr indent="0" marL="0">
+              <a:buNone/>
+            </a:pPr>
+            <a:r>
+              <a:rPr lang="en-US" sz="2000" b="1" dirty="0">
+                <a:solidFill>
+                  <a:srgbClr val="1B1F24"/>
+                </a:solidFill>
+              </a:rPr>
+              <a:t>Done when</a:t>
+            </a:r>
+            <a:endParaRPr lang="en-US" sz="2000" dirty="0"/>
+          </a:p>
+        </p:txBody>
+      </p:sp>
+      <p:sp>
+        <p:nvSpPr>
+          <p:cNvPr id="10" name="Shape 8"/>
+          <p:cNvSpPr/>
+          <p:nvPr/>
+        </p:nvSpPr>
+        <p:spPr>
+          <a:xfrm>
+            <a:off x="5852160" y="1645920"/>
+            <a:ext cx="384048" cy="384048"/>
+          </a:xfrm>
+          <a:prstGeom prst="ellipse">
+            <a:avLst/>
+          </a:prstGeom>
+          <a:solidFill>
+            <a:srgbClr val="1FB68A"/>
+          </a:solidFill>
+          <a:ln w="12700">
+            <a:solidFill>
+              <a:srgbClr val="1FB68A"/>
+            </a:solidFill>
+            <a:prstDash val="solid"/>
+          </a:ln>
+        </p:spPr>
+      </p:sp>
       <p:pic>
         <p:nvPicPr>
-          <p:cNvPr id="5" name="Image 0" descr="preencoded.png">    </p:cNvPr>
+          <p:cNvPr id="11" name="Image 0" descr="preencoded.png">    </p:cNvPr>
           <p:cNvPicPr>
             <a:picLocks noChangeAspect="1"/>
           </p:cNvPicPr>
@@ -17061,8 +17258,8 @@
         </p:blipFill>
         <p:spPr>
           <a:xfrm>
-            <a:off x="796442" y="1482242"/>
-            <a:ext cx="281635" cy="281635"/>
+            <a:off x="5936651" y="1730411"/>
+            <a:ext cx="215067" cy="215067"/>
           </a:xfrm>
           <a:prstGeom prst="rect">
             <a:avLst/>
@@ -17071,14 +17268,14 @@
       </p:pic>
       <p:sp>
         <p:nvSpPr>
-          <p:cNvPr id="6" name="Text 3"/>
+          <p:cNvPr id="12" name="Text 9"/>
           <p:cNvSpPr txBox="1"/>
           <p:nvPr/>
         </p:nvSpPr>
         <p:spPr>
           <a:xfrm>
-            <a:off x="1417320" y="1188720"/>
-            <a:ext cx="7086600" cy="868680"/>
+            <a:off x="6355080" y="1609344"/>
+            <a:ext cx="2331720" cy="868680"/>
           </a:xfrm>
           <a:prstGeom prst="rect">
             <a:avLst/>
@@ -17087,93 +17284,69 @@
           <a:ln/>
         </p:spPr>
         <p:txBody>
-          <a:bodyPr wrap="square" lIns="0" tIns="0" rIns="0" bIns="0" rtlCol="0" anchor="ctr"/>
-          <a:lstStyle/>
-          <a:p>
-            <a:pPr indent="0" marL="0">
-              <a:buNone/>
-            </a:pPr>
-            <a:r>
-              <a:rPr lang="en-US" sz="1600" b="1" dirty="0">
+          <a:bodyPr wrap="square" lIns="0" tIns="0" rIns="0" bIns="0" rtlCol="0" anchor="t"/>
+          <a:lstStyle/>
+          <a:p>
+            <a:pPr indent="0" marL="0">
+              <a:buNone/>
+            </a:pPr>
+            <a:pPr indent="0" marL="0">
+              <a:buNone/>
+            </a:pPr>
+            <a:r>
+              <a:rPr lang="en-US" sz="1400" dirty="0">
                 <a:solidFill>
                   <a:srgbClr val="1B1F24"/>
                 </a:solidFill>
-              </a:rPr>
-              <a:t>Inspector says auth_required</a:t>
-            </a:r>
-            <a:endParaRPr lang="en-US" sz="1600" dirty="0"/>
-          </a:p>
-          <a:p>
+                <a:latin typeface="Courier New" pitchFamily="34" charset="0"/>
+                <a:ea typeface="Courier New" pitchFamily="34" charset="-122"/>
+                <a:cs typeface="Courier New" pitchFamily="34" charset="-120"/>
+              </a:rPr>
+              <a:t>dev pnpm lab 09</a:t>
+            </a:r>
             <a:pPr indent="0" marL="0">
               <a:buNone/>
             </a:pPr>
             <a:r>
               <a:rPr lang="en-US" sz="1400" dirty="0">
                 <a:solidFill>
-                  <a:srgbClr val="2B3440"/>
-                </a:solidFill>
-              </a:rPr>
-              <a:t>That IS your 401. Check the headers, or re-run the helper for a fresh device.</a:t>
-            </a:r>
-            <a:endParaRPr lang="en-US" sz="1600" dirty="0"/>
-          </a:p>
-        </p:txBody>
-      </p:sp>
-      <p:sp>
-        <p:nvSpPr>
-          <p:cNvPr id="7" name="snag-2"/>
+                  <a:srgbClr val="1B1F24"/>
+                </a:solidFill>
+              </a:rPr>
+              <a:t>: every test passes</a:t>
+            </a:r>
+            <a:endParaRPr lang="en-US" sz="1400" dirty="0"/>
+          </a:p>
+        </p:txBody>
+      </p:sp>
+      <p:sp>
+        <p:nvSpPr>
+          <p:cNvPr id="13" name="Shape 10"/>
           <p:cNvSpPr/>
           <p:nvPr/>
         </p:nvSpPr>
         <p:spPr>
           <a:xfrm>
-            <a:off x="457200" y="2286000"/>
-            <a:ext cx="8229600" cy="1051560"/>
-          </a:xfrm>
-          <a:prstGeom prst="roundRect">
-            <a:avLst>
-              <a:gd name="adj" fmla="val 6957"/>
-            </a:avLst>
+            <a:off x="5852160" y="2377440"/>
+            <a:ext cx="384048" cy="384048"/>
+          </a:xfrm>
+          <a:prstGeom prst="ellipse">
+            <a:avLst/>
           </a:prstGeom>
           <a:solidFill>
-            <a:srgbClr val="F1F5F9"/>
+            <a:srgbClr val="1FB68A"/>
           </a:solidFill>
           <a:ln w="12700">
             <a:solidFill>
-              <a:srgbClr val="F1F5F9"/>
+              <a:srgbClr val="1FB68A"/>
             </a:solidFill>
             <a:prstDash val="solid"/>
           </a:ln>
         </p:spPr>
       </p:sp>
-      <p:sp>
-        <p:nvSpPr>
-          <p:cNvPr id="8" name="Shape 5"/>
-          <p:cNvSpPr/>
-          <p:nvPr/>
-        </p:nvSpPr>
-        <p:spPr>
-          <a:xfrm>
-            <a:off x="685800" y="2560320"/>
-            <a:ext cx="502920" cy="502920"/>
-          </a:xfrm>
-          <a:prstGeom prst="ellipse">
-            <a:avLst/>
-          </a:prstGeom>
-          <a:solidFill>
-            <a:srgbClr val="E69A28"/>
-          </a:solidFill>
-          <a:ln w="12700">
-            <a:solidFill>
-              <a:srgbClr val="E69A28"/>
-            </a:solidFill>
-            <a:prstDash val="solid"/>
-          </a:ln>
-        </p:spPr>
-      </p:sp>
       <p:pic>
         <p:nvPicPr>
-          <p:cNvPr id="9" name="Image 1" descr="preencoded.png">    </p:cNvPr>
+          <p:cNvPr id="14" name="Image 1" descr="preencoded.png">    </p:cNvPr>
           <p:cNvPicPr>
             <a:picLocks noChangeAspect="1"/>
           </p:cNvPicPr>
@@ -17187,8 +17360,8 @@
         </p:blipFill>
         <p:spPr>
           <a:xfrm>
-            <a:off x="796442" y="2670962"/>
-            <a:ext cx="281635" cy="281635"/>
+            <a:off x="5936651" y="2461931"/>
+            <a:ext cx="215067" cy="215067"/>
           </a:xfrm>
           <a:prstGeom prst="rect">
             <a:avLst/>
@@ -17197,14 +17370,14 @@
       </p:pic>
       <p:sp>
         <p:nvSpPr>
-          <p:cNvPr id="10" name="Text 6"/>
+          <p:cNvPr id="15" name="Text 11"/>
           <p:cNvSpPr txBox="1"/>
           <p:nvPr/>
         </p:nvSpPr>
         <p:spPr>
           <a:xfrm>
-            <a:off x="1417320" y="2377440"/>
-            <a:ext cx="7086600" cy="868680"/>
+            <a:off x="6355080" y="2340864"/>
+            <a:ext cx="2331720" cy="868680"/>
           </a:xfrm>
           <a:prstGeom prst="rect">
             <a:avLst/>
@@ -17213,93 +17386,52 @@
           <a:ln/>
         </p:spPr>
         <p:txBody>
-          <a:bodyPr wrap="square" lIns="0" tIns="0" rIns="0" bIns="0" rtlCol="0" anchor="ctr"/>
-          <a:lstStyle/>
-          <a:p>
-            <a:pPr indent="0" marL="0">
-              <a:buNone/>
-            </a:pPr>
-            <a:r>
-              <a:rPr lang="en-US" sz="1600" b="1" dirty="0">
+          <a:bodyPr wrap="square" lIns="0" tIns="0" rIns="0" bIns="0" rtlCol="0" anchor="t"/>
+          <a:lstStyle/>
+          <a:p>
+            <a:pPr indent="0" marL="0">
+              <a:buNone/>
+            </a:pPr>
+            <a:r>
+              <a:rPr lang="en-US" sz="1400" dirty="0">
                 <a:solidFill>
                   <a:srgbClr val="1B1F24"/>
                 </a:solidFill>
               </a:rPr>
-              <a:t>whoami over stdio fails</a:t>
-            </a:r>
-            <a:endParaRPr lang="en-US" sz="1600" dirty="0"/>
-          </a:p>
-          <a:p>
-            <a:pPr indent="0" marL="0">
-              <a:buNone/>
-            </a:pPr>
-            <a:r>
-              <a:rPr lang="en-US" sz="1400" dirty="0">
-                <a:solidFill>
-                  <a:srgbClr val="2B3440"/>
-                </a:solidFill>
-              </a:rPr>
-              <a:t>By design: stdio trusts the local user; there is no device identity.</a:t>
-            </a:r>
-            <a:endParaRPr lang="en-US" sz="1600" dirty="0"/>
-          </a:p>
-        </p:txBody>
-      </p:sp>
-      <p:sp>
-        <p:nvSpPr>
-          <p:cNvPr id="11" name="snag-3"/>
+              <a:t>the old secret failed on the NEXT call</a:t>
+            </a:r>
+            <a:endParaRPr lang="en-US" sz="1400" dirty="0"/>
+          </a:p>
+        </p:txBody>
+      </p:sp>
+      <p:sp>
+        <p:nvSpPr>
+          <p:cNvPr id="16" name="Shape 12"/>
           <p:cNvSpPr/>
           <p:nvPr/>
         </p:nvSpPr>
         <p:spPr>
           <a:xfrm>
-            <a:off x="457200" y="3474720"/>
-            <a:ext cx="8229600" cy="1051560"/>
-          </a:xfrm>
-          <a:prstGeom prst="roundRect">
-            <a:avLst>
-              <a:gd name="adj" fmla="val 6957"/>
-            </a:avLst>
+            <a:off x="5852160" y="3108960"/>
+            <a:ext cx="384048" cy="384048"/>
+          </a:xfrm>
+          <a:prstGeom prst="ellipse">
+            <a:avLst/>
           </a:prstGeom>
           <a:solidFill>
-            <a:srgbClr val="F1F5F9"/>
+            <a:srgbClr val="1FB68A"/>
           </a:solidFill>
           <a:ln w="12700">
             <a:solidFill>
-              <a:srgbClr val="F1F5F9"/>
+              <a:srgbClr val="1FB68A"/>
             </a:solidFill>
             <a:prstDash val="solid"/>
           </a:ln>
         </p:spPr>
       </p:sp>
-      <p:sp>
-        <p:nvSpPr>
-          <p:cNvPr id="12" name="Shape 8"/>
-          <p:cNvSpPr/>
-          <p:nvPr/>
-        </p:nvSpPr>
-        <p:spPr>
-          <a:xfrm>
-            <a:off x="685800" y="3749040"/>
-            <a:ext cx="502920" cy="502920"/>
-          </a:xfrm>
-          <a:prstGeom prst="ellipse">
-            <a:avLst/>
-          </a:prstGeom>
-          <a:solidFill>
-            <a:srgbClr val="E69A28"/>
-          </a:solidFill>
-          <a:ln w="12700">
-            <a:solidFill>
-              <a:srgbClr val="E69A28"/>
-            </a:solidFill>
-            <a:prstDash val="solid"/>
-          </a:ln>
-        </p:spPr>
-      </p:sp>
       <p:pic>
         <p:nvPicPr>
-          <p:cNvPr id="13" name="Image 2" descr="preencoded.png">    </p:cNvPr>
+          <p:cNvPr id="17" name="Image 2" descr="preencoded.png">    </p:cNvPr>
           <p:cNvPicPr>
             <a:picLocks noChangeAspect="1"/>
           </p:cNvPicPr>
@@ -17313,8 +17445,8 @@
         </p:blipFill>
         <p:spPr>
           <a:xfrm>
-            <a:off x="796442" y="3859682"/>
-            <a:ext cx="281635" cy="281635"/>
+            <a:off x="5936651" y="3193451"/>
+            <a:ext cx="215067" cy="215067"/>
           </a:xfrm>
           <a:prstGeom prst="rect">
             <a:avLst/>
@@ -17323,14 +17455,14 @@
       </p:pic>
       <p:sp>
         <p:nvSpPr>
-          <p:cNvPr id="14" name="Text 9"/>
+          <p:cNvPr id="18" name="Text 13"/>
           <p:cNvSpPr txBox="1"/>
           <p:nvPr/>
         </p:nvSpPr>
         <p:spPr>
           <a:xfrm>
-            <a:off x="1417320" y="3566160"/>
-            <a:ext cx="7086600" cy="868680"/>
+            <a:off x="6355080" y="3072384"/>
+            <a:ext cx="2331720" cy="868680"/>
           </a:xfrm>
           <a:prstGeom prst="rect">
             <a:avLst/>
@@ -17339,22 +17471,93 @@
           <a:ln/>
         </p:spPr>
         <p:txBody>
-          <a:bodyPr wrap="square" lIns="0" tIns="0" rIns="0" bIns="0" rtlCol="0" anchor="ctr"/>
-          <a:lstStyle/>
-          <a:p>
-            <a:pPr indent="0" marL="0">
-              <a:buNone/>
-            </a:pPr>
-            <a:r>
-              <a:rPr lang="en-US" sz="1600" b="1" dirty="0">
+          <a:bodyPr wrap="square" lIns="0" tIns="0" rIns="0" bIns="0" rtlCol="0" anchor="t"/>
+          <a:lstStyle/>
+          <a:p>
+            <a:pPr indent="0" marL="0">
+              <a:buNone/>
+            </a:pPr>
+            <a:r>
+              <a:rPr lang="en-US" sz="1400" dirty="0">
                 <a:solidFill>
                   <a:srgbClr val="1B1F24"/>
                 </a:solidFill>
               </a:rPr>
-              <a:t>Auth seems bypassed</a:t>
-            </a:r>
-            <a:endParaRPr lang="en-US" sz="1600" dirty="0"/>
-          </a:p>
+              <a:t>the 7 failure modes → one 401, explained</a:t>
+            </a:r>
+            <a:endParaRPr lang="en-US" sz="1400" dirty="0"/>
+          </a:p>
+        </p:txBody>
+      </p:sp>
+      <p:sp>
+        <p:nvSpPr>
+          <p:cNvPr id="19" name="Shape 14"/>
+          <p:cNvSpPr/>
+          <p:nvPr/>
+        </p:nvSpPr>
+        <p:spPr>
+          <a:xfrm>
+            <a:off x="5852160" y="3840480"/>
+            <a:ext cx="384048" cy="384048"/>
+          </a:xfrm>
+          <a:prstGeom prst="ellipse">
+            <a:avLst/>
+          </a:prstGeom>
+          <a:solidFill>
+            <a:srgbClr val="1FB68A"/>
+          </a:solidFill>
+          <a:ln w="12700">
+            <a:solidFill>
+              <a:srgbClr val="1FB68A"/>
+            </a:solidFill>
+            <a:prstDash val="solid"/>
+          </a:ln>
+        </p:spPr>
+      </p:sp>
+      <p:pic>
+        <p:nvPicPr>
+          <p:cNvPr id="20" name="Image 3" descr="preencoded.png">    </p:cNvPr>
+          <p:cNvPicPr>
+            <a:picLocks noChangeAspect="1"/>
+          </p:cNvPicPr>
+          <p:nvPr/>
+        </p:nvPicPr>
+        <p:blipFill>
+          <a:blip r:embed="rId4"/>
+          <a:stretch>
+            <a:fillRect/>
+          </a:stretch>
+        </p:blipFill>
+        <p:spPr>
+          <a:xfrm>
+            <a:off x="5936651" y="3924971"/>
+            <a:ext cx="215067" cy="215067"/>
+          </a:xfrm>
+          <a:prstGeom prst="rect">
+            <a:avLst/>
+          </a:prstGeom>
+        </p:spPr>
+      </p:pic>
+      <p:sp>
+        <p:nvSpPr>
+          <p:cNvPr id="21" name="Text 15"/>
+          <p:cNvSpPr txBox="1"/>
+          <p:nvPr/>
+        </p:nvSpPr>
+        <p:spPr>
+          <a:xfrm>
+            <a:off x="6355080" y="3803904"/>
+            <a:ext cx="2331720" cy="868680"/>
+          </a:xfrm>
+          <a:prstGeom prst="rect">
+            <a:avLst/>
+          </a:prstGeom>
+          <a:noFill/>
+          <a:ln/>
+        </p:spPr>
+        <p:txBody>
+          <a:bodyPr wrap="square" lIns="0" tIns="0" rIns="0" bIns="0" rtlCol="0" anchor="t"/>
+          <a:lstStyle/>
           <a:p>
             <a:pPr indent="0" marL="0">
               <a:buNone/>
@@ -17362,12 +17565,12 @@
             <a:r>
               <a:rPr lang="en-US" sz="1400" dirty="0">
                 <a:solidFill>
-                  <a:srgbClr val="2B3440"/>
-                </a:solidFill>
-              </a:rPr>
-              <a:t>The middleware must be registered BEFORE the transport mounts (measured: after = bypassed).</a:t>
-            </a:r>
-            <a:endParaRPr lang="en-US" sz="1600" dirty="0"/>
+                  <a:srgbClr val="1B1F24"/>
+                </a:solidFill>
+              </a:rPr>
+              <a:t>why stdio whoami is a tool error (local trust)</a:t>
+            </a:r>
+            <a:endParaRPr lang="en-US" sz="1400" dirty="0"/>
           </a:p>
         </p:txBody>
       </p:sp>
@@ -17473,7 +17676,7 @@
                   <a:srgbClr val="1B1F24"/>
                 </a:solidFill>
               </a:rPr>
-              <a:t>Capstone (homework): evidence, not claims</a:t>
+              <a:t>If you are stuck: module 6</a:t>
             </a:r>
             <a:endParaRPr lang="en-US" sz="3200" dirty="0"/>
           </a:p>
@@ -17481,32 +17684,59 @@
       </p:sp>
       <p:sp>
         <p:nvSpPr>
-          <p:cNvPr id="3" name="Shape 1"/>
+          <p:cNvPr id="3" name="snag-1"/>
           <p:cNvSpPr/>
           <p:nvPr/>
         </p:nvSpPr>
         <p:spPr>
           <a:xfrm>
-            <a:off x="457200" y="1234440"/>
-            <a:ext cx="384048" cy="384048"/>
-          </a:xfrm>
-          <a:prstGeom prst="ellipse">
-            <a:avLst/>
+            <a:off x="457200" y="1097280"/>
+            <a:ext cx="8229600" cy="1051560"/>
+          </a:xfrm>
+          <a:prstGeom prst="roundRect">
+            <a:avLst>
+              <a:gd name="adj" fmla="val 6957"/>
+            </a:avLst>
           </a:prstGeom>
           <a:solidFill>
-            <a:srgbClr val="1FB68A"/>
+            <a:srgbClr val="F1F5F9"/>
           </a:solidFill>
           <a:ln w="12700">
             <a:solidFill>
-              <a:srgbClr val="1FB68A"/>
+              <a:srgbClr val="F1F5F9"/>
             </a:solidFill>
             <a:prstDash val="solid"/>
           </a:ln>
         </p:spPr>
       </p:sp>
+      <p:sp>
+        <p:nvSpPr>
+          <p:cNvPr id="4" name="Shape 2"/>
+          <p:cNvSpPr/>
+          <p:nvPr/>
+        </p:nvSpPr>
+        <p:spPr>
+          <a:xfrm>
+            <a:off x="685800" y="1371600"/>
+            <a:ext cx="502920" cy="502920"/>
+          </a:xfrm>
+          <a:prstGeom prst="ellipse">
+            <a:avLst/>
+          </a:prstGeom>
+          <a:solidFill>
+            <a:srgbClr val="E69A28"/>
+          </a:solidFill>
+          <a:ln w="12700">
+            <a:solidFill>
+              <a:srgbClr val="E69A28"/>
+            </a:solidFill>
+            <a:prstDash val="solid"/>
+          </a:ln>
+        </p:spPr>
+      </p:sp>
       <p:pic>
         <p:nvPicPr>
-          <p:cNvPr id="4" name="Image 0" descr="preencoded.png">    </p:cNvPr>
+          <p:cNvPr id="5" name="Image 0" descr="preencoded.png">    </p:cNvPr>
           <p:cNvPicPr>
             <a:picLocks noChangeAspect="1"/>
           </p:cNvPicPr>
@@ -17520,8 +17750,8 @@
         </p:blipFill>
         <p:spPr>
           <a:xfrm>
-            <a:off x="541691" y="1318931"/>
-            <a:ext cx="215067" cy="215067"/>
+            <a:off x="796442" y="1482242"/>
+            <a:ext cx="281635" cy="281635"/>
           </a:xfrm>
           <a:prstGeom prst="rect">
             <a:avLst/>
@@ -17530,14 +17760,14 @@
       </p:pic>
       <p:sp>
         <p:nvSpPr>
-          <p:cNvPr id="5" name="Text 2"/>
+          <p:cNvPr id="6" name="Text 3"/>
           <p:cNvSpPr txBox="1"/>
           <p:nvPr/>
         </p:nvSpPr>
         <p:spPr>
           <a:xfrm>
-            <a:off x="960120" y="1188720"/>
-            <a:ext cx="3520440" cy="731520"/>
+            <a:off x="1417320" y="1188720"/>
+            <a:ext cx="7086600" cy="868680"/>
           </a:xfrm>
           <a:prstGeom prst="rect">
             <a:avLst/>
@@ -17546,63 +17776,93 @@
           <a:ln/>
         </p:spPr>
         <p:txBody>
-          <a:bodyPr wrap="square" lIns="0" tIns="0" rIns="0" bIns="0" rtlCol="0" anchor="t"/>
-          <a:lstStyle/>
-          <a:p>
-            <a:pPr indent="0" marL="0">
-              <a:buNone/>
-            </a:pPr>
-            <a:r>
-              <a:rPr lang="en-US" sz="1400" b="1" dirty="0">
+          <a:bodyPr wrap="square" lIns="0" tIns="0" rIns="0" bIns="0" rtlCol="0" anchor="ctr"/>
+          <a:lstStyle/>
+          <a:p>
+            <a:pPr indent="0" marL="0">
+              <a:buNone/>
+            </a:pPr>
+            <a:r>
+              <a:rPr lang="en-US" sz="1600" b="1" dirty="0">
                 <a:solidFill>
                   <a:srgbClr val="1B1F24"/>
                 </a:solidFill>
               </a:rPr>
-              <a:t>1. </a:t>
-            </a:r>
+              <a:t>Inspector says auth_required</a:t>
+            </a:r>
+            <a:endParaRPr lang="en-US" sz="1600" dirty="0"/>
+          </a:p>
+          <a:p>
             <a:pPr indent="0" marL="0">
               <a:buNone/>
             </a:pPr>
             <a:r>
               <a:rPr lang="en-US" sz="1400" dirty="0">
                 <a:solidFill>
-                  <a:srgbClr val="1B1F24"/>
-                </a:solidFill>
-              </a:rPr>
-              <a:t>spec diff + every open question you raised</a:t>
-            </a:r>
-            <a:endParaRPr lang="en-US" sz="1400" dirty="0"/>
-          </a:p>
-        </p:txBody>
-      </p:sp>
-      <p:sp>
-        <p:nvSpPr>
-          <p:cNvPr id="6" name="Shape 3"/>
+                  <a:srgbClr val="2B3440"/>
+                </a:solidFill>
+              </a:rPr>
+              <a:t>That IS your 401. Check the headers, or re-run the helper for a fresh device.</a:t>
+            </a:r>
+            <a:endParaRPr lang="en-US" sz="1600" dirty="0"/>
+          </a:p>
+        </p:txBody>
+      </p:sp>
+      <p:sp>
+        <p:nvSpPr>
+          <p:cNvPr id="7" name="snag-2"/>
           <p:cNvSpPr/>
           <p:nvPr/>
         </p:nvSpPr>
         <p:spPr>
           <a:xfrm>
-            <a:off x="457200" y="2075688"/>
-            <a:ext cx="384048" cy="384048"/>
-          </a:xfrm>
-          <a:prstGeom prst="ellipse">
-            <a:avLst/>
+            <a:off x="457200" y="2286000"/>
+            <a:ext cx="8229600" cy="1051560"/>
+          </a:xfrm>
+          <a:prstGeom prst="roundRect">
+            <a:avLst>
+              <a:gd name="adj" fmla="val 6957"/>
+            </a:avLst>
           </a:prstGeom>
           <a:solidFill>
-            <a:srgbClr val="1FB68A"/>
+            <a:srgbClr val="F1F5F9"/>
           </a:solidFill>
           <a:ln w="12700">
             <a:solidFill>
-              <a:srgbClr val="1FB68A"/>
+              <a:srgbClr val="F1F5F9"/>
             </a:solidFill>
             <a:prstDash val="solid"/>
           </a:ln>
         </p:spPr>
       </p:sp>
+      <p:sp>
+        <p:nvSpPr>
+          <p:cNvPr id="8" name="Shape 5"/>
+          <p:cNvSpPr/>
+          <p:nvPr/>
+        </p:nvSpPr>
+        <p:spPr>
+          <a:xfrm>
+            <a:off x="685800" y="2560320"/>
+            <a:ext cx="502920" cy="502920"/>
+          </a:xfrm>
+          <a:prstGeom prst="ellipse">
+            <a:avLst/>
+          </a:prstGeom>
+          <a:solidFill>
+            <a:srgbClr val="E69A28"/>
+          </a:solidFill>
+          <a:ln w="12700">
+            <a:solidFill>
+              <a:srgbClr val="E69A28"/>
+            </a:solidFill>
+            <a:prstDash val="solid"/>
+          </a:ln>
+        </p:spPr>
+      </p:sp>
       <p:pic>
         <p:nvPicPr>
-          <p:cNvPr id="7" name="Image 1" descr="preencoded.png">    </p:cNvPr>
+          <p:cNvPr id="9" name="Image 1" descr="preencoded.png">    </p:cNvPr>
           <p:cNvPicPr>
             <a:picLocks noChangeAspect="1"/>
           </p:cNvPicPr>
@@ -17616,8 +17876,8 @@
         </p:blipFill>
         <p:spPr>
           <a:xfrm>
-            <a:off x="541691" y="2160179"/>
-            <a:ext cx="215067" cy="215067"/>
+            <a:off x="796442" y="2670962"/>
+            <a:ext cx="281635" cy="281635"/>
           </a:xfrm>
           <a:prstGeom prst="rect">
             <a:avLst/>
@@ -17626,14 +17886,14 @@
       </p:pic>
       <p:sp>
         <p:nvSpPr>
-          <p:cNvPr id="8" name="Text 4"/>
+          <p:cNvPr id="10" name="Text 6"/>
           <p:cNvSpPr txBox="1"/>
           <p:nvPr/>
         </p:nvSpPr>
         <p:spPr>
           <a:xfrm>
-            <a:off x="960120" y="2029968"/>
-            <a:ext cx="3520440" cy="731520"/>
+            <a:off x="1417320" y="2377440"/>
+            <a:ext cx="7086600" cy="868680"/>
           </a:xfrm>
           <a:prstGeom prst="rect">
             <a:avLst/>
@@ -17642,63 +17902,93 @@
           <a:ln/>
         </p:spPr>
         <p:txBody>
-          <a:bodyPr wrap="square" lIns="0" tIns="0" rIns="0" bIns="0" rtlCol="0" anchor="t"/>
-          <a:lstStyle/>
-          <a:p>
-            <a:pPr indent="0" marL="0">
-              <a:buNone/>
-            </a:pPr>
-            <a:r>
-              <a:rPr lang="en-US" sz="1400" b="1" dirty="0">
+          <a:bodyPr wrap="square" lIns="0" tIns="0" rIns="0" bIns="0" rtlCol="0" anchor="ctr"/>
+          <a:lstStyle/>
+          <a:p>
+            <a:pPr indent="0" marL="0">
+              <a:buNone/>
+            </a:pPr>
+            <a:r>
+              <a:rPr lang="en-US" sz="1600" b="1" dirty="0">
                 <a:solidFill>
                   <a:srgbClr val="1B1F24"/>
                 </a:solidFill>
               </a:rPr>
-              <a:t>2. </a:t>
-            </a:r>
+              <a:t>whoami over stdio fails</a:t>
+            </a:r>
+            <a:endParaRPr lang="en-US" sz="1600" dirty="0"/>
+          </a:p>
+          <a:p>
             <a:pPr indent="0" marL="0">
               <a:buNone/>
             </a:pPr>
             <a:r>
               <a:rPr lang="en-US" sz="1400" dirty="0">
                 <a:solidFill>
-                  <a:srgbClr val="1B1F24"/>
-                </a:solidFill>
-              </a:rPr>
-              <a:t>plan with a verify line per task</a:t>
-            </a:r>
-            <a:endParaRPr lang="en-US" sz="1400" dirty="0"/>
-          </a:p>
-        </p:txBody>
-      </p:sp>
-      <p:sp>
-        <p:nvSpPr>
-          <p:cNvPr id="9" name="Shape 5"/>
+                  <a:srgbClr val="2B3440"/>
+                </a:solidFill>
+              </a:rPr>
+              <a:t>By design: stdio trusts the local user; there is no device identity.</a:t>
+            </a:r>
+            <a:endParaRPr lang="en-US" sz="1600" dirty="0"/>
+          </a:p>
+        </p:txBody>
+      </p:sp>
+      <p:sp>
+        <p:nvSpPr>
+          <p:cNvPr id="11" name="snag-3"/>
           <p:cNvSpPr/>
           <p:nvPr/>
         </p:nvSpPr>
         <p:spPr>
           <a:xfrm>
-            <a:off x="457200" y="2916936"/>
-            <a:ext cx="384048" cy="384048"/>
-          </a:xfrm>
-          <a:prstGeom prst="ellipse">
-            <a:avLst/>
+            <a:off x="457200" y="3474720"/>
+            <a:ext cx="8229600" cy="1051560"/>
+          </a:xfrm>
+          <a:prstGeom prst="roundRect">
+            <a:avLst>
+              <a:gd name="adj" fmla="val 6957"/>
+            </a:avLst>
           </a:prstGeom>
           <a:solidFill>
-            <a:srgbClr val="1FB68A"/>
+            <a:srgbClr val="F1F5F9"/>
           </a:solidFill>
           <a:ln w="12700">
             <a:solidFill>
-              <a:srgbClr val="1FB68A"/>
+              <a:srgbClr val="F1F5F9"/>
             </a:solidFill>
             <a:prstDash val="solid"/>
           </a:ln>
         </p:spPr>
       </p:sp>
+      <p:sp>
+        <p:nvSpPr>
+          <p:cNvPr id="12" name="Shape 8"/>
+          <p:cNvSpPr/>
+          <p:nvPr/>
+        </p:nvSpPr>
+        <p:spPr>
+          <a:xfrm>
+            <a:off x="685800" y="3749040"/>
+            <a:ext cx="502920" cy="502920"/>
+          </a:xfrm>
+          <a:prstGeom prst="ellipse">
+            <a:avLst/>
+          </a:prstGeom>
+          <a:solidFill>
+            <a:srgbClr val="E69A28"/>
+          </a:solidFill>
+          <a:ln w="12700">
+            <a:solidFill>
+              <a:srgbClr val="E69A28"/>
+            </a:solidFill>
+            <a:prstDash val="solid"/>
+          </a:ln>
+        </p:spPr>
+      </p:sp>
       <p:pic>
         <p:nvPicPr>
-          <p:cNvPr id="10" name="Image 2" descr="preencoded.png">    </p:cNvPr>
+          <p:cNvPr id="13" name="Image 2" descr="preencoded.png">    </p:cNvPr>
           <p:cNvPicPr>
             <a:picLocks noChangeAspect="1"/>
           </p:cNvPicPr>
@@ -17712,8 +18002,8 @@
         </p:blipFill>
         <p:spPr>
           <a:xfrm>
-            <a:off x="541691" y="3001427"/>
-            <a:ext cx="215067" cy="215067"/>
+            <a:off x="796442" y="3859682"/>
+            <a:ext cx="281635" cy="281635"/>
           </a:xfrm>
           <a:prstGeom prst="rect">
             <a:avLst/>
@@ -17722,14 +18012,14 @@
       </p:pic>
       <p:sp>
         <p:nvSpPr>
-          <p:cNvPr id="11" name="Text 6"/>
+          <p:cNvPr id="14" name="Text 9"/>
           <p:cNvSpPr txBox="1"/>
           <p:nvPr/>
         </p:nvSpPr>
         <p:spPr>
           <a:xfrm>
-            <a:off x="960120" y="2871216"/>
-            <a:ext cx="3520440" cy="731520"/>
+            <a:off x="1417320" y="3566160"/>
+            <a:ext cx="7086600" cy="868680"/>
           </a:xfrm>
           <a:prstGeom prst="rect">
             <a:avLst/>
@@ -17738,512 +18028,35 @@
           <a:ln/>
         </p:spPr>
         <p:txBody>
-          <a:bodyPr wrap="square" lIns="0" tIns="0" rIns="0" bIns="0" rtlCol="0" anchor="t"/>
-          <a:lstStyle/>
-          <a:p>
-            <a:pPr indent="0" marL="0">
-              <a:buNone/>
-            </a:pPr>
-            <a:r>
-              <a:rPr lang="en-US" sz="1400" b="1" dirty="0">
+          <a:bodyPr wrap="square" lIns="0" tIns="0" rIns="0" bIns="0" rtlCol="0" anchor="ctr"/>
+          <a:lstStyle/>
+          <a:p>
+            <a:pPr indent="0" marL="0">
+              <a:buNone/>
+            </a:pPr>
+            <a:r>
+              <a:rPr lang="en-US" sz="1600" b="1" dirty="0">
                 <a:solidFill>
                   <a:srgbClr val="1B1F24"/>
                 </a:solidFill>
               </a:rPr>
-              <a:t>3. </a:t>
-            </a:r>
+              <a:t>Auth seems bypassed</a:t>
+            </a:r>
+            <a:endParaRPr lang="en-US" sz="1600" dirty="0"/>
+          </a:p>
+          <a:p>
             <a:pPr indent="0" marL="0">
               <a:buNone/>
             </a:pPr>
             <a:r>
               <a:rPr lang="en-US" sz="1400" dirty="0">
                 <a:solidFill>
-                  <a:srgbClr val="1B1F24"/>
-                </a:solidFill>
-              </a:rPr>
-              <a:t>the migration and your edits, or why none</a:t>
-            </a:r>
-            <a:endParaRPr lang="en-US" sz="1400" dirty="0"/>
-          </a:p>
-        </p:txBody>
-      </p:sp>
-      <p:sp>
-        <p:nvSpPr>
-          <p:cNvPr id="12" name="Shape 7"/>
-          <p:cNvSpPr/>
-          <p:nvPr/>
-        </p:nvSpPr>
-        <p:spPr>
-          <a:xfrm>
-            <a:off x="457200" y="3758184"/>
-            <a:ext cx="384048" cy="384048"/>
-          </a:xfrm>
-          <a:prstGeom prst="ellipse">
-            <a:avLst/>
-          </a:prstGeom>
-          <a:solidFill>
-            <a:srgbClr val="1FB68A"/>
-          </a:solidFill>
-          <a:ln w="12700">
-            <a:solidFill>
-              <a:srgbClr val="1FB68A"/>
-            </a:solidFill>
-            <a:prstDash val="solid"/>
-          </a:ln>
-        </p:spPr>
-      </p:sp>
-      <p:pic>
-        <p:nvPicPr>
-          <p:cNvPr id="13" name="Image 3" descr="preencoded.png">    </p:cNvPr>
-          <p:cNvPicPr>
-            <a:picLocks noChangeAspect="1"/>
-          </p:cNvPicPr>
-          <p:nvPr/>
-        </p:nvPicPr>
-        <p:blipFill>
-          <a:blip r:embed="rId4"/>
-          <a:stretch>
-            <a:fillRect/>
-          </a:stretch>
-        </p:blipFill>
-        <p:spPr>
-          <a:xfrm>
-            <a:off x="541691" y="3842675"/>
-            <a:ext cx="215067" cy="215067"/>
-          </a:xfrm>
-          <a:prstGeom prst="rect">
-            <a:avLst/>
-          </a:prstGeom>
-        </p:spPr>
-      </p:pic>
-      <p:sp>
-        <p:nvSpPr>
-          <p:cNvPr id="14" name="Text 8"/>
-          <p:cNvSpPr txBox="1"/>
-          <p:nvPr/>
-        </p:nvSpPr>
-        <p:spPr>
-          <a:xfrm>
-            <a:off x="960120" y="3712464"/>
-            <a:ext cx="3520440" cy="731520"/>
-          </a:xfrm>
-          <a:prstGeom prst="rect">
-            <a:avLst/>
-          </a:prstGeom>
-          <a:noFill/>
-          <a:ln/>
-        </p:spPr>
-        <p:txBody>
-          <a:bodyPr wrap="square" lIns="0" tIns="0" rIns="0" bIns="0" rtlCol="0" anchor="t"/>
-          <a:lstStyle/>
-          <a:p>
-            <a:pPr indent="0" marL="0">
-              <a:buNone/>
-            </a:pPr>
-            <a:r>
-              <a:rPr lang="en-US" sz="1400" b="1" dirty="0">
-                <a:solidFill>
-                  <a:srgbClr val="1B1F24"/>
-                </a:solidFill>
-              </a:rPr>
-              <a:t>4. </a:t>
-            </a:r>
-            <a:pPr indent="0" marL="0">
-              <a:buNone/>
-            </a:pPr>
-            <a:r>
-              <a:rPr lang="en-US" sz="1400" dirty="0">
-                <a:solidFill>
-                  <a:srgbClr val="1B1F24"/>
-                </a:solidFill>
-              </a:rPr>
-              <a:t>unit + e2e counts; owner-check mutation result</a:t>
-            </a:r>
-            <a:endParaRPr lang="en-US" sz="1400" dirty="0"/>
-          </a:p>
-        </p:txBody>
-      </p:sp>
-      <p:sp>
-        <p:nvSpPr>
-          <p:cNvPr id="15" name="Shape 9"/>
-          <p:cNvSpPr/>
-          <p:nvPr/>
-        </p:nvSpPr>
-        <p:spPr>
-          <a:xfrm>
-            <a:off x="4663440" y="1234440"/>
-            <a:ext cx="384048" cy="384048"/>
-          </a:xfrm>
-          <a:prstGeom prst="ellipse">
-            <a:avLst/>
-          </a:prstGeom>
-          <a:solidFill>
-            <a:srgbClr val="1FB68A"/>
-          </a:solidFill>
-          <a:ln w="12700">
-            <a:solidFill>
-              <a:srgbClr val="1FB68A"/>
-            </a:solidFill>
-            <a:prstDash val="solid"/>
-          </a:ln>
-        </p:spPr>
-      </p:sp>
-      <p:pic>
-        <p:nvPicPr>
-          <p:cNvPr id="16" name="Image 4" descr="preencoded.png">    </p:cNvPr>
-          <p:cNvPicPr>
-            <a:picLocks noChangeAspect="1"/>
-          </p:cNvPicPr>
-          <p:nvPr/>
-        </p:nvPicPr>
-        <p:blipFill>
-          <a:blip r:embed="rId5"/>
-          <a:stretch>
-            <a:fillRect/>
-          </a:stretch>
-        </p:blipFill>
-        <p:spPr>
-          <a:xfrm>
-            <a:off x="4747931" y="1318931"/>
-            <a:ext cx="215067" cy="215067"/>
-          </a:xfrm>
-          <a:prstGeom prst="rect">
-            <a:avLst/>
-          </a:prstGeom>
-        </p:spPr>
-      </p:pic>
-      <p:sp>
-        <p:nvSpPr>
-          <p:cNvPr id="17" name="Text 10"/>
-          <p:cNvSpPr txBox="1"/>
-          <p:nvPr/>
-        </p:nvSpPr>
-        <p:spPr>
-          <a:xfrm>
-            <a:off x="5166360" y="1188720"/>
-            <a:ext cx="3520440" cy="731520"/>
-          </a:xfrm>
-          <a:prstGeom prst="rect">
-            <a:avLst/>
-          </a:prstGeom>
-          <a:noFill/>
-          <a:ln/>
-        </p:spPr>
-        <p:txBody>
-          <a:bodyPr wrap="square" lIns="0" tIns="0" rIns="0" bIns="0" rtlCol="0" anchor="t"/>
-          <a:lstStyle/>
-          <a:p>
-            <a:pPr indent="0" marL="0">
-              <a:buNone/>
-            </a:pPr>
-            <a:r>
-              <a:rPr lang="en-US" sz="1400" b="1" dirty="0">
-                <a:solidFill>
-                  <a:srgbClr val="1B1F24"/>
-                </a:solidFill>
-              </a:rPr>
-              <a:t>5. </a:t>
-            </a:r>
-            <a:pPr indent="0" marL="0">
-              <a:buNone/>
-            </a:pPr>
-            <a:r>
-              <a:rPr lang="en-US" sz="1400" dirty="0">
-                <a:solidFill>
-                  <a:srgbClr val="1B1F24"/>
-                </a:solidFill>
-              </a:rPr>
-              <a:t>my-notes e2e: two devices of two users</a:t>
-            </a:r>
-            <a:endParaRPr lang="en-US" sz="1400" dirty="0"/>
-          </a:p>
-        </p:txBody>
-      </p:sp>
-      <p:sp>
-        <p:nvSpPr>
-          <p:cNvPr id="18" name="Shape 11"/>
-          <p:cNvSpPr/>
-          <p:nvPr/>
-        </p:nvSpPr>
-        <p:spPr>
-          <a:xfrm>
-            <a:off x="4663440" y="2075688"/>
-            <a:ext cx="384048" cy="384048"/>
-          </a:xfrm>
-          <a:prstGeom prst="ellipse">
-            <a:avLst/>
-          </a:prstGeom>
-          <a:solidFill>
-            <a:srgbClr val="1FB68A"/>
-          </a:solidFill>
-          <a:ln w="12700">
-            <a:solidFill>
-              <a:srgbClr val="1FB68A"/>
-            </a:solidFill>
-            <a:prstDash val="solid"/>
-          </a:ln>
-        </p:spPr>
-      </p:sp>
-      <p:pic>
-        <p:nvPicPr>
-          <p:cNvPr id="19" name="Image 5" descr="preencoded.png">    </p:cNvPr>
-          <p:cNvPicPr>
-            <a:picLocks noChangeAspect="1"/>
-          </p:cNvPicPr>
-          <p:nvPr/>
-        </p:nvPicPr>
-        <p:blipFill>
-          <a:blip r:embed="rId6"/>
-          <a:stretch>
-            <a:fillRect/>
-          </a:stretch>
-        </p:blipFill>
-        <p:spPr>
-          <a:xfrm>
-            <a:off x="4747931" y="2160179"/>
-            <a:ext cx="215067" cy="215067"/>
-          </a:xfrm>
-          <a:prstGeom prst="rect">
-            <a:avLst/>
-          </a:prstGeom>
-        </p:spPr>
-      </p:pic>
-      <p:sp>
-        <p:nvSpPr>
-          <p:cNvPr id="20" name="Text 12"/>
-          <p:cNvSpPr txBox="1"/>
-          <p:nvPr/>
-        </p:nvSpPr>
-        <p:spPr>
-          <a:xfrm>
-            <a:off x="5166360" y="2029968"/>
-            <a:ext cx="3520440" cy="731520"/>
-          </a:xfrm>
-          <a:prstGeom prst="rect">
-            <a:avLst/>
-          </a:prstGeom>
-          <a:noFill/>
-          <a:ln/>
-        </p:spPr>
-        <p:txBody>
-          <a:bodyPr wrap="square" lIns="0" tIns="0" rIns="0" bIns="0" rtlCol="0" anchor="t"/>
-          <a:lstStyle/>
-          <a:p>
-            <a:pPr indent="0" marL="0">
-              <a:buNone/>
-            </a:pPr>
-            <a:r>
-              <a:rPr lang="en-US" sz="1400" b="1" dirty="0">
-                <a:solidFill>
-                  <a:srgbClr val="1B1F24"/>
-                </a:solidFill>
-              </a:rPr>
-              <a:t>6. </a:t>
-            </a:r>
-            <a:pPr indent="0" marL="0">
-              <a:buNone/>
-            </a:pPr>
-            <a:r>
-              <a:rPr lang="en-US" sz="1400" dirty="0">
-                <a:solidFill>
-                  <a:srgbClr val="1B1F24"/>
-                </a:solidFill>
-              </a:rPr>
-              <a:t>pnpm verify + pnpm lab 10: every line</a:t>
-            </a:r>
-            <a:endParaRPr lang="en-US" sz="1400" dirty="0"/>
-          </a:p>
-        </p:txBody>
-      </p:sp>
-      <p:sp>
-        <p:nvSpPr>
-          <p:cNvPr id="21" name="Shape 13"/>
-          <p:cNvSpPr/>
-          <p:nvPr/>
-        </p:nvSpPr>
-        <p:spPr>
-          <a:xfrm>
-            <a:off x="4663440" y="2916936"/>
-            <a:ext cx="384048" cy="384048"/>
-          </a:xfrm>
-          <a:prstGeom prst="ellipse">
-            <a:avLst/>
-          </a:prstGeom>
-          <a:solidFill>
-            <a:srgbClr val="1FB68A"/>
-          </a:solidFill>
-          <a:ln w="12700">
-            <a:solidFill>
-              <a:srgbClr val="1FB68A"/>
-            </a:solidFill>
-            <a:prstDash val="solid"/>
-          </a:ln>
-        </p:spPr>
-      </p:sp>
-      <p:pic>
-        <p:nvPicPr>
-          <p:cNvPr id="22" name="Image 6" descr="preencoded.png">    </p:cNvPr>
-          <p:cNvPicPr>
-            <a:picLocks noChangeAspect="1"/>
-          </p:cNvPicPr>
-          <p:nvPr/>
-        </p:nvPicPr>
-        <p:blipFill>
-          <a:blip r:embed="rId7"/>
-          <a:stretch>
-            <a:fillRect/>
-          </a:stretch>
-        </p:blipFill>
-        <p:spPr>
-          <a:xfrm>
-            <a:off x="4747931" y="3001427"/>
-            <a:ext cx="215067" cy="215067"/>
-          </a:xfrm>
-          <a:prstGeom prst="rect">
-            <a:avLst/>
-          </a:prstGeom>
-        </p:spPr>
-      </p:pic>
-      <p:sp>
-        <p:nvSpPr>
-          <p:cNvPr id="23" name="Text 14"/>
-          <p:cNvSpPr txBox="1"/>
-          <p:nvPr/>
-        </p:nvSpPr>
-        <p:spPr>
-          <a:xfrm>
-            <a:off x="5166360" y="2871216"/>
-            <a:ext cx="3520440" cy="731520"/>
-          </a:xfrm>
-          <a:prstGeom prst="rect">
-            <a:avLst/>
-          </a:prstGeom>
-          <a:noFill/>
-          <a:ln/>
-        </p:spPr>
-        <p:txBody>
-          <a:bodyPr wrap="square" lIns="0" tIns="0" rIns="0" bIns="0" rtlCol="0" anchor="t"/>
-          <a:lstStyle/>
-          <a:p>
-            <a:pPr indent="0" marL="0">
-              <a:buNone/>
-            </a:pPr>
-            <a:r>
-              <a:rPr lang="en-US" sz="1400" b="1" dirty="0">
-                <a:solidFill>
-                  <a:srgbClr val="1B1F24"/>
-                </a:solidFill>
-              </a:rPr>
-              <a:t>7. </a:t>
-            </a:r>
-            <a:pPr indent="0" marL="0">
-              <a:buNone/>
-            </a:pPr>
-            <a:r>
-              <a:rPr lang="en-US" sz="1400" dirty="0">
-                <a:solidFill>
-                  <a:srgbClr val="1B1F24"/>
-                </a:solidFill>
-              </a:rPr>
-              <a:t>Inspector capture with headers (secret redacted)</a:t>
-            </a:r>
-            <a:endParaRPr lang="en-US" sz="1400" dirty="0"/>
-          </a:p>
-        </p:txBody>
-      </p:sp>
-      <p:sp>
-        <p:nvSpPr>
-          <p:cNvPr id="24" name="Shape 15"/>
-          <p:cNvSpPr/>
-          <p:nvPr/>
-        </p:nvSpPr>
-        <p:spPr>
-          <a:xfrm>
-            <a:off x="4663440" y="3758184"/>
-            <a:ext cx="384048" cy="384048"/>
-          </a:xfrm>
-          <a:prstGeom prst="ellipse">
-            <a:avLst/>
-          </a:prstGeom>
-          <a:solidFill>
-            <a:srgbClr val="1FB68A"/>
-          </a:solidFill>
-          <a:ln w="12700">
-            <a:solidFill>
-              <a:srgbClr val="1FB68A"/>
-            </a:solidFill>
-            <a:prstDash val="solid"/>
-          </a:ln>
-        </p:spPr>
-      </p:sp>
-      <p:pic>
-        <p:nvPicPr>
-          <p:cNvPr id="25" name="Image 7" descr="preencoded.png">    </p:cNvPr>
-          <p:cNvPicPr>
-            <a:picLocks noChangeAspect="1"/>
-          </p:cNvPicPr>
-          <p:nvPr/>
-        </p:nvPicPr>
-        <p:blipFill>
-          <a:blip r:embed="rId8"/>
-          <a:stretch>
-            <a:fillRect/>
-          </a:stretch>
-        </p:blipFill>
-        <p:spPr>
-          <a:xfrm>
-            <a:off x="4747931" y="3842675"/>
-            <a:ext cx="215067" cy="215067"/>
-          </a:xfrm>
-          <a:prstGeom prst="rect">
-            <a:avLst/>
-          </a:prstGeom>
-        </p:spPr>
-      </p:pic>
-      <p:sp>
-        <p:nvSpPr>
-          <p:cNvPr id="26" name="Text 16"/>
-          <p:cNvSpPr txBox="1"/>
-          <p:nvPr/>
-        </p:nvSpPr>
-        <p:spPr>
-          <a:xfrm>
-            <a:off x="5166360" y="3712464"/>
-            <a:ext cx="3520440" cy="731520"/>
-          </a:xfrm>
-          <a:prstGeom prst="rect">
-            <a:avLst/>
-          </a:prstGeom>
-          <a:noFill/>
-          <a:ln/>
-        </p:spPr>
-        <p:txBody>
-          <a:bodyPr wrap="square" lIns="0" tIns="0" rIns="0" bIns="0" rtlCol="0" anchor="t"/>
-          <a:lstStyle/>
-          <a:p>
-            <a:pPr indent="0" marL="0">
-              <a:buNone/>
-            </a:pPr>
-            <a:r>
-              <a:rPr lang="en-US" sz="1400" b="1" dirty="0">
-                <a:solidFill>
-                  <a:srgbClr val="1B1F24"/>
-                </a:solidFill>
-              </a:rPr>
-              <a:t>8. </a:t>
-            </a:r>
-            <a:pPr indent="0" marL="0">
-              <a:buNone/>
-            </a:pPr>
-            <a:r>
-              <a:rPr lang="en-US" sz="1400" dirty="0">
-                <a:solidFill>
-                  <a:srgbClr val="1B1F24"/>
-                </a:solidFill>
-              </a:rPr>
-              <a:t>WORKLOG entry, with any corrections</a:t>
-            </a:r>
-            <a:endParaRPr lang="en-US" sz="1400" dirty="0"/>
+                  <a:srgbClr val="2B3440"/>
+                </a:solidFill>
+              </a:rPr>
+              <a:t>The middleware must be registered BEFORE the transport mounts (measured: after = bypassed).</a:t>
+            </a:r>
+            <a:endParaRPr lang="en-US" sz="1600" dirty="0"/>
           </a:p>
         </p:txBody>
       </p:sp>
@@ -18303,6 +18116,882 @@
 <file path=ppt/slides/slide33.xml><?xml version="1.0" encoding="utf-8"?>
 <p:sld xmlns:a="http://schemas.openxmlformats.org/drawingml/2006/main" xmlns:r="http://schemas.openxmlformats.org/officeDocument/2006/relationships" xmlns:p="http://schemas.openxmlformats.org/presentationml/2006/main">
   <p:cSld name="Slide 33">
+    <p:spTree>
+      <p:nvGrpSpPr>
+        <p:cNvPr id="1" name=""/>
+        <p:cNvGrpSpPr/>
+        <p:nvPr/>
+      </p:nvGrpSpPr>
+      <p:grpSpPr>
+        <a:xfrm>
+          <a:off x="0" y="0"/>
+          <a:ext cx="0" cy="0"/>
+          <a:chOff x="0" y="0"/>
+          <a:chExt cx="0" cy="0"/>
+        </a:xfrm>
+      </p:grpSpPr>
+      <p:sp>
+        <p:nvSpPr>
+          <p:cNvPr id="2" name="Text 0"/>
+          <p:cNvSpPr/>
+          <p:nvPr>
+            <p:ph idx="100" type="title" hasCustomPrompt="1"/>
+          </p:nvPr>
+        </p:nvSpPr>
+        <p:spPr>
+          <a:xfrm>
+            <a:off x="457200" y="274320"/>
+            <a:ext cx="8229600" cy="685800"/>
+          </a:xfrm>
+          <a:prstGeom prst="rect">
+            <a:avLst/>
+          </a:prstGeom>
+          <a:noFill/>
+          <a:ln/>
+        </p:spPr>
+        <p:txBody>
+          <a:bodyPr wrap="square" lIns="0" tIns="0" rIns="0" bIns="0" rtlCol="0" anchor="ctr"/>
+          <a:lstStyle/>
+          <a:p>
+            <a:pPr algn="l" indent="0" marL="0">
+              <a:buNone/>
+            </a:pPr>
+            <a:r>
+              <a:rPr lang="en-US" sz="3200" b="1" dirty="0">
+                <a:solidFill>
+                  <a:srgbClr val="1B1F24"/>
+                </a:solidFill>
+              </a:rPr>
+              <a:t>Capstone (homework): evidence, not claims</a:t>
+            </a:r>
+            <a:endParaRPr lang="en-US" sz="3200" dirty="0"/>
+          </a:p>
+        </p:txBody>
+      </p:sp>
+      <p:sp>
+        <p:nvSpPr>
+          <p:cNvPr id="3" name="Shape 1"/>
+          <p:cNvSpPr/>
+          <p:nvPr/>
+        </p:nvSpPr>
+        <p:spPr>
+          <a:xfrm>
+            <a:off x="457200" y="1234440"/>
+            <a:ext cx="384048" cy="384048"/>
+          </a:xfrm>
+          <a:prstGeom prst="ellipse">
+            <a:avLst/>
+          </a:prstGeom>
+          <a:solidFill>
+            <a:srgbClr val="1FB68A"/>
+          </a:solidFill>
+          <a:ln w="12700">
+            <a:solidFill>
+              <a:srgbClr val="1FB68A"/>
+            </a:solidFill>
+            <a:prstDash val="solid"/>
+          </a:ln>
+        </p:spPr>
+      </p:sp>
+      <p:pic>
+        <p:nvPicPr>
+          <p:cNvPr id="4" name="Image 0" descr="preencoded.png">    </p:cNvPr>
+          <p:cNvPicPr>
+            <a:picLocks noChangeAspect="1"/>
+          </p:cNvPicPr>
+          <p:nvPr/>
+        </p:nvPicPr>
+        <p:blipFill>
+          <a:blip r:embed="rId1"/>
+          <a:stretch>
+            <a:fillRect/>
+          </a:stretch>
+        </p:blipFill>
+        <p:spPr>
+          <a:xfrm>
+            <a:off x="541691" y="1318931"/>
+            <a:ext cx="215067" cy="215067"/>
+          </a:xfrm>
+          <a:prstGeom prst="rect">
+            <a:avLst/>
+          </a:prstGeom>
+        </p:spPr>
+      </p:pic>
+      <p:sp>
+        <p:nvSpPr>
+          <p:cNvPr id="5" name="Text 2"/>
+          <p:cNvSpPr txBox="1"/>
+          <p:nvPr/>
+        </p:nvSpPr>
+        <p:spPr>
+          <a:xfrm>
+            <a:off x="960120" y="1188720"/>
+            <a:ext cx="3520440" cy="731520"/>
+          </a:xfrm>
+          <a:prstGeom prst="rect">
+            <a:avLst/>
+          </a:prstGeom>
+          <a:noFill/>
+          <a:ln/>
+        </p:spPr>
+        <p:txBody>
+          <a:bodyPr wrap="square" lIns="0" tIns="0" rIns="0" bIns="0" rtlCol="0" anchor="t"/>
+          <a:lstStyle/>
+          <a:p>
+            <a:pPr indent="0" marL="0">
+              <a:buNone/>
+            </a:pPr>
+            <a:r>
+              <a:rPr lang="en-US" sz="1400" b="1" dirty="0">
+                <a:solidFill>
+                  <a:srgbClr val="1B1F24"/>
+                </a:solidFill>
+              </a:rPr>
+              <a:t>1. </a:t>
+            </a:r>
+            <a:pPr indent="0" marL="0">
+              <a:buNone/>
+            </a:pPr>
+            <a:r>
+              <a:rPr lang="en-US" sz="1400" dirty="0">
+                <a:solidFill>
+                  <a:srgbClr val="1B1F24"/>
+                </a:solidFill>
+              </a:rPr>
+              <a:t>spec diff + every open question you raised</a:t>
+            </a:r>
+            <a:endParaRPr lang="en-US" sz="1400" dirty="0"/>
+          </a:p>
+        </p:txBody>
+      </p:sp>
+      <p:sp>
+        <p:nvSpPr>
+          <p:cNvPr id="6" name="Shape 3"/>
+          <p:cNvSpPr/>
+          <p:nvPr/>
+        </p:nvSpPr>
+        <p:spPr>
+          <a:xfrm>
+            <a:off x="457200" y="2075688"/>
+            <a:ext cx="384048" cy="384048"/>
+          </a:xfrm>
+          <a:prstGeom prst="ellipse">
+            <a:avLst/>
+          </a:prstGeom>
+          <a:solidFill>
+            <a:srgbClr val="1FB68A"/>
+          </a:solidFill>
+          <a:ln w="12700">
+            <a:solidFill>
+              <a:srgbClr val="1FB68A"/>
+            </a:solidFill>
+            <a:prstDash val="solid"/>
+          </a:ln>
+        </p:spPr>
+      </p:sp>
+      <p:pic>
+        <p:nvPicPr>
+          <p:cNvPr id="7" name="Image 1" descr="preencoded.png">    </p:cNvPr>
+          <p:cNvPicPr>
+            <a:picLocks noChangeAspect="1"/>
+          </p:cNvPicPr>
+          <p:nvPr/>
+        </p:nvPicPr>
+        <p:blipFill>
+          <a:blip r:embed="rId2"/>
+          <a:stretch>
+            <a:fillRect/>
+          </a:stretch>
+        </p:blipFill>
+        <p:spPr>
+          <a:xfrm>
+            <a:off x="541691" y="2160179"/>
+            <a:ext cx="215067" cy="215067"/>
+          </a:xfrm>
+          <a:prstGeom prst="rect">
+            <a:avLst/>
+          </a:prstGeom>
+        </p:spPr>
+      </p:pic>
+      <p:sp>
+        <p:nvSpPr>
+          <p:cNvPr id="8" name="Text 4"/>
+          <p:cNvSpPr txBox="1"/>
+          <p:nvPr/>
+        </p:nvSpPr>
+        <p:spPr>
+          <a:xfrm>
+            <a:off x="960120" y="2029968"/>
+            <a:ext cx="3520440" cy="731520"/>
+          </a:xfrm>
+          <a:prstGeom prst="rect">
+            <a:avLst/>
+          </a:prstGeom>
+          <a:noFill/>
+          <a:ln/>
+        </p:spPr>
+        <p:txBody>
+          <a:bodyPr wrap="square" lIns="0" tIns="0" rIns="0" bIns="0" rtlCol="0" anchor="t"/>
+          <a:lstStyle/>
+          <a:p>
+            <a:pPr indent="0" marL="0">
+              <a:buNone/>
+            </a:pPr>
+            <a:r>
+              <a:rPr lang="en-US" sz="1400" b="1" dirty="0">
+                <a:solidFill>
+                  <a:srgbClr val="1B1F24"/>
+                </a:solidFill>
+              </a:rPr>
+              <a:t>2. </a:t>
+            </a:r>
+            <a:pPr indent="0" marL="0">
+              <a:buNone/>
+            </a:pPr>
+            <a:r>
+              <a:rPr lang="en-US" sz="1400" dirty="0">
+                <a:solidFill>
+                  <a:srgbClr val="1B1F24"/>
+                </a:solidFill>
+              </a:rPr>
+              <a:t>plan with a verify line per task</a:t>
+            </a:r>
+            <a:endParaRPr lang="en-US" sz="1400" dirty="0"/>
+          </a:p>
+        </p:txBody>
+      </p:sp>
+      <p:sp>
+        <p:nvSpPr>
+          <p:cNvPr id="9" name="Shape 5"/>
+          <p:cNvSpPr/>
+          <p:nvPr/>
+        </p:nvSpPr>
+        <p:spPr>
+          <a:xfrm>
+            <a:off x="457200" y="2916936"/>
+            <a:ext cx="384048" cy="384048"/>
+          </a:xfrm>
+          <a:prstGeom prst="ellipse">
+            <a:avLst/>
+          </a:prstGeom>
+          <a:solidFill>
+            <a:srgbClr val="1FB68A"/>
+          </a:solidFill>
+          <a:ln w="12700">
+            <a:solidFill>
+              <a:srgbClr val="1FB68A"/>
+            </a:solidFill>
+            <a:prstDash val="solid"/>
+          </a:ln>
+        </p:spPr>
+      </p:sp>
+      <p:pic>
+        <p:nvPicPr>
+          <p:cNvPr id="10" name="Image 2" descr="preencoded.png">    </p:cNvPr>
+          <p:cNvPicPr>
+            <a:picLocks noChangeAspect="1"/>
+          </p:cNvPicPr>
+          <p:nvPr/>
+        </p:nvPicPr>
+        <p:blipFill>
+          <a:blip r:embed="rId3"/>
+          <a:stretch>
+            <a:fillRect/>
+          </a:stretch>
+        </p:blipFill>
+        <p:spPr>
+          <a:xfrm>
+            <a:off x="541691" y="3001427"/>
+            <a:ext cx="215067" cy="215067"/>
+          </a:xfrm>
+          <a:prstGeom prst="rect">
+            <a:avLst/>
+          </a:prstGeom>
+        </p:spPr>
+      </p:pic>
+      <p:sp>
+        <p:nvSpPr>
+          <p:cNvPr id="11" name="Text 6"/>
+          <p:cNvSpPr txBox="1"/>
+          <p:nvPr/>
+        </p:nvSpPr>
+        <p:spPr>
+          <a:xfrm>
+            <a:off x="960120" y="2871216"/>
+            <a:ext cx="3520440" cy="731520"/>
+          </a:xfrm>
+          <a:prstGeom prst="rect">
+            <a:avLst/>
+          </a:prstGeom>
+          <a:noFill/>
+          <a:ln/>
+        </p:spPr>
+        <p:txBody>
+          <a:bodyPr wrap="square" lIns="0" tIns="0" rIns="0" bIns="0" rtlCol="0" anchor="t"/>
+          <a:lstStyle/>
+          <a:p>
+            <a:pPr indent="0" marL="0">
+              <a:buNone/>
+            </a:pPr>
+            <a:r>
+              <a:rPr lang="en-US" sz="1400" b="1" dirty="0">
+                <a:solidFill>
+                  <a:srgbClr val="1B1F24"/>
+                </a:solidFill>
+              </a:rPr>
+              <a:t>3. </a:t>
+            </a:r>
+            <a:pPr indent="0" marL="0">
+              <a:buNone/>
+            </a:pPr>
+            <a:r>
+              <a:rPr lang="en-US" sz="1400" dirty="0">
+                <a:solidFill>
+                  <a:srgbClr val="1B1F24"/>
+                </a:solidFill>
+              </a:rPr>
+              <a:t>the migration and your edits, or why none</a:t>
+            </a:r>
+            <a:endParaRPr lang="en-US" sz="1400" dirty="0"/>
+          </a:p>
+        </p:txBody>
+      </p:sp>
+      <p:sp>
+        <p:nvSpPr>
+          <p:cNvPr id="12" name="Shape 7"/>
+          <p:cNvSpPr/>
+          <p:nvPr/>
+        </p:nvSpPr>
+        <p:spPr>
+          <a:xfrm>
+            <a:off x="457200" y="3758184"/>
+            <a:ext cx="384048" cy="384048"/>
+          </a:xfrm>
+          <a:prstGeom prst="ellipse">
+            <a:avLst/>
+          </a:prstGeom>
+          <a:solidFill>
+            <a:srgbClr val="1FB68A"/>
+          </a:solidFill>
+          <a:ln w="12700">
+            <a:solidFill>
+              <a:srgbClr val="1FB68A"/>
+            </a:solidFill>
+            <a:prstDash val="solid"/>
+          </a:ln>
+        </p:spPr>
+      </p:sp>
+      <p:pic>
+        <p:nvPicPr>
+          <p:cNvPr id="13" name="Image 3" descr="preencoded.png">    </p:cNvPr>
+          <p:cNvPicPr>
+            <a:picLocks noChangeAspect="1"/>
+          </p:cNvPicPr>
+          <p:nvPr/>
+        </p:nvPicPr>
+        <p:blipFill>
+          <a:blip r:embed="rId4"/>
+          <a:stretch>
+            <a:fillRect/>
+          </a:stretch>
+        </p:blipFill>
+        <p:spPr>
+          <a:xfrm>
+            <a:off x="541691" y="3842675"/>
+            <a:ext cx="215067" cy="215067"/>
+          </a:xfrm>
+          <a:prstGeom prst="rect">
+            <a:avLst/>
+          </a:prstGeom>
+        </p:spPr>
+      </p:pic>
+      <p:sp>
+        <p:nvSpPr>
+          <p:cNvPr id="14" name="Text 8"/>
+          <p:cNvSpPr txBox="1"/>
+          <p:nvPr/>
+        </p:nvSpPr>
+        <p:spPr>
+          <a:xfrm>
+            <a:off x="960120" y="3712464"/>
+            <a:ext cx="3520440" cy="731520"/>
+          </a:xfrm>
+          <a:prstGeom prst="rect">
+            <a:avLst/>
+          </a:prstGeom>
+          <a:noFill/>
+          <a:ln/>
+        </p:spPr>
+        <p:txBody>
+          <a:bodyPr wrap="square" lIns="0" tIns="0" rIns="0" bIns="0" rtlCol="0" anchor="t"/>
+          <a:lstStyle/>
+          <a:p>
+            <a:pPr indent="0" marL="0">
+              <a:buNone/>
+            </a:pPr>
+            <a:r>
+              <a:rPr lang="en-US" sz="1400" b="1" dirty="0">
+                <a:solidFill>
+                  <a:srgbClr val="1B1F24"/>
+                </a:solidFill>
+              </a:rPr>
+              <a:t>4. </a:t>
+            </a:r>
+            <a:pPr indent="0" marL="0">
+              <a:buNone/>
+            </a:pPr>
+            <a:r>
+              <a:rPr lang="en-US" sz="1400" dirty="0">
+                <a:solidFill>
+                  <a:srgbClr val="1B1F24"/>
+                </a:solidFill>
+              </a:rPr>
+              <a:t>unit + e2e counts; owner-check mutation result</a:t>
+            </a:r>
+            <a:endParaRPr lang="en-US" sz="1400" dirty="0"/>
+          </a:p>
+        </p:txBody>
+      </p:sp>
+      <p:sp>
+        <p:nvSpPr>
+          <p:cNvPr id="15" name="Shape 9"/>
+          <p:cNvSpPr/>
+          <p:nvPr/>
+        </p:nvSpPr>
+        <p:spPr>
+          <a:xfrm>
+            <a:off x="4663440" y="1234440"/>
+            <a:ext cx="384048" cy="384048"/>
+          </a:xfrm>
+          <a:prstGeom prst="ellipse">
+            <a:avLst/>
+          </a:prstGeom>
+          <a:solidFill>
+            <a:srgbClr val="1FB68A"/>
+          </a:solidFill>
+          <a:ln w="12700">
+            <a:solidFill>
+              <a:srgbClr val="1FB68A"/>
+            </a:solidFill>
+            <a:prstDash val="solid"/>
+          </a:ln>
+        </p:spPr>
+      </p:sp>
+      <p:pic>
+        <p:nvPicPr>
+          <p:cNvPr id="16" name="Image 4" descr="preencoded.png">    </p:cNvPr>
+          <p:cNvPicPr>
+            <a:picLocks noChangeAspect="1"/>
+          </p:cNvPicPr>
+          <p:nvPr/>
+        </p:nvPicPr>
+        <p:blipFill>
+          <a:blip r:embed="rId5"/>
+          <a:stretch>
+            <a:fillRect/>
+          </a:stretch>
+        </p:blipFill>
+        <p:spPr>
+          <a:xfrm>
+            <a:off x="4747931" y="1318931"/>
+            <a:ext cx="215067" cy="215067"/>
+          </a:xfrm>
+          <a:prstGeom prst="rect">
+            <a:avLst/>
+          </a:prstGeom>
+        </p:spPr>
+      </p:pic>
+      <p:sp>
+        <p:nvSpPr>
+          <p:cNvPr id="17" name="Text 10"/>
+          <p:cNvSpPr txBox="1"/>
+          <p:nvPr/>
+        </p:nvSpPr>
+        <p:spPr>
+          <a:xfrm>
+            <a:off x="5166360" y="1188720"/>
+            <a:ext cx="3520440" cy="731520"/>
+          </a:xfrm>
+          <a:prstGeom prst="rect">
+            <a:avLst/>
+          </a:prstGeom>
+          <a:noFill/>
+          <a:ln/>
+        </p:spPr>
+        <p:txBody>
+          <a:bodyPr wrap="square" lIns="0" tIns="0" rIns="0" bIns="0" rtlCol="0" anchor="t"/>
+          <a:lstStyle/>
+          <a:p>
+            <a:pPr indent="0" marL="0">
+              <a:buNone/>
+            </a:pPr>
+            <a:r>
+              <a:rPr lang="en-US" sz="1400" b="1" dirty="0">
+                <a:solidFill>
+                  <a:srgbClr val="1B1F24"/>
+                </a:solidFill>
+              </a:rPr>
+              <a:t>5. </a:t>
+            </a:r>
+            <a:pPr indent="0" marL="0">
+              <a:buNone/>
+            </a:pPr>
+            <a:r>
+              <a:rPr lang="en-US" sz="1400" dirty="0">
+                <a:solidFill>
+                  <a:srgbClr val="1B1F24"/>
+                </a:solidFill>
+              </a:rPr>
+              <a:t>my-notes e2e: two devices of two users</a:t>
+            </a:r>
+            <a:endParaRPr lang="en-US" sz="1400" dirty="0"/>
+          </a:p>
+        </p:txBody>
+      </p:sp>
+      <p:sp>
+        <p:nvSpPr>
+          <p:cNvPr id="18" name="Shape 11"/>
+          <p:cNvSpPr/>
+          <p:nvPr/>
+        </p:nvSpPr>
+        <p:spPr>
+          <a:xfrm>
+            <a:off x="4663440" y="2075688"/>
+            <a:ext cx="384048" cy="384048"/>
+          </a:xfrm>
+          <a:prstGeom prst="ellipse">
+            <a:avLst/>
+          </a:prstGeom>
+          <a:solidFill>
+            <a:srgbClr val="1FB68A"/>
+          </a:solidFill>
+          <a:ln w="12700">
+            <a:solidFill>
+              <a:srgbClr val="1FB68A"/>
+            </a:solidFill>
+            <a:prstDash val="solid"/>
+          </a:ln>
+        </p:spPr>
+      </p:sp>
+      <p:pic>
+        <p:nvPicPr>
+          <p:cNvPr id="19" name="Image 5" descr="preencoded.png">    </p:cNvPr>
+          <p:cNvPicPr>
+            <a:picLocks noChangeAspect="1"/>
+          </p:cNvPicPr>
+          <p:nvPr/>
+        </p:nvPicPr>
+        <p:blipFill>
+          <a:blip r:embed="rId6"/>
+          <a:stretch>
+            <a:fillRect/>
+          </a:stretch>
+        </p:blipFill>
+        <p:spPr>
+          <a:xfrm>
+            <a:off x="4747931" y="2160179"/>
+            <a:ext cx="215067" cy="215067"/>
+          </a:xfrm>
+          <a:prstGeom prst="rect">
+            <a:avLst/>
+          </a:prstGeom>
+        </p:spPr>
+      </p:pic>
+      <p:sp>
+        <p:nvSpPr>
+          <p:cNvPr id="20" name="Text 12"/>
+          <p:cNvSpPr txBox="1"/>
+          <p:nvPr/>
+        </p:nvSpPr>
+        <p:spPr>
+          <a:xfrm>
+            <a:off x="5166360" y="2029968"/>
+            <a:ext cx="3520440" cy="731520"/>
+          </a:xfrm>
+          <a:prstGeom prst="rect">
+            <a:avLst/>
+          </a:prstGeom>
+          <a:noFill/>
+          <a:ln/>
+        </p:spPr>
+        <p:txBody>
+          <a:bodyPr wrap="square" lIns="0" tIns="0" rIns="0" bIns="0" rtlCol="0" anchor="t"/>
+          <a:lstStyle/>
+          <a:p>
+            <a:pPr indent="0" marL="0">
+              <a:buNone/>
+            </a:pPr>
+            <a:r>
+              <a:rPr lang="en-US" sz="1400" b="1" dirty="0">
+                <a:solidFill>
+                  <a:srgbClr val="1B1F24"/>
+                </a:solidFill>
+              </a:rPr>
+              <a:t>6. </a:t>
+            </a:r>
+            <a:pPr indent="0" marL="0">
+              <a:buNone/>
+            </a:pPr>
+            <a:r>
+              <a:rPr lang="en-US" sz="1400" dirty="0">
+                <a:solidFill>
+                  <a:srgbClr val="1B1F24"/>
+                </a:solidFill>
+              </a:rPr>
+              <a:t>pnpm verify + pnpm lab 10: every line</a:t>
+            </a:r>
+            <a:endParaRPr lang="en-US" sz="1400" dirty="0"/>
+          </a:p>
+        </p:txBody>
+      </p:sp>
+      <p:sp>
+        <p:nvSpPr>
+          <p:cNvPr id="21" name="Shape 13"/>
+          <p:cNvSpPr/>
+          <p:nvPr/>
+        </p:nvSpPr>
+        <p:spPr>
+          <a:xfrm>
+            <a:off x="4663440" y="2916936"/>
+            <a:ext cx="384048" cy="384048"/>
+          </a:xfrm>
+          <a:prstGeom prst="ellipse">
+            <a:avLst/>
+          </a:prstGeom>
+          <a:solidFill>
+            <a:srgbClr val="1FB68A"/>
+          </a:solidFill>
+          <a:ln w="12700">
+            <a:solidFill>
+              <a:srgbClr val="1FB68A"/>
+            </a:solidFill>
+            <a:prstDash val="solid"/>
+          </a:ln>
+        </p:spPr>
+      </p:sp>
+      <p:pic>
+        <p:nvPicPr>
+          <p:cNvPr id="22" name="Image 6" descr="preencoded.png">    </p:cNvPr>
+          <p:cNvPicPr>
+            <a:picLocks noChangeAspect="1"/>
+          </p:cNvPicPr>
+          <p:nvPr/>
+        </p:nvPicPr>
+        <p:blipFill>
+          <a:blip r:embed="rId7"/>
+          <a:stretch>
+            <a:fillRect/>
+          </a:stretch>
+        </p:blipFill>
+        <p:spPr>
+          <a:xfrm>
+            <a:off x="4747931" y="3001427"/>
+            <a:ext cx="215067" cy="215067"/>
+          </a:xfrm>
+          <a:prstGeom prst="rect">
+            <a:avLst/>
+          </a:prstGeom>
+        </p:spPr>
+      </p:pic>
+      <p:sp>
+        <p:nvSpPr>
+          <p:cNvPr id="23" name="Text 14"/>
+          <p:cNvSpPr txBox="1"/>
+          <p:nvPr/>
+        </p:nvSpPr>
+        <p:spPr>
+          <a:xfrm>
+            <a:off x="5166360" y="2871216"/>
+            <a:ext cx="3520440" cy="731520"/>
+          </a:xfrm>
+          <a:prstGeom prst="rect">
+            <a:avLst/>
+          </a:prstGeom>
+          <a:noFill/>
+          <a:ln/>
+        </p:spPr>
+        <p:txBody>
+          <a:bodyPr wrap="square" lIns="0" tIns="0" rIns="0" bIns="0" rtlCol="0" anchor="t"/>
+          <a:lstStyle/>
+          <a:p>
+            <a:pPr indent="0" marL="0">
+              <a:buNone/>
+            </a:pPr>
+            <a:r>
+              <a:rPr lang="en-US" sz="1400" b="1" dirty="0">
+                <a:solidFill>
+                  <a:srgbClr val="1B1F24"/>
+                </a:solidFill>
+              </a:rPr>
+              <a:t>7. </a:t>
+            </a:r>
+            <a:pPr indent="0" marL="0">
+              <a:buNone/>
+            </a:pPr>
+            <a:r>
+              <a:rPr lang="en-US" sz="1400" dirty="0">
+                <a:solidFill>
+                  <a:srgbClr val="1B1F24"/>
+                </a:solidFill>
+              </a:rPr>
+              <a:t>Inspector capture with headers (secret redacted)</a:t>
+            </a:r>
+            <a:endParaRPr lang="en-US" sz="1400" dirty="0"/>
+          </a:p>
+        </p:txBody>
+      </p:sp>
+      <p:sp>
+        <p:nvSpPr>
+          <p:cNvPr id="24" name="Shape 15"/>
+          <p:cNvSpPr/>
+          <p:nvPr/>
+        </p:nvSpPr>
+        <p:spPr>
+          <a:xfrm>
+            <a:off x="4663440" y="3758184"/>
+            <a:ext cx="384048" cy="384048"/>
+          </a:xfrm>
+          <a:prstGeom prst="ellipse">
+            <a:avLst/>
+          </a:prstGeom>
+          <a:solidFill>
+            <a:srgbClr val="1FB68A"/>
+          </a:solidFill>
+          <a:ln w="12700">
+            <a:solidFill>
+              <a:srgbClr val="1FB68A"/>
+            </a:solidFill>
+            <a:prstDash val="solid"/>
+          </a:ln>
+        </p:spPr>
+      </p:sp>
+      <p:pic>
+        <p:nvPicPr>
+          <p:cNvPr id="25" name="Image 7" descr="preencoded.png">    </p:cNvPr>
+          <p:cNvPicPr>
+            <a:picLocks noChangeAspect="1"/>
+          </p:cNvPicPr>
+          <p:nvPr/>
+        </p:nvPicPr>
+        <p:blipFill>
+          <a:blip r:embed="rId8"/>
+          <a:stretch>
+            <a:fillRect/>
+          </a:stretch>
+        </p:blipFill>
+        <p:spPr>
+          <a:xfrm>
+            <a:off x="4747931" y="3842675"/>
+            <a:ext cx="215067" cy="215067"/>
+          </a:xfrm>
+          <a:prstGeom prst="rect">
+            <a:avLst/>
+          </a:prstGeom>
+        </p:spPr>
+      </p:pic>
+      <p:sp>
+        <p:nvSpPr>
+          <p:cNvPr id="26" name="Text 16"/>
+          <p:cNvSpPr txBox="1"/>
+          <p:nvPr/>
+        </p:nvSpPr>
+        <p:spPr>
+          <a:xfrm>
+            <a:off x="5166360" y="3712464"/>
+            <a:ext cx="3520440" cy="731520"/>
+          </a:xfrm>
+          <a:prstGeom prst="rect">
+            <a:avLst/>
+          </a:prstGeom>
+          <a:noFill/>
+          <a:ln/>
+        </p:spPr>
+        <p:txBody>
+          <a:bodyPr wrap="square" lIns="0" tIns="0" rIns="0" bIns="0" rtlCol="0" anchor="t"/>
+          <a:lstStyle/>
+          <a:p>
+            <a:pPr indent="0" marL="0">
+              <a:buNone/>
+            </a:pPr>
+            <a:r>
+              <a:rPr lang="en-US" sz="1400" b="1" dirty="0">
+                <a:solidFill>
+                  <a:srgbClr val="1B1F24"/>
+                </a:solidFill>
+              </a:rPr>
+              <a:t>8. </a:t>
+            </a:r>
+            <a:pPr indent="0" marL="0">
+              <a:buNone/>
+            </a:pPr>
+            <a:r>
+              <a:rPr lang="en-US" sz="1400" dirty="0">
+                <a:solidFill>
+                  <a:srgbClr val="1B1F24"/>
+                </a:solidFill>
+              </a:rPr>
+              <a:t>WORKLOG entry, with any corrections</a:t>
+            </a:r>
+            <a:endParaRPr lang="en-US" sz="1400" dirty="0"/>
+          </a:p>
+        </p:txBody>
+      </p:sp>
+      <p:sp>
+        <p:nvSpPr>
+          <p:cNvPr id="25" name="Slide Number Placeholder 0"/>
+          <p:cNvSpPr>
+            <a:spLocks noGrp="1"/>
+          </p:cNvSpPr>
+          <p:nvPr>
+            <p:ph type="sldNum" sz="quarter" idx="4294967295"/>
+          </p:nvPr>
+        </p:nvSpPr>
+        <p:spPr>
+          <a:xfrm>
+            <a:off x="8229600" y="4754880"/>
+            <a:ext cx="457200" cy="274320"/>
+          </a:xfrm>
+          <a:prstGeom prst="rect">
+            <a:avLst/>
+          </a:prstGeom>
+          <a:extLst>
+            <a:ext uri="{C572A759-6A51-4108-AA02-DFA0A04FC94B}">
+              <ma14:wrappingTextBoxFlag xmlns:ma14="http://schemas.microsoft.com/office/mac/drawingml/2011/main" val="0"/>
+            </a:ext>
+          </a:extLst>
+        </p:spPr>
+        <p:txBody>
+          <a:bodyPr/>
+          <a:lstStyle>
+            <a:lvl1pPr>
+              <a:defRPr sz="1000">
+                <a:solidFill>
+                  <a:srgbClr val="64748B"/>
+                </a:solidFill>
+              </a:defRPr>
+            </a:lvl1pPr>
+          </a:lstStyle>
+          <a:p>
+            <a:pPr algn="r"/>
+            <a:fld id="{F7021451-1387-4CA6-816F-3879F97B5CBC}" type="slidenum">
+              <a:rPr b="0" lang="en-US"/>
+              <a:t>33</a:t>
+            </a:fld>
+            <a:endParaRPr lang="en-US"/>
+          </a:p>
+        </p:txBody>
+      </p:sp>
+    </p:spTree>
+  </p:cSld>
+  <p:clrMapOvr>
+    <a:masterClrMapping/>
+  </p:clrMapOvr>
+</p:sld>
+</file>
+
+<file path=ppt/slides/slide34.xml><?xml version="1.0" encoding="utf-8"?>
+<p:sld xmlns:a="http://schemas.openxmlformats.org/drawingml/2006/main" xmlns:r="http://schemas.openxmlformats.org/officeDocument/2006/relationships" xmlns:p="http://schemas.openxmlformats.org/presentationml/2006/main">
+  <p:cSld name="Slide 34">
     <p:spTree>
       <p:nvGrpSpPr>
         <p:cNvPr id="1" name=""/>

--- a/docs/ai-agent-training/slides/lab-companion-lite.pptx
+++ b/docs/ai-agent-training/slides/lab-companion-lite.pptx
@@ -1679,7 +1679,7 @@
           <a:p>
             <a:r>
               <a:rPr lang="en-US" dirty="0"/>
-              <a:t>Then: dev pnpm verify. The stdio e2e test pins the EXACT tool list, so it fails until they update it deliberately. That is the lesson.</a:t>
+              <a:t>Then: pnpm verify. The stdio e2e test pins the EXACT tool list, so it fails until they update it deliberately. That is the lesson.</a:t>
             </a:r>
             <a:endParaRPr lang="en-US" dirty="0"/>
           </a:p>
@@ -2031,7 +2031,7 @@
           <a:p>
             <a:r>
               <a:rPr lang="en-US" dirty="0"/>
-              <a:t>The Inspector runs in its own container and is published on loopback only (127.0.0.1:6274). Its URL carries an API token: a credential. The three example servers in its list can be ignored. Secret values: the helper prints them; never paste them anywhere but the header field.</a:t>
+              <a:t>The Inspector listens on loopback only (127.0.0.1:6274). Its URL carries an API token: a credential. The three example servers in its list can be ignored. Secret values: the helper prints them; never paste them anywhere but the header field.</a:t>
             </a:r>
             <a:endParaRPr lang="en-US" dirty="0"/>
           </a:p>
@@ -2471,7 +2471,7 @@
           <a:p>
             <a:r>
               <a:rPr lang="en-US" dirty="0"/>
-              <a:t>PowerShell has no alias for multi-word commands: function dev { docker compose run --rm dev @args }. Not tested here; Linux, macOS and WSL shells were the target.</a:t>
+              <a:t>Linux, macOS and WSL shells were the target. The `eval "$(…)"` lab helper needs a POSIX shell; on PowerShell, copy the printed values by hand. Not tested on PowerShell.</a:t>
             </a:r>
             <a:endParaRPr lang="en-US" dirty="0"/>
           </a:p>
@@ -3263,7 +3263,7 @@
           <a:p>
             <a:r>
               <a:rPr lang="en-US" dirty="0"/>
-              <a:t>Covers full-track chapters 00 + 01. Cut for time: the stack-persistence and clean-wipe demos (chapter 00).</a:t>
+              <a:t>Covers full-track chapters 00 + 01. Cut for time: the persistence and clean-wipe demos (chapter 00).</a:t>
             </a:r>
             <a:endParaRPr lang="en-US" dirty="0"/>
           </a:p>
@@ -3351,7 +3351,7 @@
           <a:p>
             <a:r>
               <a:rPr lang="en-US" dirty="0"/>
-              <a:t>The first image build takes a few minutes: use it to walk through docker-compose.yml and specs/notes.md. Learners give their agent the spec and the skill name (nest-resource-scaffold), not ad-hoc instructions.</a:t>
+              <a:t>While pnpm install runs, walk through specs/notes.md. Learners give their agent the spec and the skill name (nest-resource-scaffold), not ad-hoc instructions.</a:t>
             </a:r>
             <a:endParaRPr lang="en-US" dirty="0"/>
           </a:p>
@@ -4415,7 +4415,7 @@
                   <a:srgbClr val="1FB68A"/>
                 </a:solidFill>
               </a:rPr>
-              <a:t>Lab companion, LITE track · six modules · NestJS 12 · drizzle · Passport · MCP · Docker</a:t>
+              <a:t>Lab companion, LITE track · six modules · NestJS 12 · drizzle · SQLite · Passport · MCP</a:t>
             </a:r>
             <a:endParaRPr lang="en-US" sz="1800" dirty="0"/>
           </a:p>
@@ -4556,7 +4556,7 @@
                 <a:ea typeface="Courier New" pitchFamily="34" charset="-122"/>
                 <a:cs typeface="Courier New" pitchFamily="34" charset="-120"/>
               </a:rPr>
-              <a:t>$ docker compose run --rm dev pnpm verify</a:t>
+              <a:t>$ pnpm verify</a:t>
             </a:r>
             <a:endParaRPr lang="en-US" sz="1200" dirty="0"/>
           </a:p>
@@ -4731,7 +4731,7 @@
                   <a:srgbClr val="1B1F24"/>
                 </a:solidFill>
               </a:rPr>
-              <a:t>A port is already in use</a:t>
+              <a:t>pnpm: command not found</a:t>
             </a:r>
             <a:endParaRPr lang="en-US" sz="1600" dirty="0"/>
           </a:p>
@@ -4745,7 +4745,7 @@
                   <a:srgbClr val="2B3440"/>
                 </a:solidFill>
               </a:rPr>
-              <a:t>Something local owns 5432, 6379 or 3000. Stop it, or change the LEFT side of that </a:t>
+              <a:t>Run </a:t>
             </a:r>
             <a:pPr indent="0" marL="0">
               <a:buNone/>
@@ -4759,7 +4759,7 @@
                 <a:ea typeface="Courier New" pitchFamily="34" charset="-122"/>
                 <a:cs typeface="Courier New" pitchFamily="34" charset="-120"/>
               </a:rPr>
-              <a:t>ports:</a:t>
+              <a:t>corepack enable</a:t>
             </a:r>
             <a:pPr indent="0" marL="0">
               <a:buNone/>
@@ -4770,7 +4770,57 @@
                   <a:srgbClr val="2B3440"/>
                 </a:solidFill>
               </a:rPr>
-              <a:t> entry.</a:t>
+              <a:t>, or write </a:t>
+            </a:r>
+            <a:pPr indent="0" marL="0">
+              <a:buNone/>
+            </a:pPr>
+            <a:r>
+              <a:rPr lang="en-US" sz="1400" dirty="0">
+                <a:solidFill>
+                  <a:srgbClr val="2B3440"/>
+                </a:solidFill>
+                <a:latin typeface="Courier New" pitchFamily="34" charset="0"/>
+                <a:ea typeface="Courier New" pitchFamily="34" charset="-122"/>
+                <a:cs typeface="Courier New" pitchFamily="34" charset="-120"/>
+              </a:rPr>
+              <a:t>corepack pnpm</a:t>
+            </a:r>
+            <a:pPr indent="0" marL="0">
+              <a:buNone/>
+            </a:pPr>
+            <a:r>
+              <a:rPr lang="en-US" sz="1400" dirty="0">
+                <a:solidFill>
+                  <a:srgbClr val="2B3440"/>
+                </a:solidFill>
+              </a:rPr>
+              <a:t> instead of </a:t>
+            </a:r>
+            <a:pPr indent="0" marL="0">
+              <a:buNone/>
+            </a:pPr>
+            <a:r>
+              <a:rPr lang="en-US" sz="1400" dirty="0">
+                <a:solidFill>
+                  <a:srgbClr val="2B3440"/>
+                </a:solidFill>
+                <a:latin typeface="Courier New" pitchFamily="34" charset="0"/>
+                <a:ea typeface="Courier New" pitchFamily="34" charset="-122"/>
+                <a:cs typeface="Courier New" pitchFamily="34" charset="-120"/>
+              </a:rPr>
+              <a:t>pnpm</a:t>
+            </a:r>
+            <a:pPr indent="0" marL="0">
+              <a:buNone/>
+            </a:pPr>
+            <a:r>
+              <a:rPr lang="en-US" sz="1400" dirty="0">
+                <a:solidFill>
+                  <a:srgbClr val="2B3440"/>
+                </a:solidFill>
+              </a:rPr>
+              <a:t>.</a:t>
             </a:r>
             <a:endParaRPr lang="en-US" sz="1600" dirty="0"/>
           </a:p>
@@ -5704,7 +5754,7 @@
                 <a:ea typeface="Courier New" pitchFamily="34" charset="-122"/>
                 <a:cs typeface="Courier New" pitchFamily="34" charset="-120"/>
               </a:rPr>
-              <a:t>dev pnpm check:migrations   # FAILS: drift</a:t>
+              <a:t>pnpm check:migrations   # FAILS: drift</a:t>
             </a:r>
             <a:endParaRPr lang="en-US" sz="1400" dirty="0"/>
           </a:p>
@@ -5721,7 +5771,7 @@
                 <a:ea typeface="Courier New" pitchFamily="34" charset="-122"/>
                 <a:cs typeface="Courier New" pitchFamily="34" charset="-120"/>
               </a:rPr>
-              <a:t>dev pnpm db:generate        # READ the SQL</a:t>
+              <a:t>pnpm db:generate        # READ the SQL</a:t>
             </a:r>
             <a:endParaRPr lang="en-US" sz="1400" dirty="0"/>
           </a:p>
@@ -5738,7 +5788,7 @@
                 <a:ea typeface="Courier New" pitchFamily="34" charset="-122"/>
                 <a:cs typeface="Courier New" pitchFamily="34" charset="-120"/>
               </a:rPr>
-              <a:t>dev pnpm check:migrations   # clean now</a:t>
+              <a:t>pnpm check:migrations   # clean now</a:t>
             </a:r>
             <a:endParaRPr lang="en-US" sz="1400" dirty="0"/>
           </a:p>
@@ -5755,7 +5805,7 @@
                 <a:ea typeface="Courier New" pitchFamily="34" charset="-122"/>
                 <a:cs typeface="Courier New" pitchFamily="34" charset="-120"/>
               </a:rPr>
-              <a:t>dev pnpm verify</a:t>
+              <a:t>pnpm verify</a:t>
             </a:r>
             <a:endParaRPr lang="en-US" sz="1400" dirty="0"/>
           </a:p>
@@ -5766,13 +5816,13 @@
             <a:r>
               <a:rPr lang="en-US" sz="1400" dirty="0">
                 <a:solidFill>
-                  <a:srgbClr val="E6EDF3"/>
+                  <a:srgbClr val="8B98A5"/>
                 </a:solidFill>
                 <a:latin typeface="Courier New" pitchFamily="34" charset="0"/>
                 <a:ea typeface="Courier New" pitchFamily="34" charset="-122"/>
                 <a:cs typeface="Courier New" pitchFamily="34" charset="-120"/>
               </a:rPr>
-              <a:t>docker compose up -d --build</a:t>
+              <a:t># stop the app (Ctrl+C), then:</a:t>
             </a:r>
             <a:endParaRPr lang="en-US" sz="1400" dirty="0"/>
           </a:p>
@@ -5789,7 +5839,7 @@
                 <a:ea typeface="Courier New" pitchFamily="34" charset="-122"/>
                 <a:cs typeface="Courier New" pitchFamily="34" charset="-120"/>
               </a:rPr>
-              <a:t>docker compose logs migrate</a:t>
+              <a:t>pnpm build &amp;&amp; pnpm db:migrate</a:t>
             </a:r>
             <a:endParaRPr lang="en-US" sz="1400" dirty="0"/>
           </a:p>
@@ -5806,7 +5856,24 @@
                 <a:ea typeface="Courier New" pitchFamily="34" charset="-122"/>
                 <a:cs typeface="Courier New" pitchFamily="34" charset="-120"/>
               </a:rPr>
-              <a:t>dev pnpm lab 02   # the lab check: all green?</a:t>
+              <a:t>pnpm start</a:t>
+            </a:r>
+            <a:endParaRPr lang="en-US" sz="1400" dirty="0"/>
+          </a:p>
+          <a:p>
+            <a:pPr indent="0" marL="0">
+              <a:buNone/>
+            </a:pPr>
+            <a:r>
+              <a:rPr lang="en-US" sz="1400" dirty="0">
+                <a:solidFill>
+                  <a:srgbClr val="E6EDF3"/>
+                </a:solidFill>
+                <a:latin typeface="Courier New" pitchFamily="34" charset="0"/>
+                <a:ea typeface="Courier New" pitchFamily="34" charset="-122"/>
+                <a:cs typeface="Courier New" pitchFamily="34" charset="-120"/>
+              </a:rPr>
+              <a:t>pnpm lab 02   # the lab check: all green?</a:t>
             </a:r>
             <a:endParaRPr lang="en-US" sz="1400" dirty="0"/>
           </a:p>
@@ -6196,7 +6263,7 @@
                 <a:ea typeface="Courier New" pitchFamily="34" charset="-122"/>
                 <a:cs typeface="Courier New" pitchFamily="34" charset="-120"/>
               </a:rPr>
-              <a:t># after up -d --build (expected)</a:t>
+              <a:t># pnpm db:migrate (expected)</a:t>
             </a:r>
             <a:endParaRPr lang="en-US" sz="1200" dirty="0"/>
           </a:p>
@@ -6340,7 +6407,7 @@
                 <a:ea typeface="Courier New" pitchFamily="34" charset="-122"/>
                 <a:cs typeface="Courier New" pitchFamily="34" charset="-120"/>
               </a:rPr>
-              <a:t>dev pnpm lab 02</a:t>
+              <a:t>pnpm lab 02</a:t>
             </a:r>
             <a:pPr indent="0" marL="0">
               <a:buNone/>
@@ -6857,7 +6924,7 @@
                   <a:srgbClr val="2B3440"/>
                 </a:solidFill>
               </a:rPr>
-              <a:t>Correct: tests run on the MIGRATION SQL (PGlite), not your TypeScript table. Generate the migration.</a:t>
+              <a:t>Correct: tests run on the MIGRATION SQL (in-memory SQLite), not your TypeScript table. Generate the migration.</a:t>
             </a:r>
             <a:endParaRPr lang="en-US" sz="1600" dirty="0"/>
           </a:p>
@@ -7109,7 +7176,7 @@
                   <a:srgbClr val="2B3440"/>
                 </a:solidFill>
               </a:rPr>
-              <a:t>That fails on populated tables (measured). Use nullable, then backfill, then SET NOT NULL.</a:t>
+              <a:t>SQLite refuses it on any table with rows (measured). Decide what happens to existing rows first, as drizzle/0002 does.</a:t>
             </a:r>
             <a:endParaRPr lang="en-US" sz="1600" dirty="0"/>
           </a:p>
@@ -7741,7 +7808,7 @@
                 <a:ea typeface="Courier New" pitchFamily="34" charset="-122"/>
                 <a:cs typeface="Courier New" pitchFamily="34" charset="-120"/>
               </a:rPr>
-              <a:t>dev pnpm test:e2e   # which test fails?</a:t>
+              <a:t>pnpm test:e2e   # which test fails?</a:t>
             </a:r>
             <a:endParaRPr lang="en-US" sz="1200" dirty="0"/>
           </a:p>
@@ -7792,7 +7859,7 @@
                 <a:ea typeface="Courier New" pitchFamily="34" charset="-122"/>
                 <a:cs typeface="Courier New" pitchFamily="34" charset="-120"/>
               </a:rPr>
-              <a:t>dev pnpm lab 03 04   # the lab check: all green?</a:t>
+              <a:t>pnpm lab 03 04   # the lab check: all green?</a:t>
             </a:r>
             <a:endParaRPr lang="en-US" sz="1200" dirty="0"/>
           </a:p>
@@ -8595,7 +8662,7 @@
                 <a:ea typeface="Courier New" pitchFamily="34" charset="-122"/>
                 <a:cs typeface="Courier New" pitchFamily="34" charset="-120"/>
               </a:rPr>
-              <a:t>dev pnpm lab 03 04</a:t>
+              <a:t>pnpm lab 03 04</a:t>
             </a:r>
             <a:pPr indent="0" marL="0">
               <a:buNone/>
@@ -9347,7 +9414,7 @@
                   <a:srgbClr val="2B3440"/>
                 </a:solidFill>
               </a:rPr>
-              <a:t>Blocked FK deletes report 23001 (RESTRICT) or 23503 (NO ACTION). The adapter maps both to 409.</a:t>
+              <a:t>A blocked delete reports SQLITE_CONSTRAINT_TRIGGER (RESTRICT) or …_FOREIGNKEY (NO ACTION). Map both to 409.</a:t>
             </a:r>
             <a:endParaRPr lang="en-US" sz="1600" dirty="0"/>
           </a:p>
@@ -11315,7 +11382,7 @@
                 <a:ea typeface="Courier New" pitchFamily="34" charset="-122"/>
                 <a:cs typeface="Courier New" pitchFamily="34" charset="-120"/>
               </a:rPr>
-              <a:t>dev pnpm lab 06   # the lab check: all green?</a:t>
+              <a:t>pnpm lab 06   # the lab check: all green?</a:t>
             </a:r>
             <a:endParaRPr lang="en-US" sz="1200" dirty="0"/>
           </a:p>
@@ -11866,7 +11933,7 @@
                 <a:ea typeface="Courier New" pitchFamily="34" charset="-122"/>
                 <a:cs typeface="Courier New" pitchFamily="34" charset="-120"/>
               </a:rPr>
-              <a:t>dev pnpm lab 06</a:t>
+              <a:t>pnpm lab 06</a:t>
             </a:r>
             <a:pPr indent="0" marL="0">
               <a:buNone/>
@@ -13233,7 +13300,7 @@
               <a:buNone/>
             </a:pPr>
             <a:r>
-              <a:rPr lang="en-US" sz="1200" dirty="0">
+              <a:rPr lang="en-US" sz="1400" dirty="0">
                 <a:solidFill>
                   <a:srgbClr val="E6EDF3"/>
                 </a:solidFill>
@@ -13241,33 +13308,33 @@
                 <a:ea typeface="Courier New" pitchFamily="34" charset="-122"/>
                 <a:cs typeface="Courier New" pitchFamily="34" charset="-120"/>
               </a:rPr>
-              <a:t>docker compose --profile inspector up -d inspector</a:t>
-            </a:r>
-            <a:endParaRPr lang="en-US" sz="1200" dirty="0"/>
-          </a:p>
-          <a:p>
-            <a:pPr indent="0" marL="0">
-              <a:buNone/>
-            </a:pPr>
-            <a:r>
-              <a:rPr lang="en-US" sz="1200" dirty="0">
-                <a:solidFill>
-                  <a:srgbClr val="E6EDF3"/>
+              <a:t>pnpm mcp:inspect:ui      # leave it running</a:t>
+            </a:r>
+            <a:endParaRPr lang="en-US" sz="1400" dirty="0"/>
+          </a:p>
+          <a:p>
+            <a:pPr indent="0" marL="0">
+              <a:buNone/>
+            </a:pPr>
+            <a:r>
+              <a:rPr lang="en-US" sz="1400" dirty="0">
+                <a:solidFill>
+                  <a:srgbClr val="8B98A5"/>
                 </a:solidFill>
                 <a:latin typeface="Courier New" pitchFamily="34" charset="0"/>
                 <a:ea typeface="Courier New" pitchFamily="34" charset="-122"/>
                 <a:cs typeface="Courier New" pitchFamily="34" charset="-120"/>
               </a:rPr>
-              <a:t>docker compose logs inspector</a:t>
-            </a:r>
-            <a:endParaRPr lang="en-US" sz="1200" dirty="0"/>
-          </a:p>
-          <a:p>
-            <a:pPr indent="0" marL="0">
-              <a:buNone/>
-            </a:pPr>
-            <a:r>
-              <a:rPr lang="en-US" sz="1200" dirty="0">
+              <a:t># open the localhost:6274 URL it prints</a:t>
+            </a:r>
+            <a:endParaRPr lang="en-US" sz="1400" dirty="0"/>
+          </a:p>
+          <a:p>
+            <a:pPr indent="0" marL="0">
+              <a:buNone/>
+            </a:pPr>
+            <a:r>
+              <a:rPr lang="en-US" sz="1400" dirty="0">
                 <a:solidFill>
                   <a:srgbClr val="8B98A5"/>
                 </a:solidFill>
@@ -13275,16 +13342,16 @@
                 <a:ea typeface="Courier New" pitchFamily="34" charset="-122"/>
                 <a:cs typeface="Courier New" pitchFamily="34" charset="-120"/>
               </a:rPr>
-              <a:t># open the localhost:6274 URL it prints</a:t>
-            </a:r>
-            <a:endParaRPr lang="en-US" sz="1200" dirty="0"/>
-          </a:p>
-          <a:p>
-            <a:pPr indent="0" marL="0">
-              <a:buNone/>
-            </a:pPr>
-            <a:r>
-              <a:rPr lang="en-US" sz="1200" dirty="0">
+              <a:t># in a second terminal:</a:t>
+            </a:r>
+            <a:endParaRPr lang="en-US" sz="1400" dirty="0"/>
+          </a:p>
+          <a:p>
+            <a:pPr indent="0" marL="0">
+              <a:buNone/>
+            </a:pPr>
+            <a:r>
+              <a:rPr lang="en-US" sz="1400" dirty="0">
                 <a:solidFill>
                   <a:srgbClr val="E6EDF3"/>
                 </a:solidFill>
@@ -13292,50 +13359,50 @@
                 <a:ea typeface="Courier New" pitchFamily="34" charset="-122"/>
                 <a:cs typeface="Courier New" pitchFamily="34" charset="-120"/>
               </a:rPr>
-              <a:t>eval "$(docker compose run --rm -T dev \</a:t>
-            </a:r>
-            <a:endParaRPr lang="en-US" sz="1200" dirty="0"/>
-          </a:p>
-          <a:p>
-            <a:pPr indent="0" marL="0">
-              <a:buNone/>
-            </a:pPr>
-            <a:r>
-              <a:rPr lang="en-US" sz="1200" dirty="0">
-                <a:solidFill>
-                  <a:srgbClr val="E6EDF3"/>
+              <a:t>eval "$(node scripts/demo-device.mjs)"</a:t>
+            </a:r>
+            <a:endParaRPr lang="en-US" sz="1400" dirty="0"/>
+          </a:p>
+          <a:p>
+            <a:pPr indent="0" marL="0">
+              <a:buNone/>
+            </a:pPr>
+            <a:r>
+              <a:rPr lang="en-US" sz="1400" dirty="0">
+                <a:solidFill>
+                  <a:srgbClr val="8B98A5"/>
                 </a:solidFill>
                 <a:latin typeface="Courier New" pitchFamily="34" charset="0"/>
                 <a:ea typeface="Courier New" pitchFamily="34" charset="-122"/>
                 <a:cs typeface="Courier New" pitchFamily="34" charset="-120"/>
               </a:rPr>
-              <a:t>  node scripts/demo-device.mjs | grep '^export ')"</a:t>
-            </a:r>
-            <a:endParaRPr lang="en-US" sz="1200" dirty="0"/>
-          </a:p>
-          <a:p>
-            <a:pPr indent="0" marL="0">
-              <a:buNone/>
-            </a:pPr>
-            <a:r>
-              <a:rPr lang="en-US" sz="1200" dirty="0">
-                <a:solidFill>
-                  <a:srgbClr val="8B98A5"/>
+              <a:t># the values for the two headers:</a:t>
+            </a:r>
+            <a:endParaRPr lang="en-US" sz="1400" dirty="0"/>
+          </a:p>
+          <a:p>
+            <a:pPr indent="0" marL="0">
+              <a:buNone/>
+            </a:pPr>
+            <a:r>
+              <a:rPr lang="en-US" sz="1400" dirty="0">
+                <a:solidFill>
+                  <a:srgbClr val="E6EDF3"/>
                 </a:solidFill>
                 <a:latin typeface="Courier New" pitchFamily="34" charset="0"/>
                 <a:ea typeface="Courier New" pitchFamily="34" charset="-122"/>
                 <a:cs typeface="Courier New" pitchFamily="34" charset="-120"/>
               </a:rPr>
-              <a:t># the values for the two headers:</a:t>
-            </a:r>
-            <a:endParaRPr lang="en-US" sz="1200" dirty="0"/>
-          </a:p>
-          <a:p>
-            <a:pPr indent="0" marL="0">
-              <a:buNone/>
-            </a:pPr>
-            <a:r>
-              <a:rPr lang="en-US" sz="1200" dirty="0">
+              <a:t>echo "$MCP_KEY_ID"</a:t>
+            </a:r>
+            <a:endParaRPr lang="en-US" sz="1400" dirty="0"/>
+          </a:p>
+          <a:p>
+            <a:pPr indent="0" marL="0">
+              <a:buNone/>
+            </a:pPr>
+            <a:r>
+              <a:rPr lang="en-US" sz="1400" dirty="0">
                 <a:solidFill>
                   <a:srgbClr val="E6EDF3"/>
                 </a:solidFill>
@@ -13343,26 +13410,9 @@
                 <a:ea typeface="Courier New" pitchFamily="34" charset="-122"/>
                 <a:cs typeface="Courier New" pitchFamily="34" charset="-120"/>
               </a:rPr>
-              <a:t>echo "$MCP_KEY_ID"</a:t>
-            </a:r>
-            <a:endParaRPr lang="en-US" sz="1200" dirty="0"/>
-          </a:p>
-          <a:p>
-            <a:pPr indent="0" marL="0">
-              <a:buNone/>
-            </a:pPr>
-            <a:r>
-              <a:rPr lang="en-US" sz="1200" dirty="0">
-                <a:solidFill>
-                  <a:srgbClr val="E6EDF3"/>
-                </a:solidFill>
-                <a:latin typeface="Courier New" pitchFamily="34" charset="0"/>
-                <a:ea typeface="Courier New" pitchFamily="34" charset="-122"/>
-                <a:cs typeface="Courier New" pitchFamily="34" charset="-120"/>
-              </a:rPr>
               <a:t>echo "$MCP_SECRET"</a:t>
             </a:r>
-            <a:endParaRPr lang="en-US" sz="1200" dirty="0"/>
+            <a:endParaRPr lang="en-US" sz="1400" dirty="0"/>
           </a:p>
         </p:txBody>
       </p:sp>
@@ -13497,7 +13547,7 @@
                   <a:srgbClr val="FFFFFF"/>
                 </a:solidFill>
               </a:rPr>
-              <a:t>2. streamable-http · http://app:3000/mcp → Add</a:t>
+              <a:t>2. streamable-http · http://localhost:3000/mcp → Add</a:t>
             </a:r>
             <a:endParaRPr lang="en-US" sz="1300" dirty="0"/>
           </a:p>
@@ -13833,7 +13883,7 @@
               <a:buNone/>
             </a:pPr>
             <a:r>
-              <a:rPr lang="en-US" sz="1000" dirty="0">
+              <a:rPr lang="en-US" sz="1100" dirty="0">
                 <a:solidFill>
                   <a:srgbClr val="E6EDF3"/>
                 </a:solidFill>
@@ -13841,16 +13891,16 @@
                 <a:ea typeface="Courier New" pitchFamily="34" charset="-122"/>
                 <a:cs typeface="Courier New" pitchFamily="34" charset="-120"/>
               </a:rPr>
-              <a:t>dev pnpm build</a:t>
-            </a:r>
-            <a:endParaRPr lang="en-US" sz="1000" dirty="0"/>
-          </a:p>
-          <a:p>
-            <a:pPr indent="0" marL="0">
-              <a:buNone/>
-            </a:pPr>
-            <a:r>
-              <a:rPr lang="en-US" sz="1000" dirty="0">
+              <a:t>pnpm build</a:t>
+            </a:r>
+            <a:endParaRPr lang="en-US" sz="1100" dirty="0"/>
+          </a:p>
+          <a:p>
+            <a:pPr indent="0" marL="0">
+              <a:buNone/>
+            </a:pPr>
+            <a:r>
+              <a:rPr lang="en-US" sz="1100" dirty="0">
                 <a:solidFill>
                   <a:srgbClr val="E6EDF3"/>
                 </a:solidFill>
@@ -13858,16 +13908,16 @@
                 <a:ea typeface="Courier New" pitchFamily="34" charset="-122"/>
                 <a:cs typeface="Courier New" pitchFamily="34" charset="-120"/>
               </a:rPr>
-              <a:t>dev pnpm mcp:inspect:cli --method tools/call \</a:t>
-            </a:r>
-            <a:endParaRPr lang="en-US" sz="1000" dirty="0"/>
-          </a:p>
-          <a:p>
-            <a:pPr indent="0" marL="0">
-              <a:buNone/>
-            </a:pPr>
-            <a:r>
-              <a:rPr lang="en-US" sz="1000" dirty="0">
+              <a:t>pnpm mcp:inspect:cli --method tools/call \</a:t>
+            </a:r>
+            <a:endParaRPr lang="en-US" sz="1100" dirty="0"/>
+          </a:p>
+          <a:p>
+            <a:pPr indent="0" marL="0">
+              <a:buNone/>
+            </a:pPr>
+            <a:r>
+              <a:rPr lang="en-US" sz="1100" dirty="0">
                 <a:solidFill>
                   <a:srgbClr val="E6EDF3"/>
                 </a:solidFill>
@@ -13877,14 +13927,14 @@
               </a:rPr>
               <a:t>  --tool-name get-note \</a:t>
             </a:r>
-            <a:endParaRPr lang="en-US" sz="1000" dirty="0"/>
-          </a:p>
-          <a:p>
-            <a:pPr indent="0" marL="0">
-              <a:buNone/>
-            </a:pPr>
-            <a:r>
-              <a:rPr lang="en-US" sz="1000" dirty="0">
+            <a:endParaRPr lang="en-US" sz="1100" dirty="0"/>
+          </a:p>
+          <a:p>
+            <a:pPr indent="0" marL="0">
+              <a:buNone/>
+            </a:pPr>
+            <a:r>
+              <a:rPr lang="en-US" sz="1100" dirty="0">
                 <a:solidFill>
                   <a:srgbClr val="E6EDF3"/>
                 </a:solidFill>
@@ -13894,14 +13944,14 @@
               </a:rPr>
               <a:t>  --tool-arg id=00000000-0000-4000-8000-000000000000</a:t>
             </a:r>
-            <a:endParaRPr lang="en-US" sz="1000" dirty="0"/>
-          </a:p>
-          <a:p>
-            <a:pPr indent="0" marL="0">
-              <a:buNone/>
-            </a:pPr>
-            <a:r>
-              <a:rPr lang="en-US" sz="1000" dirty="0">
+            <a:endParaRPr lang="en-US" sz="1100" dirty="0"/>
+          </a:p>
+          <a:p>
+            <a:pPr indent="0" marL="0">
+              <a:buNone/>
+            </a:pPr>
+            <a:r>
+              <a:rPr lang="en-US" sz="1100" dirty="0">
                 <a:solidFill>
                   <a:srgbClr val="E6EDF3"/>
                 </a:solidFill>
@@ -13911,14 +13961,14 @@
               </a:rPr>
               <a:t>echo "exit: $?"</a:t>
             </a:r>
-            <a:endParaRPr lang="en-US" sz="1000" dirty="0"/>
-          </a:p>
-          <a:p>
-            <a:pPr indent="0" marL="0">
-              <a:buNone/>
-            </a:pPr>
-            <a:r>
-              <a:rPr lang="en-US" sz="1000" dirty="0">
+            <a:endParaRPr lang="en-US" sz="1100" dirty="0"/>
+          </a:p>
+          <a:p>
+            <a:pPr indent="0" marL="0">
+              <a:buNone/>
+            </a:pPr>
+            <a:r>
+              <a:rPr lang="en-US" sz="1100" dirty="0">
                 <a:solidFill>
                   <a:srgbClr val="8B98A5"/>
                 </a:solidFill>
@@ -13928,48 +13978,48 @@
               </a:rPr>
               <a:t># attach-mcp.ts: enableJsonResponse: true</a:t>
             </a:r>
-            <a:endParaRPr lang="en-US" sz="1000" dirty="0"/>
-          </a:p>
-          <a:p>
-            <a:pPr indent="0" marL="0">
-              <a:buNone/>
-            </a:pPr>
-            <a:r>
-              <a:rPr lang="en-US" sz="1000" dirty="0">
-                <a:solidFill>
-                  <a:srgbClr val="E6EDF3"/>
+            <a:endParaRPr lang="en-US" sz="1100" dirty="0"/>
+          </a:p>
+          <a:p>
+            <a:pPr indent="0" marL="0">
+              <a:buNone/>
+            </a:pPr>
+            <a:r>
+              <a:rPr lang="en-US" sz="1100" dirty="0">
+                <a:solidFill>
+                  <a:srgbClr val="8B98A5"/>
                 </a:solidFill>
                 <a:latin typeface="Courier New" pitchFamily="34" charset="0"/>
                 <a:ea typeface="Courier New" pitchFamily="34" charset="-122"/>
                 <a:cs typeface="Courier New" pitchFamily="34" charset="-120"/>
               </a:rPr>
-              <a:t>docker compose up -d --build app</a:t>
-            </a:r>
-            <a:endParaRPr lang="en-US" sz="1000" dirty="0"/>
-          </a:p>
-          <a:p>
-            <a:pPr indent="0" marL="0">
-              <a:buNone/>
-            </a:pPr>
-            <a:r>
-              <a:rPr lang="en-US" sz="1000" dirty="0">
-                <a:solidFill>
-                  <a:srgbClr val="8B98A5"/>
+              <a:t># restart the app: Ctrl+C, then</a:t>
+            </a:r>
+            <a:endParaRPr lang="en-US" sz="1100" dirty="0"/>
+          </a:p>
+          <a:p>
+            <a:pPr indent="0" marL="0">
+              <a:buNone/>
+            </a:pPr>
+            <a:r>
+              <a:rPr lang="en-US" sz="1100" dirty="0">
+                <a:solidFill>
+                  <a:srgbClr val="E6EDF3"/>
                 </a:solidFill>
                 <a:latin typeface="Courier New" pitchFamily="34" charset="0"/>
                 <a:ea typeface="Courier New" pitchFamily="34" charset="-122"/>
                 <a:cs typeface="Courier New" pitchFamily="34" charset="-120"/>
               </a:rPr>
-              <a:t># re-send Postman 05 › initialize: what changed?</a:t>
-            </a:r>
-            <a:endParaRPr lang="en-US" sz="1000" dirty="0"/>
-          </a:p>
-          <a:p>
-            <a:pPr indent="0" marL="0">
-              <a:buNone/>
-            </a:pPr>
-            <a:r>
-              <a:rPr lang="en-US" sz="1000" dirty="0">
+              <a:t>pnpm build &amp;&amp; pnpm start</a:t>
+            </a:r>
+            <a:endParaRPr lang="en-US" sz="1100" dirty="0"/>
+          </a:p>
+          <a:p>
+            <a:pPr indent="0" marL="0">
+              <a:buNone/>
+            </a:pPr>
+            <a:r>
+              <a:rPr lang="en-US" sz="1100" dirty="0">
                 <a:solidFill>
                   <a:srgbClr val="8B98A5"/>
                 </a:solidFill>
@@ -13977,26 +14027,43 @@
                 <a:ea typeface="Courier New" pitchFamily="34" charset="-122"/>
                 <a:cs typeface="Courier New" pitchFamily="34" charset="-120"/>
               </a:rPr>
-              <a:t># then revert enableJsonResponse</a:t>
-            </a:r>
-            <a:endParaRPr lang="en-US" sz="1000" dirty="0"/>
-          </a:p>
-          <a:p>
-            <a:pPr indent="0" marL="0">
-              <a:buNone/>
-            </a:pPr>
-            <a:r>
-              <a:rPr lang="en-US" sz="1000" dirty="0">
-                <a:solidFill>
-                  <a:srgbClr val="E6EDF3"/>
+              <a:t># re-send Postman 05 › initialize: what changed?</a:t>
+            </a:r>
+            <a:endParaRPr lang="en-US" sz="1100" dirty="0"/>
+          </a:p>
+          <a:p>
+            <a:pPr indent="0" marL="0">
+              <a:buNone/>
+            </a:pPr>
+            <a:r>
+              <a:rPr lang="en-US" sz="1100" dirty="0">
+                <a:solidFill>
+                  <a:srgbClr val="8B98A5"/>
                 </a:solidFill>
                 <a:latin typeface="Courier New" pitchFamily="34" charset="0"/>
                 <a:ea typeface="Courier New" pitchFamily="34" charset="-122"/>
                 <a:cs typeface="Courier New" pitchFamily="34" charset="-120"/>
               </a:rPr>
-              <a:t>dev pnpm lab 08   # green now; break it, see red, revert</a:t>
-            </a:r>
-            <a:endParaRPr lang="en-US" sz="1000" dirty="0"/>
+              <a:t># then revert enableJsonResponse</a:t>
+            </a:r>
+            <a:endParaRPr lang="en-US" sz="1100" dirty="0"/>
+          </a:p>
+          <a:p>
+            <a:pPr indent="0" marL="0">
+              <a:buNone/>
+            </a:pPr>
+            <a:r>
+              <a:rPr lang="en-US" sz="1100" dirty="0">
+                <a:solidFill>
+                  <a:srgbClr val="E6EDF3"/>
+                </a:solidFill>
+                <a:latin typeface="Courier New" pitchFamily="34" charset="0"/>
+                <a:ea typeface="Courier New" pitchFamily="34" charset="-122"/>
+                <a:cs typeface="Courier New" pitchFamily="34" charset="-120"/>
+              </a:rPr>
+              <a:t>pnpm lab 08   # green now; break it, see red, revert</a:t>
+            </a:r>
+            <a:endParaRPr lang="en-US" sz="1100" dirty="0"/>
           </a:p>
         </p:txBody>
       </p:sp>
@@ -14679,7 +14746,7 @@
                 <a:ea typeface="Courier New" pitchFamily="34" charset="-122"/>
                 <a:cs typeface="Courier New" pitchFamily="34" charset="-120"/>
               </a:rPr>
-              <a:t>dev pnpm lab 08</a:t>
+              <a:t>pnpm lab 08</a:t>
             </a:r>
             <a:pPr indent="0" marL="0">
               <a:buNone/>
@@ -15434,7 +15501,7 @@
                   <a:srgbClr val="1B1F24"/>
                 </a:solidFill>
               </a:rPr>
-              <a:t>Called by service name: 403</a:t>
+              <a:t>Called by hostname: 403</a:t>
             </a:r>
             <a:endParaRPr lang="en-US" sz="1600" dirty="0"/>
           </a:p>
@@ -15448,7 +15515,7 @@
                   <a:srgbClr val="2B3440"/>
                 </a:solidFill>
               </a:rPr>
-              <a:t>Add that name to MCP_ALLOWED_HOSTS (reproduced in Docker).</a:t>
+              <a:t>Add that name to MCP_ALLOWED_HOSTS: localhost,&lt;hostname&gt; (measured: 403 without, 200 with).</a:t>
             </a:r>
             <a:endParaRPr lang="en-US" sz="1600" dirty="0"/>
           </a:p>
@@ -15951,7 +16018,7 @@
                   <a:srgbClr val="1B1F24"/>
                 </a:solidFill>
               </a:rPr>
-              <a:t>dev = the toolbox</a:t>
+              <a:t>Node 24 + pnpm</a:t>
             </a:r>
             <a:endParaRPr lang="en-US" sz="1800" dirty="0"/>
           </a:p>
@@ -15965,7 +16032,7 @@
                   <a:srgbClr val="2B3440"/>
                 </a:solidFill>
               </a:rPr>
-              <a:t>alias dev='docker compose run --rm dev'. Every </a:t>
+              <a:t>Every command runs in boilerplate/nest-ai-starter. </a:t>
             </a:r>
             <a:pPr indent="0" marL="0">
               <a:buNone/>
@@ -15979,7 +16046,7 @@
                 <a:ea typeface="Courier New" pitchFamily="34" charset="-122"/>
                 <a:cs typeface="Courier New" pitchFamily="34" charset="-120"/>
               </a:rPr>
-              <a:t>pnpm X</a:t>
+              <a:t>corepack enable</a:t>
             </a:r>
             <a:pPr indent="0" marL="0">
               <a:buNone/>
@@ -15990,7 +16057,7 @@
                   <a:srgbClr val="2B3440"/>
                 </a:solidFill>
               </a:rPr>
-              <a:t> in the course becomes </a:t>
+              <a:t> once puts pnpm on your PATH; otherwise write </a:t>
             </a:r>
             <a:pPr indent="0" marL="0">
               <a:buNone/>
@@ -16004,7 +16071,7 @@
                 <a:ea typeface="Courier New" pitchFamily="34" charset="-122"/>
                 <a:cs typeface="Courier New" pitchFamily="34" charset="-120"/>
               </a:rPr>
-              <a:t>dev pnpm X</a:t>
+              <a:t>corepack pnpm</a:t>
             </a:r>
             <a:pPr indent="0" marL="0">
               <a:buNone/>
@@ -16493,7 +16560,7 @@
               <a:buNone/>
             </a:pPr>
             <a:r>
-              <a:rPr lang="en-US" sz="1000" dirty="0">
+              <a:rPr lang="en-US" sz="1100" dirty="0">
                 <a:solidFill>
                   <a:srgbClr val="E6EDF3"/>
                 </a:solidFill>
@@ -16501,16 +16568,16 @@
                 <a:ea typeface="Courier New" pitchFamily="34" charset="-122"/>
                 <a:cs typeface="Courier New" pitchFamily="34" charset="-120"/>
               </a:rPr>
-              <a:t>eval "$(docker compose run --rm -T dev \</a:t>
-            </a:r>
-            <a:endParaRPr lang="en-US" sz="1000" dirty="0"/>
-          </a:p>
-          <a:p>
-            <a:pPr indent="0" marL="0">
-              <a:buNone/>
-            </a:pPr>
-            <a:r>
-              <a:rPr lang="en-US" sz="1000" dirty="0">
+              <a:t>eval "$(node scripts/demo-device.mjs)"</a:t>
+            </a:r>
+            <a:endParaRPr lang="en-US" sz="1100" dirty="0"/>
+          </a:p>
+          <a:p>
+            <a:pPr indent="0" marL="0">
+              <a:buNone/>
+            </a:pPr>
+            <a:r>
+              <a:rPr lang="en-US" sz="1100" dirty="0">
                 <a:solidFill>
                   <a:srgbClr val="E6EDF3"/>
                 </a:solidFill>
@@ -16518,16 +16585,16 @@
                 <a:ea typeface="Courier New" pitchFamily="34" charset="-122"/>
                 <a:cs typeface="Courier New" pitchFamily="34" charset="-120"/>
               </a:rPr>
-              <a:t>  node scripts/demo-device.mjs | grep '^export ')"</a:t>
-            </a:r>
-            <a:endParaRPr lang="en-US" sz="1000" dirty="0"/>
-          </a:p>
-          <a:p>
-            <a:pPr indent="0" marL="0">
-              <a:buNone/>
-            </a:pPr>
-            <a:r>
-              <a:rPr lang="en-US" sz="1000" dirty="0">
+              <a:t>npx -y @modelcontextprotocol/inspector@2.12.0 \</a:t>
+            </a:r>
+            <a:endParaRPr lang="en-US" sz="1100" dirty="0"/>
+          </a:p>
+          <a:p>
+            <a:pPr indent="0" marL="0">
+              <a:buNone/>
+            </a:pPr>
+            <a:r>
+              <a:rPr lang="en-US" sz="1100" dirty="0">
                 <a:solidFill>
                   <a:srgbClr val="E6EDF3"/>
                 </a:solidFill>
@@ -16535,16 +16602,16 @@
                 <a:ea typeface="Courier New" pitchFamily="34" charset="-122"/>
                 <a:cs typeface="Courier New" pitchFamily="34" charset="-120"/>
               </a:rPr>
-              <a:t>dev npx -y @modelcontextprotocol/inspector@2.12.0 \</a:t>
-            </a:r>
-            <a:endParaRPr lang="en-US" sz="1000" dirty="0"/>
-          </a:p>
-          <a:p>
-            <a:pPr indent="0" marL="0">
-              <a:buNone/>
-            </a:pPr>
-            <a:r>
-              <a:rPr lang="en-US" sz="1000" dirty="0">
+              <a:t>  --cli http://localhost:3000/mcp \</a:t>
+            </a:r>
+            <a:endParaRPr lang="en-US" sz="1100" dirty="0"/>
+          </a:p>
+          <a:p>
+            <a:pPr indent="0" marL="0">
+              <a:buNone/>
+            </a:pPr>
+            <a:r>
+              <a:rPr lang="en-US" sz="1100" dirty="0">
                 <a:solidFill>
                   <a:srgbClr val="E6EDF3"/>
                 </a:solidFill>
@@ -16552,16 +16619,16 @@
                 <a:ea typeface="Courier New" pitchFamily="34" charset="-122"/>
                 <a:cs typeface="Courier New" pitchFamily="34" charset="-120"/>
               </a:rPr>
-              <a:t>  --cli http://app:3000/mcp \</a:t>
-            </a:r>
-            <a:endParaRPr lang="en-US" sz="1000" dirty="0"/>
-          </a:p>
-          <a:p>
-            <a:pPr indent="0" marL="0">
-              <a:buNone/>
-            </a:pPr>
-            <a:r>
-              <a:rPr lang="en-US" sz="1000" dirty="0">
+              <a:t>  --method tools/call --tool-name whoami \</a:t>
+            </a:r>
+            <a:endParaRPr lang="en-US" sz="1100" dirty="0"/>
+          </a:p>
+          <a:p>
+            <a:pPr indent="0" marL="0">
+              <a:buNone/>
+            </a:pPr>
+            <a:r>
+              <a:rPr lang="en-US" sz="1100" dirty="0">
                 <a:solidFill>
                   <a:srgbClr val="E6EDF3"/>
                 </a:solidFill>
@@ -16569,16 +16636,16 @@
                 <a:ea typeface="Courier New" pitchFamily="34" charset="-122"/>
                 <a:cs typeface="Courier New" pitchFamily="34" charset="-120"/>
               </a:rPr>
-              <a:t>  --method tools/call --tool-name whoami \</a:t>
-            </a:r>
-            <a:endParaRPr lang="en-US" sz="1000" dirty="0"/>
-          </a:p>
-          <a:p>
-            <a:pPr indent="0" marL="0">
-              <a:buNone/>
-            </a:pPr>
-            <a:r>
-              <a:rPr lang="en-US" sz="1000" dirty="0">
+              <a:t>  --header "X-Access-Key-Id: $MCP_KEY_ID" \</a:t>
+            </a:r>
+            <a:endParaRPr lang="en-US" sz="1100" dirty="0"/>
+          </a:p>
+          <a:p>
+            <a:pPr indent="0" marL="0">
+              <a:buNone/>
+            </a:pPr>
+            <a:r>
+              <a:rPr lang="en-US" sz="1100" dirty="0">
                 <a:solidFill>
                   <a:srgbClr val="E6EDF3"/>
                 </a:solidFill>
@@ -16586,16 +16653,16 @@
                 <a:ea typeface="Courier New" pitchFamily="34" charset="-122"/>
                 <a:cs typeface="Courier New" pitchFamily="34" charset="-120"/>
               </a:rPr>
-              <a:t>  --header "X-Access-Key-Id: $MCP_KEY_ID" \</a:t>
-            </a:r>
-            <a:endParaRPr lang="en-US" sz="1000" dirty="0"/>
-          </a:p>
-          <a:p>
-            <a:pPr indent="0" marL="0">
-              <a:buNone/>
-            </a:pPr>
-            <a:r>
-              <a:rPr lang="en-US" sz="1000" dirty="0">
+              <a:t>  --header "X-Secret-Key: $MCP_SECRET"</a:t>
+            </a:r>
+            <a:endParaRPr lang="en-US" sz="1100" dirty="0"/>
+          </a:p>
+          <a:p>
+            <a:pPr indent="0" marL="0">
+              <a:buNone/>
+            </a:pPr>
+            <a:r>
+              <a:rPr lang="en-US" sz="1100" dirty="0">
                 <a:solidFill>
                   <a:srgbClr val="E6EDF3"/>
                 </a:solidFill>
@@ -16603,26 +16670,9 @@
                 <a:ea typeface="Courier New" pitchFamily="34" charset="-122"/>
                 <a:cs typeface="Courier New" pitchFamily="34" charset="-120"/>
               </a:rPr>
-              <a:t>  --header "X-Secret-Key: $MCP_SECRET"</a:t>
-            </a:r>
-            <a:endParaRPr lang="en-US" sz="1000" dirty="0"/>
-          </a:p>
-          <a:p>
-            <a:pPr indent="0" marL="0">
-              <a:buNone/>
-            </a:pPr>
-            <a:r>
-              <a:rPr lang="en-US" sz="1000" dirty="0">
-                <a:solidFill>
-                  <a:srgbClr val="E6EDF3"/>
-                </a:solidFill>
-                <a:latin typeface="Courier New" pitchFamily="34" charset="0"/>
-                <a:ea typeface="Courier New" pitchFamily="34" charset="-122"/>
-                <a:cs typeface="Courier New" pitchFamily="34" charset="-120"/>
-              </a:rPr>
-              <a:t>dev pnpm lab 09   # green now; break it, see red, revert</a:t>
-            </a:r>
-            <a:endParaRPr lang="en-US" sz="1000" dirty="0"/>
+              <a:t>pnpm lab 09   # green now; break it, see red, revert</a:t>
+            </a:r>
+            <a:endParaRPr lang="en-US" sz="1100" dirty="0"/>
           </a:p>
         </p:txBody>
       </p:sp>
@@ -17302,7 +17352,7 @@
                 <a:ea typeface="Courier New" pitchFamily="34" charset="-122"/>
                 <a:cs typeface="Courier New" pitchFamily="34" charset="-120"/>
               </a:rPr>
-              <a:t>dev pnpm lab 09</a:t>
+              <a:t>pnpm lab 09</a:t>
             </a:r>
             <a:pPr indent="0" marL="0">
               <a:buNone/>
@@ -19101,7 +19151,7 @@
                   <a:srgbClr val="FFFFFF"/>
                 </a:solidFill>
               </a:rPr>
-              <a:t>Docker stack</a:t>
+              <a:t>Node + SQLite</a:t>
             </a:r>
             <a:endParaRPr lang="en-US" sz="1400" dirty="0"/>
           </a:p>
@@ -20017,7 +20067,7 @@
                 <a:ea typeface="Courier New" pitchFamily="34" charset="-122"/>
                 <a:cs typeface="Courier New" pitchFamily="34" charset="-120"/>
               </a:rPr>
-              <a:t>dev pnpm lab 04</a:t>
+              <a:t>pnpm lab 04</a:t>
             </a:r>
             <a:pPr indent="0" marL="0">
               <a:buNone/>
@@ -20042,7 +20092,7 @@
                 <a:ea typeface="Courier New" pitchFamily="34" charset="-122"/>
                 <a:cs typeface="Courier New" pitchFamily="34" charset="-120"/>
               </a:rPr>
-              <a:t>dev pnpm lab</a:t>
+              <a:t>pnpm lab</a:t>
             </a:r>
             <a:pPr indent="0" marL="0">
               <a:buNone/>
@@ -21505,7 +21555,7 @@
                   <a:srgbClr val="1B1F24"/>
                 </a:solidFill>
               </a:rPr>
-              <a:t>Run this: stack up, then an orders resource</a:t>
+              <a:t>Run this: set up, then an orders resource</a:t>
             </a:r>
             <a:endParaRPr lang="en-US" sz="3200" dirty="0"/>
           </a:p>
@@ -21702,7 +21752,7 @@
                 <a:ea typeface="Courier New" pitchFamily="34" charset="-122"/>
                 <a:cs typeface="Courier New" pitchFamily="34" charset="-120"/>
               </a:rPr>
-              <a:t>docker compose up -d --build</a:t>
+              <a:t>corepack enable &amp;&amp; pnpm install</a:t>
             </a:r>
             <a:endParaRPr lang="en-US" sz="1400" dirty="0"/>
           </a:p>
@@ -21719,7 +21769,7 @@
                 <a:ea typeface="Courier New" pitchFamily="34" charset="-122"/>
                 <a:cs typeface="Courier New" pitchFamily="34" charset="-120"/>
               </a:rPr>
-              <a:t>alias dev='docker compose run --rm dev'</a:t>
+              <a:t>cp .env.example .env</a:t>
             </a:r>
             <a:endParaRPr lang="en-US" sz="1400" dirty="0"/>
           </a:p>
@@ -21736,7 +21786,7 @@
                 <a:ea typeface="Courier New" pitchFamily="34" charset="-122"/>
                 <a:cs typeface="Courier New" pitchFamily="34" charset="-120"/>
               </a:rPr>
-              <a:t>dev pnpm verify                # 67 + 61 tests</a:t>
+              <a:t>pnpm build &amp;&amp; pnpm db:migrate</a:t>
             </a:r>
             <a:endParaRPr lang="en-US" sz="1400" dirty="0"/>
           </a:p>
@@ -21747,13 +21797,13 @@
             <a:r>
               <a:rPr lang="en-US" sz="1400" dirty="0">
                 <a:solidFill>
-                  <a:srgbClr val="8B98A5"/>
+                  <a:srgbClr val="E6EDF3"/>
                 </a:solidFill>
                 <a:latin typeface="Courier New" pitchFamily="34" charset="0"/>
                 <a:ea typeface="Courier New" pitchFamily="34" charset="-122"/>
                 <a:cs typeface="Courier New" pitchFamily="34" charset="-120"/>
               </a:rPr>
-              <a:t># write specs/orders.md (copy specs/notes.md), then:</a:t>
+              <a:t>pnpm verify                # 69 + 61 tests</a:t>
             </a:r>
             <a:endParaRPr lang="en-US" sz="1400" dirty="0"/>
           </a:p>
@@ -21764,13 +21814,13 @@
             <a:r>
               <a:rPr lang="en-US" sz="1400" dirty="0">
                 <a:solidFill>
-                  <a:srgbClr val="E6EDF3"/>
+                  <a:srgbClr val="8B98A5"/>
                 </a:solidFill>
                 <a:latin typeface="Courier New" pitchFamily="34" charset="0"/>
                 <a:ea typeface="Courier New" pitchFamily="34" charset="-122"/>
                 <a:cs typeface="Courier New" pitchFamily="34" charset="-120"/>
               </a:rPr>
-              <a:t>dev pnpm exec nest g resource orders --type rest --crud</a:t>
+              <a:t># write specs/orders.md (copy specs/notes.md), then:</a:t>
             </a:r>
             <a:endParaRPr lang="en-US" sz="1400" dirty="0"/>
           </a:p>
@@ -21787,7 +21837,7 @@
                 <a:ea typeface="Courier New" pitchFamily="34" charset="-122"/>
                 <a:cs typeface="Courier New" pitchFamily="34" charset="-120"/>
               </a:rPr>
-              <a:t>dev pnpm resource:template --name order --plural orders</a:t>
+              <a:t>pnpm exec nest g resource orders --type rest --crud</a:t>
             </a:r>
             <a:endParaRPr lang="en-US" sz="1400" dirty="0"/>
           </a:p>
@@ -21804,7 +21854,7 @@
                 <a:ea typeface="Courier New" pitchFamily="34" charset="-122"/>
                 <a:cs typeface="Courier New" pitchFamily="34" charset="-120"/>
               </a:rPr>
-              <a:t>dev pnpm check:ai-fill         # your agent's to-do list</a:t>
+              <a:t>pnpm resource:template --name order --plural orders</a:t>
             </a:r>
             <a:endParaRPr lang="en-US" sz="1400" dirty="0"/>
           </a:p>
@@ -21815,13 +21865,13 @@
             <a:r>
               <a:rPr lang="en-US" sz="1400" dirty="0">
                 <a:solidFill>
-                  <a:srgbClr val="8B98A5"/>
+                  <a:srgbClr val="E6EDF3"/>
                 </a:solidFill>
                 <a:latin typeface="Courier New" pitchFamily="34" charset="0"/>
                 <a:ea typeface="Courier New" pitchFamily="34" charset="-122"/>
                 <a:cs typeface="Courier New" pitchFamily="34" charset="-120"/>
               </a:rPr>
-              <a:t># your agent fills every AI-FILL marker, then:</a:t>
+              <a:t>pnpm check:ai-fill         # your agent's to-do list</a:t>
             </a:r>
             <a:endParaRPr lang="en-US" sz="1400" dirty="0"/>
           </a:p>
@@ -21832,13 +21882,13 @@
             <a:r>
               <a:rPr lang="en-US" sz="1400" dirty="0">
                 <a:solidFill>
-                  <a:srgbClr val="E6EDF3"/>
+                  <a:srgbClr val="8B98A5"/>
                 </a:solidFill>
                 <a:latin typeface="Courier New" pitchFamily="34" charset="0"/>
                 <a:ea typeface="Courier New" pitchFamily="34" charset="-122"/>
                 <a:cs typeface="Courier New" pitchFamily="34" charset="-120"/>
               </a:rPr>
-              <a:t>dev pnpm verify</a:t>
+              <a:t># your agent fills every AI-FILL marker, then:</a:t>
             </a:r>
             <a:endParaRPr lang="en-US" sz="1400" dirty="0"/>
           </a:p>
@@ -21855,7 +21905,24 @@
                 <a:ea typeface="Courier New" pitchFamily="34" charset="-122"/>
                 <a:cs typeface="Courier New" pitchFamily="34" charset="-120"/>
               </a:rPr>
-              <a:t>dev pnpm lab 01   # the lab check: all green?</a:t>
+              <a:t>pnpm verify</a:t>
+            </a:r>
+            <a:endParaRPr lang="en-US" sz="1400" dirty="0"/>
+          </a:p>
+          <a:p>
+            <a:pPr indent="0" marL="0">
+              <a:buNone/>
+            </a:pPr>
+            <a:r>
+              <a:rPr lang="en-US" sz="1400" dirty="0">
+                <a:solidFill>
+                  <a:srgbClr val="E6EDF3"/>
+                </a:solidFill>
+                <a:latin typeface="Courier New" pitchFamily="34" charset="0"/>
+                <a:ea typeface="Courier New" pitchFamily="34" charset="-122"/>
+                <a:cs typeface="Courier New" pitchFamily="34" charset="-120"/>
+              </a:rPr>
+              <a:t>pnpm lab 01   # the lab check: all green?</a:t>
             </a:r>
             <a:endParaRPr lang="en-US" sz="1400" dirty="0"/>
           </a:p>
@@ -21963,7 +22030,7 @@
                   <a:srgbClr val="1B1F24"/>
                 </a:solidFill>
               </a:rPr>
-              <a:t>Checkpoint: stack green, markers to zero</a:t>
+              <a:t>Checkpoint: gate green, markers to zero</a:t>
             </a:r>
             <a:endParaRPr lang="en-US" sz="3200" dirty="0"/>
           </a:p>
@@ -22143,7 +22210,7 @@
                 <a:ea typeface="Courier New" pitchFamily="34" charset="-122"/>
                 <a:cs typeface="Courier New" pitchFamily="34" charset="-120"/>
               </a:rPr>
-              <a:t># docker compose ps -a  (STATUS)</a:t>
+              <a:t># pnpm db:migrate</a:t>
             </a:r>
             <a:endParaRPr lang="en-US" sz="1200" dirty="0"/>
           </a:p>
@@ -22160,7 +22227,7 @@
                 <a:ea typeface="Courier New" pitchFamily="34" charset="-122"/>
                 <a:cs typeface="Courier New" pitchFamily="34" charset="-120"/>
               </a:rPr>
-              <a:t>app       Up … (healthy)</a:t>
+              <a:t>db:migrate: ledger rows: 3</a:t>
             </a:r>
             <a:endParaRPr lang="en-US" sz="1200" dirty="0"/>
           </a:p>
@@ -22171,13 +22238,13 @@
             <a:r>
               <a:rPr lang="en-US" sz="1200" dirty="0">
                 <a:solidFill>
-                  <a:srgbClr val="E6EDF3"/>
+                  <a:srgbClr val="8B98A5"/>
                 </a:solidFill>
                 <a:latin typeface="Courier New" pitchFamily="34" charset="0"/>
                 <a:ea typeface="Courier New" pitchFamily="34" charset="-122"/>
                 <a:cs typeface="Courier New" pitchFamily="34" charset="-120"/>
               </a:rPr>
-              <a:t>migrate   Exited (0)</a:t>
+              <a:t># pnpm verify (before your resource)</a:t>
             </a:r>
             <a:endParaRPr lang="en-US" sz="1200" dirty="0"/>
           </a:p>
@@ -22188,30 +22255,13 @@
             <a:r>
               <a:rPr lang="en-US" sz="1200" dirty="0">
                 <a:solidFill>
-                  <a:srgbClr val="8B98A5"/>
+                  <a:srgbClr val="E6EDF3"/>
                 </a:solidFill>
                 <a:latin typeface="Courier New" pitchFamily="34" charset="0"/>
                 <a:ea typeface="Courier New" pitchFamily="34" charset="-122"/>
                 <a:cs typeface="Courier New" pitchFamily="34" charset="-120"/>
               </a:rPr>
-              <a:t># dev pnpm verify (before your resource)</a:t>
-            </a:r>
-            <a:endParaRPr lang="en-US" sz="1200" dirty="0"/>
-          </a:p>
-          <a:p>
-            <a:pPr indent="0" marL="0">
-              <a:buNone/>
-            </a:pPr>
-            <a:r>
-              <a:rPr lang="en-US" sz="1200" dirty="0">
-                <a:solidFill>
-                  <a:srgbClr val="E6EDF3"/>
-                </a:solidFill>
-                <a:latin typeface="Courier New" pitchFamily="34" charset="0"/>
-                <a:ea typeface="Courier New" pitchFamily="34" charset="-122"/>
-                <a:cs typeface="Courier New" pitchFamily="34" charset="-120"/>
-              </a:rPr>
-              <a:t>Tests  67 passed (67)</a:t>
+              <a:t>Tests  69 passed (69)</a:t>
             </a:r>
             <a:endParaRPr lang="en-US" sz="1200" dirty="0"/>
           </a:p>
@@ -22440,7 +22490,7 @@
                 <a:ea typeface="Courier New" pitchFamily="34" charset="-122"/>
                 <a:cs typeface="Courier New" pitchFamily="34" charset="-120"/>
               </a:rPr>
-              <a:t>dev pnpm lab 01</a:t>
+              <a:t>pnpm lab 01</a:t>
             </a:r>
             <a:pPr indent="0" marL="0">
               <a:buNone/>
@@ -22536,7 +22586,7 @@
                   <a:srgbClr val="1B1F24"/>
                 </a:solidFill>
               </a:rPr>
-              <a:t>app healthy, migrate exited 0, both gates green</a:t>
+              <a:t>ledger rows: 3, both gates green</a:t>
             </a:r>
             <a:endParaRPr lang="en-US" sz="1400" dirty="0"/>
           </a:p>
@@ -22766,47 +22816,47 @@
 </file>
 
 <file path=ppt/theme/theme1.xml><?xml version="1.0" encoding="utf-8"?>
-<a:theme xmlns:a="http://schemas.openxmlformats.org/drawingml/2006/main" name="Lab Companion">
+<a:theme xmlns:a="http://schemas.openxmlformats.org/drawingml/2006/main" name="Office Theme">
   <a:themeElements>
-    <a:clrScheme name="Lab Companion">
+    <a:clrScheme name="Office">
       <a:dk1>
-        <a:srgbClr val="1B1F24"/>
+        <a:sysClr val="windowText" lastClr="000000"/>
       </a:dk1>
       <a:lt1>
-        <a:srgbClr val="FFFFFF"/>
+        <a:sysClr val="window" lastClr="FFFFFF"/>
       </a:lt1>
       <a:dk2>
-        <a:srgbClr val="2B3440"/>
+        <a:srgbClr val="44546A"/>
       </a:dk2>
       <a:lt2>
-        <a:srgbClr val="F1F5F9"/>
+        <a:srgbClr val="E7E6E6"/>
       </a:lt2>
       <a:accent1>
-        <a:srgbClr val="1FB68A"/>
+        <a:srgbClr val="4472C4"/>
       </a:accent1>
       <a:accent2>
-        <a:srgbClr val="E69A28"/>
+        <a:srgbClr val="ED7D31"/>
       </a:accent2>
       <a:accent3>
-        <a:srgbClr val="7C5CFF"/>
+        <a:srgbClr val="A5A5A5"/>
       </a:accent3>
       <a:accent4>
-        <a:srgbClr val="E5484D"/>
+        <a:srgbClr val="FFC000"/>
       </a:accent4>
       <a:accent5>
-        <a:srgbClr val="0F766E"/>
+        <a:srgbClr val="5B9BD5"/>
       </a:accent5>
       <a:accent6>
-        <a:srgbClr val="94A3B8"/>
+        <a:srgbClr val="70AD47"/>
       </a:accent6>
       <a:hlink>
-        <a:srgbClr val="0F766E"/>
+        <a:srgbClr val="0563C1"/>
       </a:hlink>
       <a:folHlink>
-        <a:srgbClr val="7C5CFF"/>
+        <a:srgbClr val="954F72"/>
       </a:folHlink>
     </a:clrScheme>
-    <a:fontScheme name="Lab Companion">
+    <a:fontScheme name="Office">
       <a:majorFont>
         <a:latin typeface="Calibri"/>
         <a:ea typeface=""/>

--- a/docs/ai-agent-training/slides/lab-companion-lite.pptx
+++ b/docs/ai-agent-training/slides/lab-companion-lite.pptx
@@ -9414,7 +9414,57 @@
                   <a:srgbClr val="2B3440"/>
                 </a:solidFill>
               </a:rPr>
-              <a:t>A blocked delete reports SQLITE_CONSTRAINT_TRIGGER (RESTRICT) or …_FOREIGNKEY (NO ACTION). Map both to 409.</a:t>
+              <a:t>A blocked delete reports </a:t>
+            </a:r>
+            <a:pPr indent="0" marL="0">
+              <a:buNone/>
+            </a:pPr>
+            <a:r>
+              <a:rPr lang="en-US" sz="1400" dirty="0">
+                <a:solidFill>
+                  <a:srgbClr val="2B3440"/>
+                </a:solidFill>
+                <a:latin typeface="Courier New" pitchFamily="34" charset="0"/>
+                <a:ea typeface="Courier New" pitchFamily="34" charset="-122"/>
+                <a:cs typeface="Courier New" pitchFamily="34" charset="-120"/>
+              </a:rPr>
+              <a:t>SQLITE_CONSTRAINT_TRIGGER</a:t>
+            </a:r>
+            <a:pPr indent="0" marL="0">
+              <a:buNone/>
+            </a:pPr>
+            <a:r>
+              <a:rPr lang="en-US" sz="1400" dirty="0">
+                <a:solidFill>
+                  <a:srgbClr val="2B3440"/>
+                </a:solidFill>
+              </a:rPr>
+              <a:t> (RESTRICT) or </a:t>
+            </a:r>
+            <a:pPr indent="0" marL="0">
+              <a:buNone/>
+            </a:pPr>
+            <a:r>
+              <a:rPr lang="en-US" sz="1400" dirty="0">
+                <a:solidFill>
+                  <a:srgbClr val="2B3440"/>
+                </a:solidFill>
+                <a:latin typeface="Courier New" pitchFamily="34" charset="0"/>
+                <a:ea typeface="Courier New" pitchFamily="34" charset="-122"/>
+                <a:cs typeface="Courier New" pitchFamily="34" charset="-120"/>
+              </a:rPr>
+              <a:t>SQLITE_CONSTRAINT_FOREIGNKEY</a:t>
+            </a:r>
+            <a:pPr indent="0" marL="0">
+              <a:buNone/>
+            </a:pPr>
+            <a:r>
+              <a:rPr lang="en-US" sz="1400" dirty="0">
+                <a:solidFill>
+                  <a:srgbClr val="2B3440"/>
+                </a:solidFill>
+              </a:rPr>
+              <a:t> (NO ACTION). Map both to 409.</a:t>
             </a:r>
             <a:endParaRPr lang="en-US" sz="1600" dirty="0"/>
           </a:p>

--- a/docs/ai-agent-training/slides/lab-companion-lite.pptx
+++ b/docs/ai-agent-training/slides/lab-companion-lite.pptx
@@ -22866,47 +22866,47 @@
 </file>
 
 <file path=ppt/theme/theme1.xml><?xml version="1.0" encoding="utf-8"?>
-<a:theme xmlns:a="http://schemas.openxmlformats.org/drawingml/2006/main" name="Office Theme">
+<a:theme xmlns:a="http://schemas.openxmlformats.org/drawingml/2006/main" name="Lab Companion">
   <a:themeElements>
-    <a:clrScheme name="Office">
+    <a:clrScheme name="Lab Companion">
       <a:dk1>
-        <a:sysClr val="windowText" lastClr="000000"/>
+        <a:srgbClr val="1B1F24"/>
       </a:dk1>
       <a:lt1>
-        <a:sysClr val="window" lastClr="FFFFFF"/>
+        <a:srgbClr val="FFFFFF"/>
       </a:lt1>
       <a:dk2>
-        <a:srgbClr val="44546A"/>
+        <a:srgbClr val="2B3440"/>
       </a:dk2>
       <a:lt2>
-        <a:srgbClr val="E7E6E6"/>
+        <a:srgbClr val="F1F5F9"/>
       </a:lt2>
       <a:accent1>
-        <a:srgbClr val="4472C4"/>
+        <a:srgbClr val="1FB68A"/>
       </a:accent1>
       <a:accent2>
-        <a:srgbClr val="ED7D31"/>
+        <a:srgbClr val="E69A28"/>
       </a:accent2>
       <a:accent3>
-        <a:srgbClr val="A5A5A5"/>
+        <a:srgbClr val="7C5CFF"/>
       </a:accent3>
       <a:accent4>
-        <a:srgbClr val="FFC000"/>
+        <a:srgbClr val="E5484D"/>
       </a:accent4>
       <a:accent5>
-        <a:srgbClr val="5B9BD5"/>
+        <a:srgbClr val="0F766E"/>
       </a:accent5>
       <a:accent6>
-        <a:srgbClr val="70AD47"/>
+        <a:srgbClr val="94A3B8"/>
       </a:accent6>
       <a:hlink>
-        <a:srgbClr val="0563C1"/>
+        <a:srgbClr val="0F766E"/>
       </a:hlink>
       <a:folHlink>
-        <a:srgbClr val="954F72"/>
+        <a:srgbClr val="7C5CFF"/>
       </a:folHlink>
     </a:clrScheme>
-    <a:fontScheme name="Office">
+    <a:fontScheme name="Lab Companion">
       <a:majorFont>
         <a:latin typeface="Calibri"/>
         <a:ea typeface=""/>
